--- a/nuwa-creation-myth-8slides.pptx
+++ b/nuwa-creation-myth-8slides.pptx
@@ -12,7 +12,6 @@
     <p:sldId id="260" r:id="rId11"/>
     <p:sldId id="261" r:id="rId12"/>
     <p:sldId id="262" r:id="rId13"/>
-    <p:sldId id="263" r:id="rId14"/>
   </p:sldIdLst>
   <p:sldSz cx="12191695" cy="6858000" type="screen4x3"/>
   <p:notesSz cx="6858000" cy="9144000"/>
@@ -3140,20 +3139,20 @@
       </p:sp>
       <p:sp>
         <p:nvSpPr>
-          <p:cNvPr id="3" name="Rounded Rectangle 2"/>
+          <p:cNvPr id="3" name="Rectangle 2"/>
           <p:cNvSpPr/>
           <p:nvPr/>
         </p:nvSpPr>
         <p:spPr>
           <a:xfrm>
-            <a:off x="3809847" y="1752600"/>
-            <a:ext cx="4572000" cy="457200"/>
-          </a:xfrm>
-          <a:prstGeom prst="roundRect">
+            <a:off x="6858000" y="457200"/>
+            <a:ext cx="5029200" cy="2926080"/>
+          </a:xfrm>
+          <a:prstGeom prst="rect">
             <a:avLst/>
           </a:prstGeom>
           <a:solidFill>
-            <a:srgbClr val="6B9080"/>
+            <a:srgbClr val="D8E6DF"/>
           </a:solidFill>
           <a:ln>
             <a:noFill/>
@@ -3183,14 +3182,143 @@
       </p:sp>
       <p:sp>
         <p:nvSpPr>
-          <p:cNvPr id="4" name="TextBox 3"/>
+          <p:cNvPr id="4" name="Rectangle 3"/>
+          <p:cNvSpPr/>
+          <p:nvPr/>
+        </p:nvSpPr>
+        <p:spPr>
+          <a:xfrm>
+            <a:off x="8046720" y="2560320"/>
+            <a:ext cx="3657600" cy="2286000"/>
+          </a:xfrm>
+          <a:prstGeom prst="rect">
+            <a:avLst/>
+          </a:prstGeom>
+          <a:solidFill>
+            <a:srgbClr val="E4EDE8"/>
+          </a:solidFill>
+          <a:ln>
+            <a:noFill/>
+          </a:ln>
+        </p:spPr>
+        <p:style>
+          <a:lnRef idx="1">
+            <a:schemeClr val="accent1"/>
+          </a:lnRef>
+          <a:fillRef idx="3">
+            <a:schemeClr val="accent1"/>
+          </a:fillRef>
+          <a:effectRef idx="2">
+            <a:schemeClr val="accent1"/>
+          </a:effectRef>
+          <a:fontRef idx="minor">
+            <a:schemeClr val="lt1"/>
+          </a:fontRef>
+        </p:style>
+        <p:txBody>
+          <a:bodyPr rtlCol="0" anchor="ctr"/>
+          <a:lstStyle/>
+          <a:p>
+            <a:pPr algn="ctr"/>
+          </a:p>
+        </p:txBody>
+      </p:sp>
+      <p:sp>
+        <p:nvSpPr>
+          <p:cNvPr id="5" name="Rectangle 4"/>
+          <p:cNvSpPr/>
+          <p:nvPr/>
+        </p:nvSpPr>
+        <p:spPr>
+          <a:xfrm>
+            <a:off x="274320" y="4572000"/>
+            <a:ext cx="4114800" cy="1828800"/>
+          </a:xfrm>
+          <a:prstGeom prst="rect">
+            <a:avLst/>
+          </a:prstGeom>
+          <a:solidFill>
+            <a:srgbClr val="D8E6DF"/>
+          </a:solidFill>
+          <a:ln>
+            <a:noFill/>
+          </a:ln>
+        </p:spPr>
+        <p:style>
+          <a:lnRef idx="1">
+            <a:schemeClr val="accent1"/>
+          </a:lnRef>
+          <a:fillRef idx="3">
+            <a:schemeClr val="accent1"/>
+          </a:fillRef>
+          <a:effectRef idx="2">
+            <a:schemeClr val="accent1"/>
+          </a:effectRef>
+          <a:fontRef idx="minor">
+            <a:schemeClr val="lt1"/>
+          </a:fontRef>
+        </p:style>
+        <p:txBody>
+          <a:bodyPr rtlCol="0" anchor="ctr"/>
+          <a:lstStyle/>
+          <a:p>
+            <a:pPr algn="ctr"/>
+          </a:p>
+        </p:txBody>
+      </p:sp>
+      <p:sp>
+        <p:nvSpPr>
+          <p:cNvPr id="6" name="Rectangle 5"/>
+          <p:cNvSpPr/>
+          <p:nvPr/>
+        </p:nvSpPr>
+        <p:spPr>
+          <a:xfrm>
+            <a:off x="548640" y="347472"/>
+            <a:ext cx="438912" cy="438912"/>
+          </a:xfrm>
+          <a:prstGeom prst="rect">
+            <a:avLst/>
+          </a:prstGeom>
+          <a:noFill/>
+          <a:ln w="25400">
+            <a:solidFill>
+              <a:srgbClr val="C83C23"/>
+            </a:solidFill>
+          </a:ln>
+        </p:spPr>
+        <p:style>
+          <a:lnRef idx="1">
+            <a:schemeClr val="accent1"/>
+          </a:lnRef>
+          <a:fillRef idx="3">
+            <a:schemeClr val="accent1"/>
+          </a:fillRef>
+          <a:effectRef idx="2">
+            <a:schemeClr val="accent1"/>
+          </a:effectRef>
+          <a:fontRef idx="minor">
+            <a:schemeClr val="lt1"/>
+          </a:fontRef>
+        </p:style>
+        <p:txBody>
+          <a:bodyPr rtlCol="0" anchor="ctr"/>
+          <a:lstStyle/>
+          <a:p>
+            <a:pPr algn="ctr"/>
+          </a:p>
+        </p:txBody>
+      </p:sp>
+      <p:sp>
+        <p:nvSpPr>
+          <p:cNvPr id="7" name="TextBox 6"/>
           <p:cNvSpPr txBox="1"/>
           <p:nvPr/>
         </p:nvSpPr>
         <p:spPr>
           <a:xfrm>
-            <a:off x="3809847" y="1798320"/>
-            <a:ext cx="4572000" cy="365760"/>
+            <a:off x="548640" y="347472"/>
+            <a:ext cx="438912" cy="438912"/>
           </a:xfrm>
           <a:prstGeom prst="rect">
             <a:avLst/>
@@ -3198,34 +3326,38 @@
           <a:noFill/>
         </p:spPr>
         <p:txBody>
-          <a:bodyPr wrap="none">
+          <a:bodyPr wrap="square" anchor="ctr">
             <a:spAutoFit/>
           </a:bodyPr>
           <a:lstStyle/>
           <a:p>
-            <a:pPr algn="l"/>
-            <a:r>
-              <a:rPr sz="1400" b="0">
-                <a:solidFill>
-                  <a:srgbClr val="FFFFFF"/>
-                </a:solidFill>
-                <a:latin typeface="Microsoft YaHei"/>
-              </a:rPr>
-              <a:t>七年级语文上册第六单元 · 第23课</a:t>
-            </a:r>
-          </a:p>
-        </p:txBody>
-      </p:sp>
-      <p:sp>
-        <p:nvSpPr>
-          <p:cNvPr id="5" name="TextBox 4"/>
+            <a:pPr algn="ctr">
+              <a:spcAft>
+                <a:spcPts val="300"/>
+              </a:spcAft>
+            </a:pPr>
+            <a:r>
+              <a:rPr sz="1100" b="1">
+                <a:solidFill>
+                  <a:srgbClr val="C83C23"/>
+                </a:solidFill>
+                <a:latin typeface="KaiTi"/>
+              </a:rPr>
+              <a:t>廿三</a:t>
+            </a:r>
+          </a:p>
+        </p:txBody>
+      </p:sp>
+      <p:sp>
+        <p:nvSpPr>
+          <p:cNvPr id="8" name="TextBox 7"/>
           <p:cNvSpPr txBox="1"/>
           <p:nvPr/>
         </p:nvSpPr>
         <p:spPr>
           <a:xfrm>
-            <a:off x="571500" y="2103120"/>
-            <a:ext cx="11048695" cy="640080"/>
+            <a:off x="548640" y="1371600"/>
+            <a:ext cx="7772400" cy="1371600"/>
           </a:xfrm>
           <a:prstGeom prst="rect">
             <a:avLst/>
@@ -3233,34 +3365,81 @@
           <a:noFill/>
         </p:spPr>
         <p:txBody>
-          <a:bodyPr wrap="none">
+          <a:bodyPr wrap="square" anchor="t">
             <a:spAutoFit/>
           </a:bodyPr>
           <a:lstStyle/>
           <a:p>
-            <a:pPr algn="l"/>
-            <a:r>
-              <a:rPr sz="4400" b="1">
-                <a:solidFill>
-                  <a:srgbClr val="2B2D42"/>
-                </a:solidFill>
-                <a:latin typeface="Microsoft YaHei"/>
-              </a:rPr>
-              <a:t>《女娲造人》</a:t>
-            </a:r>
-          </a:p>
-        </p:txBody>
-      </p:sp>
-      <p:sp>
-        <p:nvSpPr>
-          <p:cNvPr id="6" name="TextBox 5"/>
+            <a:pPr algn="l">
+              <a:spcAft>
+                <a:spcPts val="300"/>
+              </a:spcAft>
+            </a:pPr>
+            <a:r>
+              <a:rPr sz="5200" b="1">
+                <a:solidFill>
+                  <a:srgbClr val="1E1E1E"/>
+                </a:solidFill>
+                <a:latin typeface="KaiTi"/>
+              </a:rPr>
+              <a:t>女娲造人</a:t>
+            </a:r>
+          </a:p>
+        </p:txBody>
+      </p:sp>
+      <p:sp>
+        <p:nvSpPr>
+          <p:cNvPr id="9" name="Rectangle 8"/>
+          <p:cNvSpPr/>
+          <p:nvPr/>
+        </p:nvSpPr>
+        <p:spPr>
+          <a:xfrm>
+            <a:off x="548640" y="2880360"/>
+            <a:ext cx="2560320" cy="502920"/>
+          </a:xfrm>
+          <a:prstGeom prst="rect">
+            <a:avLst/>
+          </a:prstGeom>
+          <a:solidFill>
+            <a:srgbClr val="4A7C6F"/>
+          </a:solidFill>
+          <a:ln>
+            <a:noFill/>
+          </a:ln>
+        </p:spPr>
+        <p:style>
+          <a:lnRef idx="1">
+            <a:schemeClr val="accent1"/>
+          </a:lnRef>
+          <a:fillRef idx="3">
+            <a:schemeClr val="accent1"/>
+          </a:fillRef>
+          <a:effectRef idx="2">
+            <a:schemeClr val="accent1"/>
+          </a:effectRef>
+          <a:fontRef idx="minor">
+            <a:schemeClr val="lt1"/>
+          </a:fontRef>
+        </p:style>
+        <p:txBody>
+          <a:bodyPr rtlCol="0" anchor="ctr"/>
+          <a:lstStyle/>
+          <a:p>
+            <a:pPr algn="ctr"/>
+          </a:p>
+        </p:txBody>
+      </p:sp>
+      <p:sp>
+        <p:nvSpPr>
+          <p:cNvPr id="10" name="TextBox 9"/>
           <p:cNvSpPr txBox="1"/>
           <p:nvPr/>
         </p:nvSpPr>
         <p:spPr>
           <a:xfrm>
-            <a:off x="571500" y="2926080"/>
-            <a:ext cx="11048695" cy="640080"/>
+            <a:off x="685800" y="2926080"/>
+            <a:ext cx="3657600" cy="502920"/>
           </a:xfrm>
           <a:prstGeom prst="rect">
             <a:avLst/>
@@ -3268,34 +3447,38 @@
           <a:noFill/>
         </p:spPr>
         <p:txBody>
-          <a:bodyPr wrap="none">
+          <a:bodyPr wrap="square" anchor="t">
             <a:spAutoFit/>
           </a:bodyPr>
           <a:lstStyle/>
           <a:p>
-            <a:pPr algn="l"/>
-            <a:r>
-              <a:rPr sz="2200" b="0">
-                <a:solidFill>
-                  <a:srgbClr val="6B9080"/>
-                </a:solidFill>
-                <a:latin typeface="Microsoft YaHei"/>
-              </a:rPr>
-              <a:t>远古的设想与生命的赞歌</a:t>
-            </a:r>
-          </a:p>
-        </p:txBody>
-      </p:sp>
-      <p:sp>
-        <p:nvSpPr>
-          <p:cNvPr id="7" name="TextBox 6"/>
+            <a:pPr algn="l">
+              <a:spcAft>
+                <a:spcPts val="300"/>
+              </a:spcAft>
+            </a:pPr>
+            <a:r>
+              <a:rPr sz="2400" b="1">
+                <a:solidFill>
+                  <a:srgbClr val="4A7C6F"/>
+                </a:solidFill>
+                <a:latin typeface="KaiTi"/>
+              </a:rPr>
+              <a:t>创造与生命</a:t>
+            </a:r>
+          </a:p>
+        </p:txBody>
+      </p:sp>
+      <p:sp>
+        <p:nvSpPr>
+          <p:cNvPr id="11" name="TextBox 10"/>
           <p:cNvSpPr txBox="1"/>
           <p:nvPr/>
         </p:nvSpPr>
         <p:spPr>
           <a:xfrm>
-            <a:off x="571500" y="3657600"/>
-            <a:ext cx="11048695" cy="640080"/>
+            <a:off x="548640" y="3657600"/>
+            <a:ext cx="6400800" cy="1097280"/>
           </a:xfrm>
           <a:prstGeom prst="rect">
             <a:avLst/>
@@ -3303,20 +3486,161 @@
           <a:noFill/>
         </p:spPr>
         <p:txBody>
-          <a:bodyPr wrap="none">
+          <a:bodyPr wrap="square" anchor="t">
             <a:spAutoFit/>
           </a:bodyPr>
           <a:lstStyle/>
           <a:p>
-            <a:pPr algn="l"/>
-            <a:r>
-              <a:rPr sz="1800" b="0">
-                <a:solidFill>
-                  <a:srgbClr val="6C757D"/>
+            <a:pPr algn="l">
+              <a:spcAft>
+                <a:spcPts val="300"/>
+              </a:spcAft>
+            </a:pPr>
+            <a:r>
+              <a:rPr sz="1400" b="0">
+                <a:solidFill>
+                  <a:srgbClr val="5A6A62"/>
                 </a:solidFill>
                 <a:latin typeface="Microsoft YaHei"/>
               </a:rPr>
-              <a:t>改写：袁珂</a:t>
+              <a:t>统编版 · 七年级上册第六单元第23课</a:t>
+            </a:r>
+          </a:p>
+          <a:p>
+            <a:pPr algn="l">
+              <a:spcAft>
+                <a:spcPts val="300"/>
+              </a:spcAft>
+            </a:pPr>
+            <a:r>
+              <a:rPr sz="1400" b="0">
+                <a:solidFill>
+                  <a:srgbClr val="5A6A62"/>
+                </a:solidFill>
+                <a:latin typeface="Microsoft YaHei"/>
+              </a:rPr>
+              <a:t>想象力博物馆 · 策展主题：创造与生命</a:t>
+            </a:r>
+          </a:p>
+        </p:txBody>
+      </p:sp>
+      <p:sp>
+        <p:nvSpPr>
+          <p:cNvPr id="12" name="Rectangle 11"/>
+          <p:cNvSpPr/>
+          <p:nvPr/>
+        </p:nvSpPr>
+        <p:spPr>
+          <a:xfrm>
+            <a:off x="548640" y="6035040"/>
+            <a:ext cx="11094415" cy="9144"/>
+          </a:xfrm>
+          <a:prstGeom prst="rect">
+            <a:avLst/>
+          </a:prstGeom>
+          <a:solidFill>
+            <a:srgbClr val="5A6A62"/>
+          </a:solidFill>
+          <a:ln>
+            <a:noFill/>
+          </a:ln>
+        </p:spPr>
+        <p:style>
+          <a:lnRef idx="1">
+            <a:schemeClr val="accent1"/>
+          </a:lnRef>
+          <a:fillRef idx="3">
+            <a:schemeClr val="accent1"/>
+          </a:fillRef>
+          <a:effectRef idx="2">
+            <a:schemeClr val="accent1"/>
+          </a:effectRef>
+          <a:fontRef idx="minor">
+            <a:schemeClr val="lt1"/>
+          </a:fontRef>
+        </p:style>
+        <p:txBody>
+          <a:bodyPr rtlCol="0" anchor="ctr"/>
+          <a:lstStyle/>
+          <a:p>
+            <a:pPr algn="ctr"/>
+          </a:p>
+        </p:txBody>
+      </p:sp>
+      <p:sp>
+        <p:nvSpPr>
+          <p:cNvPr id="13" name="TextBox 12"/>
+          <p:cNvSpPr txBox="1"/>
+          <p:nvPr/>
+        </p:nvSpPr>
+        <p:spPr>
+          <a:xfrm>
+            <a:off x="548640" y="5971032"/>
+            <a:ext cx="11094415" cy="201168"/>
+          </a:xfrm>
+          <a:prstGeom prst="rect">
+            <a:avLst/>
+          </a:prstGeom>
+          <a:noFill/>
+        </p:spPr>
+        <p:txBody>
+          <a:bodyPr wrap="square" anchor="t">
+            <a:spAutoFit/>
+          </a:bodyPr>
+          <a:lstStyle/>
+          <a:p>
+            <a:pPr algn="ctr">
+              <a:spcAft>
+                <a:spcPts val="300"/>
+              </a:spcAft>
+            </a:pPr>
+            <a:r>
+              <a:rPr sz="900" b="0">
+                <a:solidFill>
+                  <a:srgbClr val="5A6A62"/>
+                </a:solidFill>
+                <a:latin typeface="Microsoft YaHei"/>
+              </a:rPr>
+              <a:t>～ ～ ～ ～ ～ ～ ～ ～ ～ ～ ～ ～</a:t>
+            </a:r>
+          </a:p>
+        </p:txBody>
+      </p:sp>
+      <p:sp>
+        <p:nvSpPr>
+          <p:cNvPr id="14" name="TextBox 13"/>
+          <p:cNvSpPr txBox="1"/>
+          <p:nvPr/>
+        </p:nvSpPr>
+        <p:spPr>
+          <a:xfrm>
+            <a:off x="548640" y="6217920"/>
+            <a:ext cx="11094415" cy="320040"/>
+          </a:xfrm>
+          <a:prstGeom prst="rect">
+            <a:avLst/>
+          </a:prstGeom>
+          <a:noFill/>
+        </p:spPr>
+        <p:txBody>
+          <a:bodyPr wrap="square" anchor="t">
+            <a:spAutoFit/>
+          </a:bodyPr>
+          <a:lstStyle/>
+          <a:p>
+            <a:pPr algn="ctr">
+              <a:spcAft>
+                <a:spcPts val="300"/>
+              </a:spcAft>
+            </a:pPr>
+            <a:r>
+              <a:rPr sz="1300" b="0">
+                <a:solidFill>
+                  <a:srgbClr val="4A7C6F"/>
+                </a:solidFill>
+                <a:latin typeface="Microsoft YaHei"/>
+              </a:rPr>
+              <a:t>古籍为骨 · 想象为肉 · 情感为魂</a:t>
             </a:r>
           </a:p>
         </p:txBody>
@@ -3384,57 +3708,23 @@
       </p:sp>
       <p:sp>
         <p:nvSpPr>
-          <p:cNvPr id="3" name="TextBox 2"/>
-          <p:cNvSpPr txBox="1"/>
-          <p:nvPr/>
-        </p:nvSpPr>
-        <p:spPr>
-          <a:xfrm>
-            <a:off x="571500" y="381000"/>
-            <a:ext cx="8286521" cy="411480"/>
+          <p:cNvPr id="3" name="Rectangle 2"/>
+          <p:cNvSpPr/>
+          <p:nvPr/>
+        </p:nvSpPr>
+        <p:spPr>
+          <a:xfrm>
+            <a:off x="548640" y="347472"/>
+            <a:ext cx="365760" cy="365760"/>
           </a:xfrm>
           <a:prstGeom prst="rect">
             <a:avLst/>
           </a:prstGeom>
           <a:noFill/>
-        </p:spPr>
-        <p:txBody>
-          <a:bodyPr wrap="none">
-            <a:spAutoFit/>
-          </a:bodyPr>
-          <a:lstStyle/>
-          <a:p>
-            <a:r>
-              <a:rPr sz="2800" b="1">
-                <a:solidFill>
-                  <a:srgbClr val="6B9080"/>
-                </a:solidFill>
-                <a:latin typeface="Microsoft YaHei"/>
-              </a:rPr>
-              <a:t>古今文本对比：从梗概到神话</a:t>
-            </a:r>
-          </a:p>
-        </p:txBody>
-      </p:sp>
-      <p:sp>
-        <p:nvSpPr>
-          <p:cNvPr id="4" name="Rectangle 3"/>
-          <p:cNvSpPr/>
-          <p:nvPr/>
-        </p:nvSpPr>
-        <p:spPr>
-          <a:xfrm>
-            <a:off x="571500" y="838200"/>
-            <a:ext cx="11048695" cy="25400"/>
-          </a:xfrm>
-          <a:prstGeom prst="rect">
-            <a:avLst/>
-          </a:prstGeom>
-          <a:solidFill>
-            <a:srgbClr val="E2E2D9"/>
-          </a:solidFill>
-          <a:ln>
-            <a:noFill/>
+          <a:ln w="25400">
+            <a:solidFill>
+              <a:srgbClr val="C83C23"/>
+            </a:solidFill>
           </a:ln>
         </p:spPr>
         <p:style>
@@ -3461,14 +3751,53 @@
       </p:sp>
       <p:sp>
         <p:nvSpPr>
+          <p:cNvPr id="4" name="TextBox 3"/>
+          <p:cNvSpPr txBox="1"/>
+          <p:nvPr/>
+        </p:nvSpPr>
+        <p:spPr>
+          <a:xfrm>
+            <a:off x="548640" y="347472"/>
+            <a:ext cx="365760" cy="365760"/>
+          </a:xfrm>
+          <a:prstGeom prst="rect">
+            <a:avLst/>
+          </a:prstGeom>
+          <a:noFill/>
+        </p:spPr>
+        <p:txBody>
+          <a:bodyPr wrap="square" anchor="ctr">
+            <a:spAutoFit/>
+          </a:bodyPr>
+          <a:lstStyle/>
+          <a:p>
+            <a:pPr algn="ctr">
+              <a:spcAft>
+                <a:spcPts val="300"/>
+              </a:spcAft>
+            </a:pPr>
+            <a:r>
+              <a:rPr sz="1000" b="1">
+                <a:solidFill>
+                  <a:srgbClr val="C83C23"/>
+                </a:solidFill>
+                <a:latin typeface="KaiTi"/>
+              </a:rPr>
+              <a:t>02</a:t>
+            </a:r>
+          </a:p>
+        </p:txBody>
+      </p:sp>
+      <p:sp>
+        <p:nvSpPr>
           <p:cNvPr id="5" name="TextBox 4"/>
           <p:cNvSpPr txBox="1"/>
           <p:nvPr/>
         </p:nvSpPr>
         <p:spPr>
           <a:xfrm>
-            <a:off x="9631429" y="426720"/>
-            <a:ext cx="1097280" cy="365760"/>
+            <a:off x="1024128" y="347472"/>
+            <a:ext cx="7766090" cy="365760"/>
           </a:xfrm>
           <a:prstGeom prst="rect">
             <a:avLst/>
@@ -3476,44 +3805,86 @@
           <a:noFill/>
         </p:spPr>
         <p:txBody>
-          <a:bodyPr wrap="none">
+          <a:bodyPr wrap="square" anchor="t">
             <a:spAutoFit/>
           </a:bodyPr>
           <a:lstStyle/>
           <a:p>
-            <a:r>
-              <a:rPr sz="1600" b="1">
-                <a:solidFill>
-                  <a:srgbClr val="6C757D"/>
+            <a:pPr algn="l">
+              <a:spcAft>
+                <a:spcPts val="300"/>
+              </a:spcAft>
+            </a:pPr>
+            <a:r>
+              <a:rPr sz="2000" b="1">
+                <a:solidFill>
+                  <a:srgbClr val="1E1E1E"/>
+                </a:solidFill>
+                <a:latin typeface="KaiTi"/>
+              </a:rPr>
+              <a:t>文学常识</a:t>
+            </a:r>
+          </a:p>
+        </p:txBody>
+      </p:sp>
+      <p:sp>
+        <p:nvSpPr>
+          <p:cNvPr id="6" name="TextBox 5"/>
+          <p:cNvSpPr txBox="1"/>
+          <p:nvPr/>
+        </p:nvSpPr>
+        <p:spPr>
+          <a:xfrm>
+            <a:off x="8869451" y="347472"/>
+            <a:ext cx="2773603" cy="320040"/>
+          </a:xfrm>
+          <a:prstGeom prst="rect">
+            <a:avLst/>
+          </a:prstGeom>
+          <a:noFill/>
+        </p:spPr>
+        <p:txBody>
+          <a:bodyPr wrap="square" anchor="t">
+            <a:spAutoFit/>
+          </a:bodyPr>
+          <a:lstStyle/>
+          <a:p>
+            <a:pPr algn="r">
+              <a:spcAft>
+                <a:spcPts val="300"/>
+              </a:spcAft>
+            </a:pPr>
+            <a:r>
+              <a:rPr sz="1100" b="0">
+                <a:solidFill>
+                  <a:srgbClr val="5A6A62"/>
                 </a:solidFill>
                 <a:latin typeface="Microsoft YaHei"/>
               </a:rPr>
-              <a:t>02 / 08</a:t>
-            </a:r>
-          </a:p>
-        </p:txBody>
-      </p:sp>
-      <p:sp>
-        <p:nvSpPr>
-          <p:cNvPr id="6" name="Rounded Rectangle 5"/>
+              <a:t>卷 2/7</a:t>
+            </a:r>
+          </a:p>
+        </p:txBody>
+      </p:sp>
+      <p:sp>
+        <p:nvSpPr>
+          <p:cNvPr id="7" name="Rectangle 6"/>
           <p:cNvSpPr/>
           <p:nvPr/>
         </p:nvSpPr>
         <p:spPr>
           <a:xfrm>
-            <a:off x="571500" y="1066800"/>
-            <a:ext cx="5432907" cy="4389120"/>
-          </a:xfrm>
-          <a:prstGeom prst="roundRect">
+            <a:off x="548640" y="768096"/>
+            <a:ext cx="11094415" cy="9144"/>
+          </a:xfrm>
+          <a:prstGeom prst="rect">
             <a:avLst/>
           </a:prstGeom>
           <a:solidFill>
-            <a:srgbClr val="FFFFFF"/>
+            <a:srgbClr val="5A6A62"/>
           </a:solidFill>
-          <a:ln w="12700">
-            <a:solidFill>
-              <a:srgbClr val="E2E2D9"/>
-            </a:solidFill>
+          <a:ln>
+            <a:noFill/>
           </a:ln>
         </p:spPr>
         <p:style>
@@ -3540,20 +3911,59 @@
       </p:sp>
       <p:sp>
         <p:nvSpPr>
-          <p:cNvPr id="7" name="Rectangle 6"/>
+          <p:cNvPr id="8" name="TextBox 7"/>
+          <p:cNvSpPr txBox="1"/>
+          <p:nvPr/>
+        </p:nvSpPr>
+        <p:spPr>
+          <a:xfrm>
+            <a:off x="548640" y="704088"/>
+            <a:ext cx="11094415" cy="201168"/>
+          </a:xfrm>
+          <a:prstGeom prst="rect">
+            <a:avLst/>
+          </a:prstGeom>
+          <a:noFill/>
+        </p:spPr>
+        <p:txBody>
+          <a:bodyPr wrap="square" anchor="t">
+            <a:spAutoFit/>
+          </a:bodyPr>
+          <a:lstStyle/>
+          <a:p>
+            <a:pPr algn="ctr">
+              <a:spcAft>
+                <a:spcPts val="300"/>
+              </a:spcAft>
+            </a:pPr>
+            <a:r>
+              <a:rPr sz="900" b="0">
+                <a:solidFill>
+                  <a:srgbClr val="5A6A62"/>
+                </a:solidFill>
+                <a:latin typeface="Microsoft YaHei"/>
+              </a:rPr>
+              <a:t>～ ～ ～ ～ ～ ～ ～ ～ ～ ～ ～ ～</a:t>
+            </a:r>
+          </a:p>
+        </p:txBody>
+      </p:sp>
+      <p:sp>
+        <p:nvSpPr>
+          <p:cNvPr id="9" name="Rectangle 8"/>
           <p:cNvSpPr/>
           <p:nvPr/>
         </p:nvSpPr>
         <p:spPr>
           <a:xfrm>
-            <a:off x="708660" y="1322832"/>
-            <a:ext cx="50800" cy="320040"/>
+            <a:off x="548640" y="658368"/>
+            <a:ext cx="5455767" cy="5349240"/>
           </a:xfrm>
           <a:prstGeom prst="rect">
             <a:avLst/>
           </a:prstGeom>
           <a:solidFill>
-            <a:srgbClr val="E09F68"/>
+            <a:srgbClr val="E4EDE8"/>
           </a:solidFill>
           <a:ln>
             <a:noFill/>
@@ -3583,112 +3993,23 @@
       </p:sp>
       <p:sp>
         <p:nvSpPr>
-          <p:cNvPr id="8" name="TextBox 7"/>
-          <p:cNvSpPr txBox="1"/>
-          <p:nvPr/>
-        </p:nvSpPr>
-        <p:spPr>
-          <a:xfrm>
-            <a:off x="827532" y="1231392"/>
-            <a:ext cx="5067147" cy="4114800"/>
-          </a:xfrm>
-          <a:prstGeom prst="rect">
-            <a:avLst/>
-          </a:prstGeom>
-          <a:noFill/>
-        </p:spPr>
-        <p:txBody>
-          <a:bodyPr wrap="square">
-            <a:spAutoFit/>
-          </a:bodyPr>
-          <a:lstStyle/>
-          <a:p>
-            <a:pPr>
-              <a:spcAft>
-                <a:spcPts val="1000"/>
-              </a:spcAft>
-            </a:pPr>
-            <a:r>
-              <a:rPr sz="2000" b="1">
-                <a:solidFill>
-                  <a:srgbClr val="6B9080"/>
-                </a:solidFill>
-                <a:latin typeface="Microsoft YaHei"/>
-              </a:rPr>
-              <a:t>古籍《风俗通》原典</a:t>
-            </a:r>
-          </a:p>
-          <a:p>
-            <a:pPr>
-              <a:spcAft>
-                <a:spcPts val="600"/>
-              </a:spcAft>
-            </a:pPr>
-            <a:r>
-              <a:rPr sz="1600" b="0">
-                <a:solidFill>
-                  <a:srgbClr val="2B2D42"/>
-                </a:solidFill>
-                <a:latin typeface="Microsoft YaHei"/>
-              </a:rPr>
-              <a:t>“俗说天地开辟，未有人民，女娲抟黄土作人。剧务，力不暇供，乃引绳于泥中，举以为人。”</a:t>
-            </a:r>
-          </a:p>
-          <a:p>
-            <a:pPr>
-              <a:spcAft>
-                <a:spcPts val="600"/>
-              </a:spcAft>
-            </a:pPr>
-            <a:r>
-              <a:rPr sz="1600" b="0">
-                <a:solidFill>
-                  <a:srgbClr val="2B2D42"/>
-                </a:solidFill>
-                <a:latin typeface="Microsoft YaHei"/>
-              </a:rPr>
-              <a:t/>
-            </a:r>
-          </a:p>
-          <a:p>
-            <a:pPr>
-              <a:spcAft>
-                <a:spcPts val="600"/>
-              </a:spcAft>
-            </a:pPr>
-            <a:r>
-              <a:rPr sz="1600" b="0">
-                <a:solidFill>
-                  <a:srgbClr val="2B2D42"/>
-                </a:solidFill>
-                <a:latin typeface="Microsoft YaHei"/>
-              </a:rPr>
-              <a:t>特点：语言极简，仅记录基本骨架，无情绪与细节描述。</a:t>
-            </a:r>
-          </a:p>
-        </p:txBody>
-      </p:sp>
-      <p:sp>
-        <p:nvSpPr>
-          <p:cNvPr id="9" name="Rounded Rectangle 8"/>
+          <p:cNvPr id="10" name="Rectangle 9"/>
           <p:cNvSpPr/>
           <p:nvPr/>
         </p:nvSpPr>
         <p:spPr>
           <a:xfrm>
-            <a:off x="6187287" y="1066800"/>
-            <a:ext cx="5432907" cy="4389120"/>
-          </a:xfrm>
-          <a:prstGeom prst="roundRect">
+            <a:off x="548640" y="658368"/>
+            <a:ext cx="45720" cy="5349240"/>
+          </a:xfrm>
+          <a:prstGeom prst="rect">
             <a:avLst/>
           </a:prstGeom>
           <a:solidFill>
-            <a:srgbClr val="FFFFFF"/>
+            <a:srgbClr val="4A7C6F"/>
           </a:solidFill>
-          <a:ln w="12700">
-            <a:solidFill>
-              <a:srgbClr val="E2E2D9"/>
-            </a:solidFill>
+          <a:ln>
+            <a:noFill/>
           </a:ln>
         </p:spPr>
         <p:style>
@@ -3715,23 +4036,160 @@
       </p:sp>
       <p:sp>
         <p:nvSpPr>
-          <p:cNvPr id="10" name="Rectangle 9"/>
+          <p:cNvPr id="11" name="TextBox 10"/>
+          <p:cNvSpPr txBox="1"/>
+          <p:nvPr/>
+        </p:nvSpPr>
+        <p:spPr>
+          <a:xfrm>
+            <a:off x="694944" y="768096"/>
+            <a:ext cx="5254599" cy="5184648"/>
+          </a:xfrm>
+          <a:prstGeom prst="rect">
+            <a:avLst/>
+          </a:prstGeom>
+          <a:noFill/>
+        </p:spPr>
+        <p:txBody>
+          <a:bodyPr wrap="square" anchor="t">
+            <a:spAutoFit/>
+          </a:bodyPr>
+          <a:lstStyle/>
+          <a:p>
+            <a:pPr algn="l">
+              <a:spcAft>
+                <a:spcPts val="300"/>
+              </a:spcAft>
+            </a:pPr>
+            <a:r>
+              <a:rPr sz="1600" b="1">
+                <a:solidFill>
+                  <a:srgbClr val="4A7C6F"/>
+                </a:solidFill>
+                <a:latin typeface="KaiTi"/>
+              </a:rPr>
+              <a:t>作者与文体</a:t>
+            </a:r>
+          </a:p>
+          <a:p>
+            <a:pPr algn="l">
+              <a:spcAft>
+                <a:spcPts val="300"/>
+              </a:spcAft>
+            </a:pPr>
+            <a:r>
+              <a:rPr sz="600" b="0">
+                <a:solidFill>
+                  <a:srgbClr val="1E1E1E"/>
+                </a:solidFill>
+                <a:latin typeface="Microsoft YaHei"/>
+              </a:rPr>
+              <a:t/>
+            </a:r>
+          </a:p>
+          <a:p>
+            <a:pPr algn="l">
+              <a:spcAft>
+                <a:spcPts val="300"/>
+              </a:spcAft>
+            </a:pPr>
+            <a:r>
+              <a:rPr sz="1300" b="1">
+                <a:solidFill>
+                  <a:srgbClr val="C83C23"/>
+                </a:solidFill>
+                <a:latin typeface="Microsoft YaHei"/>
+              </a:rPr>
+              <a:t>作者</a:t>
+            </a:r>
+          </a:p>
+          <a:p>
+            <a:pPr algn="l">
+              <a:spcAft>
+                <a:spcPts val="300"/>
+              </a:spcAft>
+            </a:pPr>
+            <a:r>
+              <a:rPr sz="1400" b="0">
+                <a:solidFill>
+                  <a:srgbClr val="1E1E1E"/>
+                </a:solidFill>
+                <a:latin typeface="Microsoft YaHei"/>
+              </a:rPr>
+              <a:t>袁珂（现代作家、神话研究专家）</a:t>
+            </a:r>
+          </a:p>
+          <a:p>
+            <a:pPr algn="l">
+              <a:spcAft>
+                <a:spcPts val="300"/>
+              </a:spcAft>
+            </a:pPr>
+            <a:r>
+              <a:rPr sz="600" b="0">
+                <a:solidFill>
+                  <a:srgbClr val="1E1E1E"/>
+                </a:solidFill>
+                <a:latin typeface="Microsoft YaHei"/>
+              </a:rPr>
+              <a:t/>
+            </a:r>
+          </a:p>
+          <a:p>
+            <a:pPr algn="l">
+              <a:spcAft>
+                <a:spcPts val="300"/>
+              </a:spcAft>
+            </a:pPr>
+            <a:r>
+              <a:rPr sz="1300" b="1">
+                <a:solidFill>
+                  <a:srgbClr val="C83C23"/>
+                </a:solidFill>
+                <a:latin typeface="Microsoft YaHei"/>
+              </a:rPr>
+              <a:t>文体</a:t>
+            </a:r>
+          </a:p>
+          <a:p>
+            <a:pPr algn="l">
+              <a:spcAft>
+                <a:spcPts val="300"/>
+              </a:spcAft>
+            </a:pPr>
+            <a:r>
+              <a:rPr sz="1400" b="0">
+                <a:solidFill>
+                  <a:srgbClr val="1E1E1E"/>
+                </a:solidFill>
+                <a:latin typeface="Microsoft YaHei"/>
+              </a:rPr>
+              <a:t>神话——用想象解释自然与人类起源</a:t>
+            </a:r>
+          </a:p>
+        </p:txBody>
+      </p:sp>
+      <p:sp>
+        <p:nvSpPr>
+          <p:cNvPr id="12" name="Rectangle 11"/>
           <p:cNvSpPr/>
           <p:nvPr/>
         </p:nvSpPr>
         <p:spPr>
           <a:xfrm>
-            <a:off x="6324447" y="1322832"/>
-            <a:ext cx="50800" cy="320040"/>
+            <a:off x="6187287" y="658368"/>
+            <a:ext cx="5455767" cy="5349240"/>
           </a:xfrm>
           <a:prstGeom prst="rect">
             <a:avLst/>
           </a:prstGeom>
           <a:solidFill>
-            <a:srgbClr val="E09F68"/>
+            <a:srgbClr val="F4F1EA"/>
           </a:solidFill>
-          <a:ln>
-            <a:noFill/>
+          <a:ln w="19050">
+            <a:solidFill>
+              <a:srgbClr val="4A7C6F"/>
+            </a:solidFill>
           </a:ln>
         </p:spPr>
         <p:style>
@@ -3758,14 +4216,57 @@
       </p:sp>
       <p:sp>
         <p:nvSpPr>
-          <p:cNvPr id="11" name="TextBox 10"/>
+          <p:cNvPr id="13" name="Rectangle 12"/>
+          <p:cNvSpPr/>
+          <p:nvPr/>
+        </p:nvSpPr>
+        <p:spPr>
+          <a:xfrm>
+            <a:off x="6187287" y="658368"/>
+            <a:ext cx="45720" cy="5349240"/>
+          </a:xfrm>
+          <a:prstGeom prst="rect">
+            <a:avLst/>
+          </a:prstGeom>
+          <a:solidFill>
+            <a:srgbClr val="4A7C6F"/>
+          </a:solidFill>
+          <a:ln>
+            <a:noFill/>
+          </a:ln>
+        </p:spPr>
+        <p:style>
+          <a:lnRef idx="1">
+            <a:schemeClr val="accent1"/>
+          </a:lnRef>
+          <a:fillRef idx="3">
+            <a:schemeClr val="accent1"/>
+          </a:fillRef>
+          <a:effectRef idx="2">
+            <a:schemeClr val="accent1"/>
+          </a:effectRef>
+          <a:fontRef idx="minor">
+            <a:schemeClr val="lt1"/>
+          </a:fontRef>
+        </p:style>
+        <p:txBody>
+          <a:bodyPr rtlCol="0" anchor="ctr"/>
+          <a:lstStyle/>
+          <a:p>
+            <a:pPr algn="ctr"/>
+          </a:p>
+        </p:txBody>
+      </p:sp>
+      <p:sp>
+        <p:nvSpPr>
+          <p:cNvPr id="14" name="TextBox 13"/>
           <p:cNvSpPr txBox="1"/>
           <p:nvPr/>
         </p:nvSpPr>
         <p:spPr>
           <a:xfrm>
-            <a:off x="6443319" y="1231392"/>
-            <a:ext cx="5067147" cy="4114800"/>
+            <a:off x="6333591" y="768096"/>
+            <a:ext cx="5254599" cy="5184648"/>
           </a:xfrm>
           <a:prstGeom prst="rect">
             <a:avLst/>
@@ -3773,104 +4274,120 @@
           <a:noFill/>
         </p:spPr>
         <p:txBody>
-          <a:bodyPr wrap="square">
+          <a:bodyPr wrap="square" anchor="t">
             <a:spAutoFit/>
           </a:bodyPr>
           <a:lstStyle/>
           <a:p>
-            <a:pPr>
-              <a:spcAft>
-                <a:spcPts val="1000"/>
-              </a:spcAft>
-            </a:pPr>
-            <a:r>
-              <a:rPr sz="2000" b="1">
-                <a:solidFill>
-                  <a:srgbClr val="6B9080"/>
+            <a:pPr algn="l">
+              <a:spcAft>
+                <a:spcPts val="300"/>
+              </a:spcAft>
+            </a:pPr>
+            <a:r>
+              <a:rPr sz="1600" b="1">
+                <a:solidFill>
+                  <a:srgbClr val="4A7C6F"/>
+                </a:solidFill>
+                <a:latin typeface="KaiTi"/>
+              </a:rPr>
+              <a:t>创作特征</a:t>
+            </a:r>
+          </a:p>
+          <a:p>
+            <a:pPr algn="l">
+              <a:spcAft>
+                <a:spcPts val="300"/>
+              </a:spcAft>
+            </a:pPr>
+            <a:r>
+              <a:rPr sz="600" b="0">
+                <a:solidFill>
+                  <a:srgbClr val="1E1E1E"/>
                 </a:solidFill>
                 <a:latin typeface="Microsoft YaHei"/>
               </a:rPr>
-              <a:t>袁珂改编的现代神话</a:t>
-            </a:r>
-          </a:p>
-          <a:p>
-            <a:pPr>
-              <a:spcAft>
-                <a:spcPts val="600"/>
-              </a:spcAft>
-            </a:pPr>
-            <a:r>
-              <a:rPr sz="1600" b="0">
-                <a:solidFill>
-                  <a:srgbClr val="2B2D42"/>
+              <a:t/>
+            </a:r>
+          </a:p>
+          <a:p>
+            <a:pPr algn="l">
+              <a:spcAft>
+                <a:spcPts val="300"/>
+              </a:spcAft>
+            </a:pPr>
+            <a:r>
+              <a:rPr sz="1300" b="1">
+                <a:solidFill>
+                  <a:srgbClr val="C83C23"/>
                 </a:solidFill>
                 <a:latin typeface="Microsoft YaHei"/>
               </a:rPr>
-              <a:t>• 增加了女娲池边孤独的心理描绘。</a:t>
-            </a:r>
-          </a:p>
-          <a:p>
-            <a:pPr>
-              <a:spcAft>
-                <a:spcPts val="600"/>
-              </a:spcAft>
-            </a:pPr>
-            <a:r>
-              <a:rPr sz="1600" b="0">
-                <a:solidFill>
-                  <a:srgbClr val="2B2D42"/>
+              <a:t>改写特点</a:t>
+            </a:r>
+          </a:p>
+          <a:p>
+            <a:pPr algn="l">
+              <a:spcAft>
+                <a:spcPts val="300"/>
+              </a:spcAft>
+            </a:pPr>
+            <a:r>
+              <a:rPr sz="1400" b="0">
+                <a:solidFill>
+                  <a:srgbClr val="1E1E1E"/>
                 </a:solidFill>
                 <a:latin typeface="Microsoft YaHei"/>
               </a:rPr>
-              <a:t>• 细化了捏泥人、赋予生命的过程。</a:t>
-            </a:r>
-          </a:p>
-          <a:p>
-            <a:pPr>
-              <a:spcAft>
-                <a:spcPts val="600"/>
-              </a:spcAft>
-            </a:pPr>
-            <a:r>
-              <a:rPr sz="1600" b="0">
-                <a:solidFill>
-                  <a:srgbClr val="2B2D42"/>
+              <a:t>基于古籍记载增删改写，赋予现代意识</a:t>
+            </a:r>
+          </a:p>
+          <a:p>
+            <a:pPr algn="l">
+              <a:spcAft>
+                <a:spcPts val="300"/>
+              </a:spcAft>
+            </a:pPr>
+            <a:r>
+              <a:rPr sz="600" b="0">
+                <a:solidFill>
+                  <a:srgbClr val="1E1E1E"/>
                 </a:solidFill>
                 <a:latin typeface="Microsoft YaHei"/>
               </a:rPr>
-              <a:t>• 融入了人类开口叫“妈妈”的温馨场景。</a:t>
-            </a:r>
-          </a:p>
-          <a:p>
-            <a:pPr>
-              <a:spcAft>
-                <a:spcPts val="600"/>
-              </a:spcAft>
-            </a:pPr>
-            <a:r>
-              <a:rPr sz="1600" b="0">
-                <a:solidFill>
-                  <a:srgbClr val="2B2D42"/>
+              <a:t/>
+            </a:r>
+          </a:p>
+          <a:p>
+            <a:pPr algn="l">
+              <a:spcAft>
+                <a:spcPts val="300"/>
+              </a:spcAft>
+            </a:pPr>
+            <a:r>
+              <a:rPr sz="1300" b="1">
+                <a:solidFill>
+                  <a:srgbClr val="C83C23"/>
                 </a:solidFill>
                 <a:latin typeface="Microsoft YaHei"/>
               </a:rPr>
-              <a:t/>
-            </a:r>
-          </a:p>
-          <a:p>
-            <a:pPr>
-              <a:spcAft>
-                <a:spcPts val="600"/>
-              </a:spcAft>
-            </a:pPr>
-            <a:r>
-              <a:rPr sz="1600" b="0">
-                <a:solidFill>
-                  <a:srgbClr val="2B2D42"/>
+              <a:t>对比材料</a:t>
+            </a:r>
+          </a:p>
+          <a:p>
+            <a:pPr algn="l">
+              <a:spcAft>
+                <a:spcPts val="300"/>
+              </a:spcAft>
+            </a:pPr>
+            <a:r>
+              <a:rPr sz="1400" b="0">
+                <a:solidFill>
+                  <a:srgbClr val="1E1E1E"/>
                 </a:solidFill>
                 <a:latin typeface="Microsoft YaHei"/>
               </a:rPr>
-              <a:t>本质：用合理的想象填补历史的空白。</a:t>
+              <a:t>教材「阅读提示」中的《风俗通》记载</a:t>
             </a:r>
           </a:p>
         </p:txBody>
@@ -3938,57 +4455,23 @@
       </p:sp>
       <p:sp>
         <p:nvSpPr>
-          <p:cNvPr id="3" name="TextBox 2"/>
-          <p:cNvSpPr txBox="1"/>
-          <p:nvPr/>
-        </p:nvSpPr>
-        <p:spPr>
-          <a:xfrm>
-            <a:off x="571500" y="381000"/>
-            <a:ext cx="8286521" cy="411480"/>
+          <p:cNvPr id="3" name="Rectangle 2"/>
+          <p:cNvSpPr/>
+          <p:nvPr/>
+        </p:nvSpPr>
+        <p:spPr>
+          <a:xfrm>
+            <a:off x="548640" y="347472"/>
+            <a:ext cx="365760" cy="365760"/>
           </a:xfrm>
           <a:prstGeom prst="rect">
             <a:avLst/>
           </a:prstGeom>
           <a:noFill/>
-        </p:spPr>
-        <p:txBody>
-          <a:bodyPr wrap="none">
-            <a:spAutoFit/>
-          </a:bodyPr>
-          <a:lstStyle/>
-          <a:p>
-            <a:r>
-              <a:rPr sz="2800" b="1">
-                <a:solidFill>
-                  <a:srgbClr val="6B9080"/>
-                </a:solidFill>
-                <a:latin typeface="Microsoft YaHei"/>
-              </a:rPr>
-              <a:t>想象的 4 个扩写维度</a:t>
-            </a:r>
-          </a:p>
-        </p:txBody>
-      </p:sp>
-      <p:sp>
-        <p:nvSpPr>
-          <p:cNvPr id="4" name="Rectangle 3"/>
-          <p:cNvSpPr/>
-          <p:nvPr/>
-        </p:nvSpPr>
-        <p:spPr>
-          <a:xfrm>
-            <a:off x="571500" y="838200"/>
-            <a:ext cx="11048695" cy="25400"/>
-          </a:xfrm>
-          <a:prstGeom prst="rect">
-            <a:avLst/>
-          </a:prstGeom>
-          <a:solidFill>
-            <a:srgbClr val="E2E2D9"/>
-          </a:solidFill>
-          <a:ln>
-            <a:noFill/>
+          <a:ln w="25400">
+            <a:solidFill>
+              <a:srgbClr val="C83C23"/>
+            </a:solidFill>
           </a:ln>
         </p:spPr>
         <p:style>
@@ -4015,14 +4498,53 @@
       </p:sp>
       <p:sp>
         <p:nvSpPr>
+          <p:cNvPr id="4" name="TextBox 3"/>
+          <p:cNvSpPr txBox="1"/>
+          <p:nvPr/>
+        </p:nvSpPr>
+        <p:spPr>
+          <a:xfrm>
+            <a:off x="548640" y="347472"/>
+            <a:ext cx="365760" cy="365760"/>
+          </a:xfrm>
+          <a:prstGeom prst="rect">
+            <a:avLst/>
+          </a:prstGeom>
+          <a:noFill/>
+        </p:spPr>
+        <p:txBody>
+          <a:bodyPr wrap="square" anchor="ctr">
+            <a:spAutoFit/>
+          </a:bodyPr>
+          <a:lstStyle/>
+          <a:p>
+            <a:pPr algn="ctr">
+              <a:spcAft>
+                <a:spcPts val="300"/>
+              </a:spcAft>
+            </a:pPr>
+            <a:r>
+              <a:rPr sz="1000" b="1">
+                <a:solidFill>
+                  <a:srgbClr val="C83C23"/>
+                </a:solidFill>
+                <a:latin typeface="KaiTi"/>
+              </a:rPr>
+              <a:t>03</a:t>
+            </a:r>
+          </a:p>
+        </p:txBody>
+      </p:sp>
+      <p:sp>
+        <p:nvSpPr>
           <p:cNvPr id="5" name="TextBox 4"/>
           <p:cNvSpPr txBox="1"/>
           <p:nvPr/>
         </p:nvSpPr>
         <p:spPr>
           <a:xfrm>
-            <a:off x="9631429" y="426720"/>
-            <a:ext cx="1097280" cy="365760"/>
+            <a:off x="1024128" y="347472"/>
+            <a:ext cx="7766090" cy="365760"/>
           </a:xfrm>
           <a:prstGeom prst="rect">
             <a:avLst/>
@@ -4030,44 +4552,86 @@
           <a:noFill/>
         </p:spPr>
         <p:txBody>
-          <a:bodyPr wrap="none">
+          <a:bodyPr wrap="square" anchor="t">
             <a:spAutoFit/>
           </a:bodyPr>
           <a:lstStyle/>
           <a:p>
-            <a:r>
-              <a:rPr sz="1600" b="1">
-                <a:solidFill>
-                  <a:srgbClr val="6C757D"/>
+            <a:pPr algn="l">
+              <a:spcAft>
+                <a:spcPts val="300"/>
+              </a:spcAft>
+            </a:pPr>
+            <a:r>
+              <a:rPr sz="2000" b="1">
+                <a:solidFill>
+                  <a:srgbClr val="1E1E1E"/>
+                </a:solidFill>
+                <a:latin typeface="KaiTi"/>
+              </a:rPr>
+              <a:t>造人起因与过程</a:t>
+            </a:r>
+          </a:p>
+        </p:txBody>
+      </p:sp>
+      <p:sp>
+        <p:nvSpPr>
+          <p:cNvPr id="6" name="TextBox 5"/>
+          <p:cNvSpPr txBox="1"/>
+          <p:nvPr/>
+        </p:nvSpPr>
+        <p:spPr>
+          <a:xfrm>
+            <a:off x="8869451" y="347472"/>
+            <a:ext cx="2773603" cy="320040"/>
+          </a:xfrm>
+          <a:prstGeom prst="rect">
+            <a:avLst/>
+          </a:prstGeom>
+          <a:noFill/>
+        </p:spPr>
+        <p:txBody>
+          <a:bodyPr wrap="square" anchor="t">
+            <a:spAutoFit/>
+          </a:bodyPr>
+          <a:lstStyle/>
+          <a:p>
+            <a:pPr algn="r">
+              <a:spcAft>
+                <a:spcPts val="300"/>
+              </a:spcAft>
+            </a:pPr>
+            <a:r>
+              <a:rPr sz="1100" b="0">
+                <a:solidFill>
+                  <a:srgbClr val="5A6A62"/>
                 </a:solidFill>
                 <a:latin typeface="Microsoft YaHei"/>
               </a:rPr>
-              <a:t>03 / 08</a:t>
-            </a:r>
-          </a:p>
-        </p:txBody>
-      </p:sp>
-      <p:sp>
-        <p:nvSpPr>
-          <p:cNvPr id="6" name="Rounded Rectangle 5"/>
+              <a:t>卷 3/7</a:t>
+            </a:r>
+          </a:p>
+        </p:txBody>
+      </p:sp>
+      <p:sp>
+        <p:nvSpPr>
+          <p:cNvPr id="7" name="Rectangle 6"/>
           <p:cNvSpPr/>
           <p:nvPr/>
         </p:nvSpPr>
         <p:spPr>
           <a:xfrm>
-            <a:off x="571500" y="1112520"/>
-            <a:ext cx="2659303" cy="4114800"/>
-          </a:xfrm>
-          <a:prstGeom prst="roundRect">
+            <a:off x="548640" y="768096"/>
+            <a:ext cx="11094415" cy="9144"/>
+          </a:xfrm>
+          <a:prstGeom prst="rect">
             <a:avLst/>
           </a:prstGeom>
           <a:solidFill>
-            <a:srgbClr val="FFFFFF"/>
+            <a:srgbClr val="5A6A62"/>
           </a:solidFill>
-          <a:ln w="12700">
-            <a:solidFill>
-              <a:srgbClr val="E2E2D9"/>
-            </a:solidFill>
+          <a:ln>
+            <a:noFill/>
           </a:ln>
         </p:spPr>
         <p:style>
@@ -4094,23 +4658,64 @@
       </p:sp>
       <p:sp>
         <p:nvSpPr>
-          <p:cNvPr id="7" name="Rectangle 6"/>
+          <p:cNvPr id="8" name="TextBox 7"/>
+          <p:cNvSpPr txBox="1"/>
+          <p:nvPr/>
+        </p:nvSpPr>
+        <p:spPr>
+          <a:xfrm>
+            <a:off x="548640" y="704088"/>
+            <a:ext cx="11094415" cy="201168"/>
+          </a:xfrm>
+          <a:prstGeom prst="rect">
+            <a:avLst/>
+          </a:prstGeom>
+          <a:noFill/>
+        </p:spPr>
+        <p:txBody>
+          <a:bodyPr wrap="square" anchor="t">
+            <a:spAutoFit/>
+          </a:bodyPr>
+          <a:lstStyle/>
+          <a:p>
+            <a:pPr algn="ctr">
+              <a:spcAft>
+                <a:spcPts val="300"/>
+              </a:spcAft>
+            </a:pPr>
+            <a:r>
+              <a:rPr sz="900" b="0">
+                <a:solidFill>
+                  <a:srgbClr val="5A6A62"/>
+                </a:solidFill>
+                <a:latin typeface="Microsoft YaHei"/>
+              </a:rPr>
+              <a:t>～ ～ ～ ～ ～ ～ ～ ～ ～ ～ ～ ～</a:t>
+            </a:r>
+          </a:p>
+        </p:txBody>
+      </p:sp>
+      <p:sp>
+        <p:nvSpPr>
+          <p:cNvPr id="9" name="Rectangle 8"/>
           <p:cNvSpPr/>
           <p:nvPr/>
         </p:nvSpPr>
         <p:spPr>
           <a:xfrm>
-            <a:off x="708660" y="1368552"/>
-            <a:ext cx="50800" cy="320040"/>
+            <a:off x="3749040" y="685800"/>
+            <a:ext cx="4846320" cy="868680"/>
           </a:xfrm>
           <a:prstGeom prst="rect">
             <a:avLst/>
           </a:prstGeom>
           <a:solidFill>
-            <a:srgbClr val="E09F68"/>
+            <a:srgbClr val="E4EDE8"/>
           </a:solidFill>
-          <a:ln>
-            <a:noFill/>
+          <a:ln w="25400">
+            <a:solidFill>
+              <a:srgbClr val="4A7C6F"/>
+            </a:solidFill>
           </a:ln>
         </p:spPr>
         <p:style>
@@ -4137,14 +4742,14 @@
       </p:sp>
       <p:sp>
         <p:nvSpPr>
-          <p:cNvPr id="8" name="TextBox 7"/>
+          <p:cNvPr id="10" name="TextBox 9"/>
           <p:cNvSpPr txBox="1"/>
           <p:nvPr/>
         </p:nvSpPr>
         <p:spPr>
           <a:xfrm>
-            <a:off x="827532" y="1277112"/>
-            <a:ext cx="2293543" cy="3840480"/>
+            <a:off x="3886200" y="804672"/>
+            <a:ext cx="4572000" cy="685800"/>
           </a:xfrm>
           <a:prstGeom prst="rect">
             <a:avLst/>
@@ -4152,65 +4757,63 @@
           <a:noFill/>
         </p:spPr>
         <p:txBody>
-          <a:bodyPr wrap="square">
+          <a:bodyPr wrap="square" anchor="ctr">
             <a:spAutoFit/>
           </a:bodyPr>
           <a:lstStyle/>
           <a:p>
-            <a:pPr>
-              <a:spcAft>
-                <a:spcPts val="1000"/>
+            <a:pPr algn="ctr">
+              <a:spcAft>
+                <a:spcPts val="300"/>
+              </a:spcAft>
+            </a:pPr>
+            <a:r>
+              <a:rPr sz="1300" b="1">
+                <a:solidFill>
+                  <a:srgbClr val="C83C23"/>
+                </a:solidFill>
+                <a:latin typeface="KaiTi"/>
+              </a:rPr>
+              <a:t>起因</a:t>
+            </a:r>
+          </a:p>
+          <a:p>
+            <a:pPr algn="ctr">
+              <a:spcAft>
+                <a:spcPts val="300"/>
               </a:spcAft>
             </a:pPr>
             <a:r>
               <a:rPr sz="1600" b="1">
                 <a:solidFill>
-                  <a:srgbClr val="6B9080"/>
+                  <a:srgbClr val="1E1E1E"/>
                 </a:solidFill>
                 <a:latin typeface="Microsoft YaHei"/>
               </a:rPr>
-              <a:t>1. 动机赋予</a:t>
-            </a:r>
-          </a:p>
-          <a:p>
-            <a:pPr>
-              <a:spcAft>
-                <a:spcPts val="600"/>
-              </a:spcAft>
-            </a:pPr>
-            <a:r>
-              <a:rPr sz="1600" b="0">
-                <a:solidFill>
-                  <a:srgbClr val="2B2D42"/>
-                </a:solidFill>
-                <a:latin typeface="Microsoft YaHei"/>
-              </a:rPr>
-              <a:t>因荒凉与孤独而萌生创造同伴的渴望。</a:t>
-            </a:r>
-          </a:p>
-        </p:txBody>
-      </p:sp>
-      <p:sp>
-        <p:nvSpPr>
-          <p:cNvPr id="9" name="Rounded Rectangle 8"/>
+              <a:t>女娲行走世间，感到孤独寂寞</a:t>
+            </a:r>
+          </a:p>
+        </p:txBody>
+      </p:sp>
+      <p:sp>
+        <p:nvSpPr>
+          <p:cNvPr id="11" name="Rectangle 10"/>
           <p:cNvSpPr/>
           <p:nvPr/>
         </p:nvSpPr>
         <p:spPr>
           <a:xfrm>
-            <a:off x="3367963" y="1112520"/>
-            <a:ext cx="2659303" cy="4114800"/>
-          </a:xfrm>
-          <a:prstGeom prst="roundRect">
+            <a:off x="6126480" y="1600200"/>
+            <a:ext cx="18288" cy="502920"/>
+          </a:xfrm>
+          <a:prstGeom prst="rect">
             <a:avLst/>
           </a:prstGeom>
           <a:solidFill>
-            <a:srgbClr val="FFFFFF"/>
+            <a:srgbClr val="4A7C6F"/>
           </a:solidFill>
-          <a:ln w="12700">
-            <a:solidFill>
-              <a:srgbClr val="E2E2D9"/>
-            </a:solidFill>
+          <a:ln>
+            <a:noFill/>
           </a:ln>
         </p:spPr>
         <p:style>
@@ -4237,20 +4840,20 @@
       </p:sp>
       <p:sp>
         <p:nvSpPr>
-          <p:cNvPr id="10" name="Rectangle 9"/>
+          <p:cNvPr id="12" name="Rectangle 11"/>
           <p:cNvSpPr/>
           <p:nvPr/>
         </p:nvSpPr>
         <p:spPr>
           <a:xfrm>
-            <a:off x="3505123" y="1368552"/>
-            <a:ext cx="50800" cy="320040"/>
+            <a:off x="548640" y="2194560"/>
+            <a:ext cx="5120640" cy="2148840"/>
           </a:xfrm>
           <a:prstGeom prst="rect">
             <a:avLst/>
           </a:prstGeom>
           <a:solidFill>
-            <a:srgbClr val="E09F68"/>
+            <a:srgbClr val="E4EDE8"/>
           </a:solidFill>
           <a:ln>
             <a:noFill/>
@@ -4280,80 +4883,23 @@
       </p:sp>
       <p:sp>
         <p:nvSpPr>
-          <p:cNvPr id="11" name="TextBox 10"/>
-          <p:cNvSpPr txBox="1"/>
-          <p:nvPr/>
-        </p:nvSpPr>
-        <p:spPr>
-          <a:xfrm>
-            <a:off x="3623995" y="1277112"/>
-            <a:ext cx="2293543" cy="3840480"/>
-          </a:xfrm>
-          <a:prstGeom prst="rect">
-            <a:avLst/>
-          </a:prstGeom>
-          <a:noFill/>
-        </p:spPr>
-        <p:txBody>
-          <a:bodyPr wrap="square">
-            <a:spAutoFit/>
-          </a:bodyPr>
-          <a:lstStyle/>
-          <a:p>
-            <a:pPr>
-              <a:spcAft>
-                <a:spcPts val="1000"/>
-              </a:spcAft>
-            </a:pPr>
-            <a:r>
-              <a:rPr sz="1600" b="1">
-                <a:solidFill>
-                  <a:srgbClr val="6B9080"/>
-                </a:solidFill>
-                <a:latin typeface="Microsoft YaHei"/>
-              </a:rPr>
-              <a:t>2. 过程细节</a:t>
-            </a:r>
-          </a:p>
-          <a:p>
-            <a:pPr>
-              <a:spcAft>
-                <a:spcPts val="600"/>
-              </a:spcAft>
-            </a:pPr>
-            <a:r>
-              <a:rPr sz="1600" b="0">
-                <a:solidFill>
-                  <a:srgbClr val="2B2D42"/>
-                </a:solidFill>
-                <a:latin typeface="Microsoft YaHei"/>
-              </a:rPr>
-              <a:t>揉团黄泥、池水映照、挥洒泥浆等动作描写。</a:t>
-            </a:r>
-          </a:p>
-        </p:txBody>
-      </p:sp>
-      <p:sp>
-        <p:nvSpPr>
-          <p:cNvPr id="12" name="Rounded Rectangle 11"/>
+          <p:cNvPr id="13" name="Rectangle 12"/>
           <p:cNvSpPr/>
           <p:nvPr/>
         </p:nvSpPr>
         <p:spPr>
           <a:xfrm>
-            <a:off x="6164427" y="1112520"/>
-            <a:ext cx="2659303" cy="4114800"/>
-          </a:xfrm>
-          <a:prstGeom prst="roundRect">
+            <a:off x="548640" y="2194560"/>
+            <a:ext cx="45720" cy="2148840"/>
+          </a:xfrm>
+          <a:prstGeom prst="rect">
             <a:avLst/>
           </a:prstGeom>
           <a:solidFill>
-            <a:srgbClr val="FFFFFF"/>
+            <a:srgbClr val="4A7C6F"/>
           </a:solidFill>
-          <a:ln w="12700">
-            <a:solidFill>
-              <a:srgbClr val="E2E2D9"/>
-            </a:solidFill>
+          <a:ln>
+            <a:noFill/>
           </a:ln>
         </p:spPr>
         <p:style>
@@ -4380,23 +4926,96 @@
       </p:sp>
       <p:sp>
         <p:nvSpPr>
-          <p:cNvPr id="13" name="Rectangle 12"/>
+          <p:cNvPr id="14" name="TextBox 13"/>
+          <p:cNvSpPr txBox="1"/>
+          <p:nvPr/>
+        </p:nvSpPr>
+        <p:spPr>
+          <a:xfrm>
+            <a:off x="694944" y="2304288"/>
+            <a:ext cx="4919472" cy="1984248"/>
+          </a:xfrm>
+          <a:prstGeom prst="rect">
+            <a:avLst/>
+          </a:prstGeom>
+          <a:noFill/>
+        </p:spPr>
+        <p:txBody>
+          <a:bodyPr wrap="square" anchor="t">
+            <a:spAutoFit/>
+          </a:bodyPr>
+          <a:lstStyle/>
+          <a:p>
+            <a:pPr algn="l">
+              <a:spcAft>
+                <a:spcPts val="300"/>
+              </a:spcAft>
+            </a:pPr>
+            <a:r>
+              <a:rPr sz="1400" b="1">
+                <a:solidFill>
+                  <a:srgbClr val="4A7C6F"/>
+                </a:solidFill>
+                <a:latin typeface="KaiTi"/>
+              </a:rPr>
+              <a:t>方式一 · 精细制造</a:t>
+            </a:r>
+          </a:p>
+          <a:p>
+            <a:pPr algn="l">
+              <a:spcAft>
+                <a:spcPts val="300"/>
+              </a:spcAft>
+            </a:pPr>
+            <a:r>
+              <a:rPr sz="1400" b="0">
+                <a:solidFill>
+                  <a:srgbClr val="1E1E1E"/>
+                </a:solidFill>
+                <a:latin typeface="Microsoft YaHei"/>
+              </a:rPr>
+              <a:t>黄泥和水，揉成小泥人</a:t>
+            </a:r>
+          </a:p>
+          <a:p>
+            <a:pPr algn="l">
+              <a:spcAft>
+                <a:spcPts val="300"/>
+              </a:spcAft>
+            </a:pPr>
+            <a:r>
+              <a:rPr sz="1400" b="1">
+                <a:solidFill>
+                  <a:srgbClr val="1E1E1E"/>
+                </a:solidFill>
+                <a:latin typeface="Microsoft YaHei"/>
+              </a:rPr>
+              <a:t>泥人落地即活</a:t>
+            </a:r>
+          </a:p>
+        </p:txBody>
+      </p:sp>
+      <p:sp>
+        <p:nvSpPr>
+          <p:cNvPr id="15" name="Rectangle 14"/>
           <p:cNvSpPr/>
           <p:nvPr/>
         </p:nvSpPr>
         <p:spPr>
           <a:xfrm>
-            <a:off x="6301587" y="1368552"/>
-            <a:ext cx="50800" cy="320040"/>
+            <a:off x="6172200" y="2194560"/>
+            <a:ext cx="5120640" cy="2148840"/>
           </a:xfrm>
           <a:prstGeom prst="rect">
             <a:avLst/>
           </a:prstGeom>
           <a:solidFill>
-            <a:srgbClr val="E09F68"/>
+            <a:srgbClr val="F4F1EA"/>
           </a:solidFill>
-          <a:ln>
-            <a:noFill/>
+          <a:ln w="19050">
+            <a:solidFill>
+              <a:srgbClr val="4A7C6F"/>
+            </a:solidFill>
           </a:ln>
         </p:spPr>
         <p:style>
@@ -4423,80 +5042,23 @@
       </p:sp>
       <p:sp>
         <p:nvSpPr>
-          <p:cNvPr id="14" name="TextBox 13"/>
-          <p:cNvSpPr txBox="1"/>
-          <p:nvPr/>
-        </p:nvSpPr>
-        <p:spPr>
-          <a:xfrm>
-            <a:off x="6420459" y="1277112"/>
-            <a:ext cx="2293543" cy="3840480"/>
-          </a:xfrm>
-          <a:prstGeom prst="rect">
-            <a:avLst/>
-          </a:prstGeom>
-          <a:noFill/>
-        </p:spPr>
-        <p:txBody>
-          <a:bodyPr wrap="square">
-            <a:spAutoFit/>
-          </a:bodyPr>
-          <a:lstStyle/>
-          <a:p>
-            <a:pPr>
-              <a:spcAft>
-                <a:spcPts val="1000"/>
-              </a:spcAft>
-            </a:pPr>
-            <a:r>
-              <a:rPr sz="1600" b="1">
-                <a:solidFill>
-                  <a:srgbClr val="6B9080"/>
-                </a:solidFill>
-                <a:latin typeface="Microsoft YaHei"/>
-              </a:rPr>
-              <a:t>3. 人性注入</a:t>
-            </a:r>
-          </a:p>
-          <a:p>
-            <a:pPr>
-              <a:spcAft>
-                <a:spcPts val="600"/>
-              </a:spcAft>
-            </a:pPr>
-            <a:r>
-              <a:rPr sz="1600" b="0">
-                <a:solidFill>
-                  <a:srgbClr val="2B2D42"/>
-                </a:solidFill>
-                <a:latin typeface="Microsoft YaHei"/>
-              </a:rPr>
-              <a:t>展现女娲如母亲般慈爱、欣喜与疲惫的心情。</a:t>
-            </a:r>
-          </a:p>
-        </p:txBody>
-      </p:sp>
-      <p:sp>
-        <p:nvSpPr>
-          <p:cNvPr id="15" name="Rounded Rectangle 14"/>
+          <p:cNvPr id="16" name="Rectangle 15"/>
           <p:cNvSpPr/>
           <p:nvPr/>
         </p:nvSpPr>
         <p:spPr>
           <a:xfrm>
-            <a:off x="8960891" y="1112520"/>
-            <a:ext cx="2659303" cy="4114800"/>
-          </a:xfrm>
-          <a:prstGeom prst="roundRect">
+            <a:off x="6172200" y="2194560"/>
+            <a:ext cx="45720" cy="2148840"/>
+          </a:xfrm>
+          <a:prstGeom prst="rect">
             <a:avLst/>
           </a:prstGeom>
           <a:solidFill>
-            <a:srgbClr val="FFFFFF"/>
+            <a:srgbClr val="4A7C6F"/>
           </a:solidFill>
-          <a:ln w="12700">
-            <a:solidFill>
-              <a:srgbClr val="E2E2D9"/>
-            </a:solidFill>
+          <a:ln>
+            <a:noFill/>
           </a:ln>
         </p:spPr>
         <p:style>
@@ -4523,20 +5085,91 @@
       </p:sp>
       <p:sp>
         <p:nvSpPr>
-          <p:cNvPr id="16" name="Rectangle 15"/>
+          <p:cNvPr id="17" name="TextBox 16"/>
+          <p:cNvSpPr txBox="1"/>
+          <p:nvPr/>
+        </p:nvSpPr>
+        <p:spPr>
+          <a:xfrm>
+            <a:off x="6318504" y="2304288"/>
+            <a:ext cx="4919472" cy="1984248"/>
+          </a:xfrm>
+          <a:prstGeom prst="rect">
+            <a:avLst/>
+          </a:prstGeom>
+          <a:noFill/>
+        </p:spPr>
+        <p:txBody>
+          <a:bodyPr wrap="square" anchor="t">
+            <a:spAutoFit/>
+          </a:bodyPr>
+          <a:lstStyle/>
+          <a:p>
+            <a:pPr algn="l">
+              <a:spcAft>
+                <a:spcPts val="300"/>
+              </a:spcAft>
+            </a:pPr>
+            <a:r>
+              <a:rPr sz="1400" b="1">
+                <a:solidFill>
+                  <a:srgbClr val="4A7C6F"/>
+                </a:solidFill>
+                <a:latin typeface="KaiTi"/>
+              </a:rPr>
+              <a:t>方式二 · 批量制造</a:t>
+            </a:r>
+          </a:p>
+          <a:p>
+            <a:pPr algn="l">
+              <a:spcAft>
+                <a:spcPts val="300"/>
+              </a:spcAft>
+            </a:pPr>
+            <a:r>
+              <a:rPr sz="1400" b="0">
+                <a:solidFill>
+                  <a:srgbClr val="1E1E1E"/>
+                </a:solidFill>
+                <a:latin typeface="Microsoft YaHei"/>
+              </a:rPr>
+              <a:t>藤条蘸泥浆挥洒</a:t>
+            </a:r>
+          </a:p>
+          <a:p>
+            <a:pPr algn="l">
+              <a:spcAft>
+                <a:spcPts val="300"/>
+              </a:spcAft>
+            </a:pPr>
+            <a:r>
+              <a:rPr sz="1400" b="1">
+                <a:solidFill>
+                  <a:srgbClr val="1E1E1E"/>
+                </a:solidFill>
+                <a:latin typeface="Microsoft YaHei"/>
+              </a:rPr>
+              <a:t>溅落泥点化为人</a:t>
+            </a:r>
+          </a:p>
+        </p:txBody>
+      </p:sp>
+      <p:sp>
+        <p:nvSpPr>
+          <p:cNvPr id="18" name="Rectangle 17"/>
           <p:cNvSpPr/>
           <p:nvPr/>
         </p:nvSpPr>
         <p:spPr>
           <a:xfrm>
-            <a:off x="9098051" y="1368552"/>
-            <a:ext cx="50800" cy="320040"/>
+            <a:off x="2560320" y="4434840"/>
+            <a:ext cx="18288" cy="411480"/>
           </a:xfrm>
           <a:prstGeom prst="rect">
             <a:avLst/>
           </a:prstGeom>
           <a:solidFill>
-            <a:srgbClr val="E09F68"/>
+            <a:srgbClr val="4A7C6F"/>
           </a:solidFill>
           <a:ln>
             <a:noFill/>
@@ -4566,14 +5199,188 @@
       </p:sp>
       <p:sp>
         <p:nvSpPr>
-          <p:cNvPr id="17" name="TextBox 16"/>
+          <p:cNvPr id="19" name="Rectangle 18"/>
+          <p:cNvSpPr/>
+          <p:nvPr/>
+        </p:nvSpPr>
+        <p:spPr>
+          <a:xfrm>
+            <a:off x="8686800" y="4434840"/>
+            <a:ext cx="18288" cy="411480"/>
+          </a:xfrm>
+          <a:prstGeom prst="rect">
+            <a:avLst/>
+          </a:prstGeom>
+          <a:solidFill>
+            <a:srgbClr val="4A7C6F"/>
+          </a:solidFill>
+          <a:ln>
+            <a:noFill/>
+          </a:ln>
+        </p:spPr>
+        <p:style>
+          <a:lnRef idx="1">
+            <a:schemeClr val="accent1"/>
+          </a:lnRef>
+          <a:fillRef idx="3">
+            <a:schemeClr val="accent1"/>
+          </a:fillRef>
+          <a:effectRef idx="2">
+            <a:schemeClr val="accent1"/>
+          </a:effectRef>
+          <a:fontRef idx="minor">
+            <a:schemeClr val="lt1"/>
+          </a:fontRef>
+        </p:style>
+        <p:txBody>
+          <a:bodyPr rtlCol="0" anchor="ctr"/>
+          <a:lstStyle/>
+          <a:p>
+            <a:pPr algn="ctr"/>
+          </a:p>
+        </p:txBody>
+      </p:sp>
+      <p:sp>
+        <p:nvSpPr>
+          <p:cNvPr id="20" name="Rectangle 19"/>
+          <p:cNvSpPr/>
+          <p:nvPr/>
+        </p:nvSpPr>
+        <p:spPr>
+          <a:xfrm>
+            <a:off x="3108960" y="4800600"/>
+            <a:ext cx="6144768" cy="18288"/>
+          </a:xfrm>
+          <a:prstGeom prst="rect">
+            <a:avLst/>
+          </a:prstGeom>
+          <a:solidFill>
+            <a:srgbClr val="4A7C6F"/>
+          </a:solidFill>
+          <a:ln>
+            <a:noFill/>
+          </a:ln>
+        </p:spPr>
+        <p:style>
+          <a:lnRef idx="1">
+            <a:schemeClr val="accent1"/>
+          </a:lnRef>
+          <a:fillRef idx="3">
+            <a:schemeClr val="accent1"/>
+          </a:fillRef>
+          <a:effectRef idx="2">
+            <a:schemeClr val="accent1"/>
+          </a:effectRef>
+          <a:fontRef idx="minor">
+            <a:schemeClr val="lt1"/>
+          </a:fontRef>
+        </p:style>
+        <p:txBody>
+          <a:bodyPr rtlCol="0" anchor="ctr"/>
+          <a:lstStyle/>
+          <a:p>
+            <a:pPr algn="ctr"/>
+          </a:p>
+        </p:txBody>
+      </p:sp>
+      <p:sp>
+        <p:nvSpPr>
+          <p:cNvPr id="21" name="Rectangle 20"/>
+          <p:cNvSpPr/>
+          <p:nvPr/>
+        </p:nvSpPr>
+        <p:spPr>
+          <a:xfrm>
+            <a:off x="6126480" y="4800600"/>
+            <a:ext cx="18288" cy="411480"/>
+          </a:xfrm>
+          <a:prstGeom prst="rect">
+            <a:avLst/>
+          </a:prstGeom>
+          <a:solidFill>
+            <a:srgbClr val="4A7C6F"/>
+          </a:solidFill>
+          <a:ln>
+            <a:noFill/>
+          </a:ln>
+        </p:spPr>
+        <p:style>
+          <a:lnRef idx="1">
+            <a:schemeClr val="accent1"/>
+          </a:lnRef>
+          <a:fillRef idx="3">
+            <a:schemeClr val="accent1"/>
+          </a:fillRef>
+          <a:effectRef idx="2">
+            <a:schemeClr val="accent1"/>
+          </a:effectRef>
+          <a:fontRef idx="minor">
+            <a:schemeClr val="lt1"/>
+          </a:fontRef>
+        </p:style>
+        <p:txBody>
+          <a:bodyPr rtlCol="0" anchor="ctr"/>
+          <a:lstStyle/>
+          <a:p>
+            <a:pPr algn="ctr"/>
+          </a:p>
+        </p:txBody>
+      </p:sp>
+      <p:sp>
+        <p:nvSpPr>
+          <p:cNvPr id="22" name="Rectangle 21"/>
+          <p:cNvSpPr/>
+          <p:nvPr/>
+        </p:nvSpPr>
+        <p:spPr>
+          <a:xfrm>
+            <a:off x="3108960" y="5257800"/>
+            <a:ext cx="6144768" cy="960120"/>
+          </a:xfrm>
+          <a:prstGeom prst="rect">
+            <a:avLst/>
+          </a:prstGeom>
+          <a:solidFill>
+            <a:srgbClr val="E4EDE8"/>
+          </a:solidFill>
+          <a:ln w="25400">
+            <a:solidFill>
+              <a:srgbClr val="C83C23"/>
+            </a:solidFill>
+          </a:ln>
+        </p:spPr>
+        <p:style>
+          <a:lnRef idx="1">
+            <a:schemeClr val="accent1"/>
+          </a:lnRef>
+          <a:fillRef idx="3">
+            <a:schemeClr val="accent1"/>
+          </a:fillRef>
+          <a:effectRef idx="2">
+            <a:schemeClr val="accent1"/>
+          </a:effectRef>
+          <a:fontRef idx="minor">
+            <a:schemeClr val="lt1"/>
+          </a:fontRef>
+        </p:style>
+        <p:txBody>
+          <a:bodyPr rtlCol="0" anchor="ctr"/>
+          <a:lstStyle/>
+          <a:p>
+            <a:pPr algn="ctr"/>
+          </a:p>
+        </p:txBody>
+      </p:sp>
+      <p:sp>
+        <p:nvSpPr>
+          <p:cNvPr id="23" name="TextBox 22"/>
           <p:cNvSpPr txBox="1"/>
           <p:nvPr/>
         </p:nvSpPr>
         <p:spPr>
           <a:xfrm>
-            <a:off x="9216923" y="1277112"/>
-            <a:ext cx="2293543" cy="3840480"/>
+            <a:off x="3291840" y="5376672"/>
+            <a:ext cx="5760720" cy="777240"/>
           </a:xfrm>
           <a:prstGeom prst="rect">
             <a:avLst/>
@@ -4581,40 +5388,40 @@
           <a:noFill/>
         </p:spPr>
         <p:txBody>
-          <a:bodyPr wrap="square">
+          <a:bodyPr wrap="square" anchor="ctr">
             <a:spAutoFit/>
           </a:bodyPr>
           <a:lstStyle/>
           <a:p>
-            <a:pPr>
-              <a:spcAft>
-                <a:spcPts val="1000"/>
+            <a:pPr algn="ctr">
+              <a:spcAft>
+                <a:spcPts val="300"/>
+              </a:spcAft>
+            </a:pPr>
+            <a:r>
+              <a:rPr sz="1300" b="1">
+                <a:solidFill>
+                  <a:srgbClr val="C83C23"/>
+                </a:solidFill>
+                <a:latin typeface="KaiTi"/>
+              </a:rPr>
+              <a:t>结果</a:t>
+            </a:r>
+          </a:p>
+          <a:p>
+            <a:pPr algn="ctr">
+              <a:spcAft>
+                <a:spcPts val="300"/>
               </a:spcAft>
             </a:pPr>
             <a:r>
               <a:rPr sz="1600" b="1">
                 <a:solidFill>
-                  <a:srgbClr val="6B9080"/>
+                  <a:srgbClr val="1E1E1E"/>
                 </a:solidFill>
                 <a:latin typeface="Microsoft YaHei"/>
               </a:rPr>
-              <a:t>4. 繁衍逻辑</a:t>
-            </a:r>
-          </a:p>
-          <a:p>
-            <a:pPr>
-              <a:spcAft>
-                <a:spcPts val="600"/>
-              </a:spcAft>
-            </a:pPr>
-            <a:r>
-              <a:rPr sz="1600" b="0">
-                <a:solidFill>
-                  <a:srgbClr val="2B2D42"/>
-                </a:solidFill>
-                <a:latin typeface="Microsoft YaHei"/>
-              </a:rPr>
-              <a:t>区分男女，设立婚姻，解决人类世代绵延问题。</a:t>
+              <a:t>建立婚姻制度，让人类繁衍生息</a:t>
             </a:r>
           </a:p>
         </p:txBody>
@@ -4682,57 +5489,23 @@
       </p:sp>
       <p:sp>
         <p:nvSpPr>
-          <p:cNvPr id="3" name="TextBox 2"/>
-          <p:cNvSpPr txBox="1"/>
-          <p:nvPr/>
-        </p:nvSpPr>
-        <p:spPr>
-          <a:xfrm>
-            <a:off x="571500" y="381000"/>
-            <a:ext cx="8286521" cy="411480"/>
+          <p:cNvPr id="3" name="Rectangle 2"/>
+          <p:cNvSpPr/>
+          <p:nvPr/>
+        </p:nvSpPr>
+        <p:spPr>
+          <a:xfrm>
+            <a:off x="548640" y="347472"/>
+            <a:ext cx="365760" cy="365760"/>
           </a:xfrm>
           <a:prstGeom prst="rect">
             <a:avLst/>
           </a:prstGeom>
           <a:noFill/>
-        </p:spPr>
-        <p:txBody>
-          <a:bodyPr wrap="none">
-            <a:spAutoFit/>
-          </a:bodyPr>
-          <a:lstStyle/>
-          <a:p>
-            <a:r>
-              <a:rPr sz="2800" b="1">
-                <a:solidFill>
-                  <a:srgbClr val="6B9080"/>
-                </a:solidFill>
-                <a:latin typeface="Microsoft YaHei"/>
-              </a:rPr>
-              <a:t>远古先民的现实依托</a:t>
-            </a:r>
-          </a:p>
-        </p:txBody>
-      </p:sp>
-      <p:sp>
-        <p:nvSpPr>
-          <p:cNvPr id="4" name="Rectangle 3"/>
-          <p:cNvSpPr/>
-          <p:nvPr/>
-        </p:nvSpPr>
-        <p:spPr>
-          <a:xfrm>
-            <a:off x="571500" y="838200"/>
-            <a:ext cx="11048695" cy="25400"/>
-          </a:xfrm>
-          <a:prstGeom prst="rect">
-            <a:avLst/>
-          </a:prstGeom>
-          <a:solidFill>
-            <a:srgbClr val="E2E2D9"/>
-          </a:solidFill>
-          <a:ln>
-            <a:noFill/>
+          <a:ln w="25400">
+            <a:solidFill>
+              <a:srgbClr val="C83C23"/>
+            </a:solidFill>
           </a:ln>
         </p:spPr>
         <p:style>
@@ -4759,14 +5532,53 @@
       </p:sp>
       <p:sp>
         <p:nvSpPr>
+          <p:cNvPr id="4" name="TextBox 3"/>
+          <p:cNvSpPr txBox="1"/>
+          <p:nvPr/>
+        </p:nvSpPr>
+        <p:spPr>
+          <a:xfrm>
+            <a:off x="548640" y="347472"/>
+            <a:ext cx="365760" cy="365760"/>
+          </a:xfrm>
+          <a:prstGeom prst="rect">
+            <a:avLst/>
+          </a:prstGeom>
+          <a:noFill/>
+        </p:spPr>
+        <p:txBody>
+          <a:bodyPr wrap="square" anchor="ctr">
+            <a:spAutoFit/>
+          </a:bodyPr>
+          <a:lstStyle/>
+          <a:p>
+            <a:pPr algn="ctr">
+              <a:spcAft>
+                <a:spcPts val="300"/>
+              </a:spcAft>
+            </a:pPr>
+            <a:r>
+              <a:rPr sz="1000" b="1">
+                <a:solidFill>
+                  <a:srgbClr val="C83C23"/>
+                </a:solidFill>
+                <a:latin typeface="KaiTi"/>
+              </a:rPr>
+              <a:t>04</a:t>
+            </a:r>
+          </a:p>
+        </p:txBody>
+      </p:sp>
+      <p:sp>
+        <p:nvSpPr>
           <p:cNvPr id="5" name="TextBox 4"/>
           <p:cNvSpPr txBox="1"/>
           <p:nvPr/>
         </p:nvSpPr>
         <p:spPr>
           <a:xfrm>
-            <a:off x="9631429" y="426720"/>
-            <a:ext cx="1097280" cy="365760"/>
+            <a:off x="1024128" y="347472"/>
+            <a:ext cx="7766090" cy="365760"/>
           </a:xfrm>
           <a:prstGeom prst="rect">
             <a:avLst/>
@@ -4774,44 +5586,86 @@
           <a:noFill/>
         </p:spPr>
         <p:txBody>
-          <a:bodyPr wrap="none">
+          <a:bodyPr wrap="square" anchor="t">
             <a:spAutoFit/>
           </a:bodyPr>
           <a:lstStyle/>
           <a:p>
-            <a:r>
-              <a:rPr sz="1600" b="1">
-                <a:solidFill>
-                  <a:srgbClr val="6C757D"/>
+            <a:pPr algn="l">
+              <a:spcAft>
+                <a:spcPts val="300"/>
+              </a:spcAft>
+            </a:pPr>
+            <a:r>
+              <a:rPr sz="2000" b="1">
+                <a:solidFill>
+                  <a:srgbClr val="1E1E1E"/>
+                </a:solidFill>
+                <a:latin typeface="KaiTi"/>
+              </a:rPr>
+              <a:t>想象特点分析</a:t>
+            </a:r>
+          </a:p>
+        </p:txBody>
+      </p:sp>
+      <p:sp>
+        <p:nvSpPr>
+          <p:cNvPr id="6" name="TextBox 5"/>
+          <p:cNvSpPr txBox="1"/>
+          <p:nvPr/>
+        </p:nvSpPr>
+        <p:spPr>
+          <a:xfrm>
+            <a:off x="8869451" y="347472"/>
+            <a:ext cx="2773603" cy="320040"/>
+          </a:xfrm>
+          <a:prstGeom prst="rect">
+            <a:avLst/>
+          </a:prstGeom>
+          <a:noFill/>
+        </p:spPr>
+        <p:txBody>
+          <a:bodyPr wrap="square" anchor="t">
+            <a:spAutoFit/>
+          </a:bodyPr>
+          <a:lstStyle/>
+          <a:p>
+            <a:pPr algn="r">
+              <a:spcAft>
+                <a:spcPts val="300"/>
+              </a:spcAft>
+            </a:pPr>
+            <a:r>
+              <a:rPr sz="1100" b="0">
+                <a:solidFill>
+                  <a:srgbClr val="5A6A62"/>
                 </a:solidFill>
                 <a:latin typeface="Microsoft YaHei"/>
               </a:rPr>
-              <a:t>04 / 08</a:t>
-            </a:r>
-          </a:p>
-        </p:txBody>
-      </p:sp>
-      <p:sp>
-        <p:nvSpPr>
-          <p:cNvPr id="6" name="Rounded Rectangle 5"/>
+              <a:t>卷 4/7</a:t>
+            </a:r>
+          </a:p>
+        </p:txBody>
+      </p:sp>
+      <p:sp>
+        <p:nvSpPr>
+          <p:cNvPr id="7" name="Rectangle 6"/>
           <p:cNvSpPr/>
           <p:nvPr/>
         </p:nvSpPr>
         <p:spPr>
           <a:xfrm>
-            <a:off x="571500" y="1112520"/>
-            <a:ext cx="3591458" cy="4389120"/>
-          </a:xfrm>
-          <a:prstGeom prst="roundRect">
+            <a:off x="548640" y="768096"/>
+            <a:ext cx="11094415" cy="9144"/>
+          </a:xfrm>
+          <a:prstGeom prst="rect">
             <a:avLst/>
           </a:prstGeom>
           <a:solidFill>
-            <a:srgbClr val="FFFFFF"/>
+            <a:srgbClr val="5A6A62"/>
           </a:solidFill>
-          <a:ln w="12700">
-            <a:solidFill>
-              <a:srgbClr val="E2E2D9"/>
-            </a:solidFill>
+          <a:ln>
+            <a:noFill/>
           </a:ln>
         </p:spPr>
         <p:style>
@@ -4838,23 +5692,64 @@
       </p:sp>
       <p:sp>
         <p:nvSpPr>
-          <p:cNvPr id="7" name="Rectangle 6"/>
+          <p:cNvPr id="8" name="TextBox 7"/>
+          <p:cNvSpPr txBox="1"/>
+          <p:nvPr/>
+        </p:nvSpPr>
+        <p:spPr>
+          <a:xfrm>
+            <a:off x="548640" y="704088"/>
+            <a:ext cx="11094415" cy="201168"/>
+          </a:xfrm>
+          <a:prstGeom prst="rect">
+            <a:avLst/>
+          </a:prstGeom>
+          <a:noFill/>
+        </p:spPr>
+        <p:txBody>
+          <a:bodyPr wrap="square" anchor="t">
+            <a:spAutoFit/>
+          </a:bodyPr>
+          <a:lstStyle/>
+          <a:p>
+            <a:pPr algn="ctr">
+              <a:spcAft>
+                <a:spcPts val="300"/>
+              </a:spcAft>
+            </a:pPr>
+            <a:r>
+              <a:rPr sz="900" b="0">
+                <a:solidFill>
+                  <a:srgbClr val="5A6A62"/>
+                </a:solidFill>
+                <a:latin typeface="Microsoft YaHei"/>
+              </a:rPr>
+              <a:t>～ ～ ～ ～ ～ ～ ～ ～ ～ ～ ～ ～</a:t>
+            </a:r>
+          </a:p>
+        </p:txBody>
+      </p:sp>
+      <p:sp>
+        <p:nvSpPr>
+          <p:cNvPr id="9" name="Rectangle 8"/>
           <p:cNvSpPr/>
           <p:nvPr/>
         </p:nvSpPr>
         <p:spPr>
           <a:xfrm>
-            <a:off x="708660" y="1368552"/>
-            <a:ext cx="50800" cy="320040"/>
+            <a:off x="548640" y="658368"/>
+            <a:ext cx="5478627" cy="2331720"/>
           </a:xfrm>
           <a:prstGeom prst="rect">
             <a:avLst/>
           </a:prstGeom>
           <a:solidFill>
-            <a:srgbClr val="E09F68"/>
+            <a:srgbClr val="E4EDE8"/>
           </a:solidFill>
-          <a:ln>
-            <a:noFill/>
+          <a:ln w="19050">
+            <a:solidFill>
+              <a:srgbClr val="4A7C6F"/>
+            </a:solidFill>
           </a:ln>
         </p:spPr>
         <p:style>
@@ -4881,80 +5776,23 @@
       </p:sp>
       <p:sp>
         <p:nvSpPr>
-          <p:cNvPr id="8" name="TextBox 7"/>
-          <p:cNvSpPr txBox="1"/>
-          <p:nvPr/>
-        </p:nvSpPr>
-        <p:spPr>
-          <a:xfrm>
-            <a:off x="827532" y="1277112"/>
-            <a:ext cx="3225698" cy="4114800"/>
-          </a:xfrm>
-          <a:prstGeom prst="rect">
-            <a:avLst/>
-          </a:prstGeom>
-          <a:noFill/>
-        </p:spPr>
-        <p:txBody>
-          <a:bodyPr wrap="square">
-            <a:spAutoFit/>
-          </a:bodyPr>
-          <a:lstStyle/>
-          <a:p>
-            <a:pPr>
-              <a:spcAft>
-                <a:spcPts val="1000"/>
-              </a:spcAft>
-            </a:pPr>
-            <a:r>
-              <a:rPr sz="2000" b="1">
-                <a:solidFill>
-                  <a:srgbClr val="6B9080"/>
-                </a:solidFill>
-                <a:latin typeface="Microsoft YaHei"/>
-              </a:rPr>
-              <a:t>现象：人从何而来？</a:t>
-            </a:r>
-          </a:p>
-          <a:p>
-            <a:pPr>
-              <a:spcAft>
-                <a:spcPts val="600"/>
-              </a:spcAft>
-            </a:pPr>
-            <a:r>
-              <a:rPr sz="1600" b="0">
-                <a:solidFill>
-                  <a:srgbClr val="2B2D42"/>
-                </a:solidFill>
-                <a:latin typeface="Microsoft YaHei"/>
-              </a:rPr>
-              <a:t>现实依托：泥土是孕育万物的基础，且具有极高的可塑性。因此想象出“黄泥造人”。</a:t>
-            </a:r>
-          </a:p>
-        </p:txBody>
-      </p:sp>
-      <p:sp>
-        <p:nvSpPr>
-          <p:cNvPr id="9" name="Rounded Rectangle 8"/>
+          <p:cNvPr id="10" name="Rectangle 9"/>
           <p:cNvSpPr/>
           <p:nvPr/>
         </p:nvSpPr>
         <p:spPr>
           <a:xfrm>
-            <a:off x="4300118" y="1112520"/>
-            <a:ext cx="3591458" cy="4389120"/>
-          </a:xfrm>
-          <a:prstGeom prst="roundRect">
+            <a:off x="548640" y="658368"/>
+            <a:ext cx="45720" cy="2331720"/>
+          </a:xfrm>
+          <a:prstGeom prst="rect">
             <a:avLst/>
           </a:prstGeom>
           <a:solidFill>
-            <a:srgbClr val="FFFFFF"/>
+            <a:srgbClr val="4A7C6F"/>
           </a:solidFill>
-          <a:ln w="12700">
-            <a:solidFill>
-              <a:srgbClr val="E2E2D9"/>
-            </a:solidFill>
+          <a:ln>
+            <a:noFill/>
           </a:ln>
         </p:spPr>
         <p:style>
@@ -4981,23 +5819,23 @@
       </p:sp>
       <p:sp>
         <p:nvSpPr>
-          <p:cNvPr id="10" name="Rectangle 9"/>
+          <p:cNvPr id="11" name="Rectangle 10"/>
           <p:cNvSpPr/>
           <p:nvPr/>
         </p:nvSpPr>
         <p:spPr>
           <a:xfrm>
-            <a:off x="4437278" y="1368552"/>
-            <a:ext cx="50800" cy="320040"/>
-          </a:xfrm>
-          <a:prstGeom prst="rect">
-            <a:avLst/>
-          </a:prstGeom>
-          <a:solidFill>
-            <a:srgbClr val="E09F68"/>
-          </a:solidFill>
-          <a:ln>
-            <a:noFill/>
+            <a:off x="5524347" y="768096"/>
+            <a:ext cx="384048" cy="384048"/>
+          </a:xfrm>
+          <a:prstGeom prst="rect">
+            <a:avLst/>
+          </a:prstGeom>
+          <a:noFill/>
+          <a:ln w="25400">
+            <a:solidFill>
+              <a:srgbClr val="C83C23"/>
+            </a:solidFill>
           </a:ln>
         </p:spPr>
         <p:style>
@@ -5024,14 +5862,14 @@
       </p:sp>
       <p:sp>
         <p:nvSpPr>
-          <p:cNvPr id="11" name="TextBox 10"/>
+          <p:cNvPr id="12" name="TextBox 11"/>
           <p:cNvSpPr txBox="1"/>
           <p:nvPr/>
         </p:nvSpPr>
         <p:spPr>
           <a:xfrm>
-            <a:off x="4556150" y="1277112"/>
-            <a:ext cx="3225698" cy="4114800"/>
+            <a:off x="5524347" y="768096"/>
+            <a:ext cx="384048" cy="384048"/>
           </a:xfrm>
           <a:prstGeom prst="rect">
             <a:avLst/>
@@ -5039,64 +5877,119 @@
           <a:noFill/>
         </p:spPr>
         <p:txBody>
-          <a:bodyPr wrap="square">
+          <a:bodyPr wrap="square" anchor="ctr">
             <a:spAutoFit/>
           </a:bodyPr>
           <a:lstStyle/>
           <a:p>
-            <a:pPr>
-              <a:spcAft>
-                <a:spcPts val="1000"/>
-              </a:spcAft>
-            </a:pPr>
-            <a:r>
-              <a:rPr sz="2000" b="1">
-                <a:solidFill>
-                  <a:srgbClr val="6B9080"/>
+            <a:pPr algn="ctr">
+              <a:spcAft>
+                <a:spcPts val="300"/>
+              </a:spcAft>
+            </a:pPr>
+            <a:r>
+              <a:rPr sz="1200" b="1">
+                <a:solidFill>
+                  <a:srgbClr val="C83C23"/>
+                </a:solidFill>
+                <a:latin typeface="KaiTi"/>
+              </a:rPr>
+              <a:t>壹</a:t>
+            </a:r>
+          </a:p>
+        </p:txBody>
+      </p:sp>
+      <p:sp>
+        <p:nvSpPr>
+          <p:cNvPr id="13" name="TextBox 12"/>
+          <p:cNvSpPr txBox="1"/>
+          <p:nvPr/>
+        </p:nvSpPr>
+        <p:spPr>
+          <a:xfrm>
+            <a:off x="694944" y="795528"/>
+            <a:ext cx="5250027" cy="2148840"/>
+          </a:xfrm>
+          <a:prstGeom prst="rect">
+            <a:avLst/>
+          </a:prstGeom>
+          <a:noFill/>
+        </p:spPr>
+        <p:txBody>
+          <a:bodyPr wrap="square" anchor="t">
+            <a:spAutoFit/>
+          </a:bodyPr>
+          <a:lstStyle/>
+          <a:p>
+            <a:pPr algn="l">
+              <a:spcAft>
+                <a:spcPts val="300"/>
+              </a:spcAft>
+            </a:pPr>
+            <a:r>
+              <a:rPr sz="1800" b="1">
+                <a:solidFill>
+                  <a:srgbClr val="4A7C6F"/>
+                </a:solidFill>
+                <a:latin typeface="KaiTi"/>
+              </a:rPr>
+              <a:t>具体</a:t>
+            </a:r>
+          </a:p>
+          <a:p>
+            <a:pPr algn="l">
+              <a:spcAft>
+                <a:spcPts val="300"/>
+              </a:spcAft>
+            </a:pPr>
+            <a:r>
+              <a:rPr sz="400" b="0">
+                <a:solidFill>
+                  <a:srgbClr val="1E1E1E"/>
                 </a:solidFill>
                 <a:latin typeface="Microsoft YaHei"/>
               </a:rPr>
-              <a:t>现象：为什么人有贫富？</a:t>
-            </a:r>
-          </a:p>
-          <a:p>
-            <a:pPr>
-              <a:spcAft>
-                <a:spcPts val="600"/>
-              </a:spcAft>
-            </a:pPr>
-            <a:r>
-              <a:rPr sz="1600" b="0">
-                <a:solidFill>
-                  <a:srgbClr val="2B2D42"/>
+              <a:t/>
+            </a:r>
+          </a:p>
+          <a:p>
+            <a:pPr algn="l">
+              <a:spcAft>
+                <a:spcPts val="300"/>
+              </a:spcAft>
+            </a:pPr>
+            <a:r>
+              <a:rPr sz="1400" b="0">
+                <a:solidFill>
+                  <a:srgbClr val="1E1E1E"/>
                 </a:solidFill>
                 <a:latin typeface="Microsoft YaHei"/>
               </a:rPr>
-              <a:t>现实依托：手揉泥人精致，藤条洒泥粗糙。以此解释现实中的阶级差异。</a:t>
-            </a:r>
-          </a:p>
-        </p:txBody>
-      </p:sp>
-      <p:sp>
-        <p:nvSpPr>
-          <p:cNvPr id="12" name="Rounded Rectangle 11"/>
+              <a:t>池水照影见自己面容 → 想到造同类</a:t>
+            </a:r>
+          </a:p>
+        </p:txBody>
+      </p:sp>
+      <p:sp>
+        <p:nvSpPr>
+          <p:cNvPr id="14" name="Rectangle 13"/>
           <p:cNvSpPr/>
           <p:nvPr/>
         </p:nvSpPr>
         <p:spPr>
           <a:xfrm>
-            <a:off x="8028736" y="1112520"/>
-            <a:ext cx="3591458" cy="4389120"/>
-          </a:xfrm>
-          <a:prstGeom prst="roundRect">
+            <a:off x="6164427" y="658368"/>
+            <a:ext cx="5478627" cy="2331720"/>
+          </a:xfrm>
+          <a:prstGeom prst="rect">
             <a:avLst/>
           </a:prstGeom>
           <a:solidFill>
-            <a:srgbClr val="FFFFFF"/>
+            <a:srgbClr val="F4F1EA"/>
           </a:solidFill>
-          <a:ln w="12700">
+          <a:ln w="19050">
             <a:solidFill>
-              <a:srgbClr val="E2E2D9"/>
+              <a:srgbClr val="4A7C6F"/>
             </a:solidFill>
           </a:ln>
         </p:spPr>
@@ -5124,20 +6017,20 @@
       </p:sp>
       <p:sp>
         <p:nvSpPr>
-          <p:cNvPr id="13" name="Rectangle 12"/>
+          <p:cNvPr id="15" name="Rectangle 14"/>
           <p:cNvSpPr/>
           <p:nvPr/>
         </p:nvSpPr>
         <p:spPr>
           <a:xfrm>
-            <a:off x="8165896" y="1368552"/>
-            <a:ext cx="50800" cy="320040"/>
+            <a:off x="6164427" y="658368"/>
+            <a:ext cx="45720" cy="2331720"/>
           </a:xfrm>
           <a:prstGeom prst="rect">
             <a:avLst/>
           </a:prstGeom>
           <a:solidFill>
-            <a:srgbClr val="E09F68"/>
+            <a:srgbClr val="4A7C6F"/>
           </a:solidFill>
           <a:ln>
             <a:noFill/>
@@ -5167,14 +6060,57 @@
       </p:sp>
       <p:sp>
         <p:nvSpPr>
-          <p:cNvPr id="14" name="TextBox 13"/>
+          <p:cNvPr id="16" name="Rectangle 15"/>
+          <p:cNvSpPr/>
+          <p:nvPr/>
+        </p:nvSpPr>
+        <p:spPr>
+          <a:xfrm>
+            <a:off x="11140135" y="768096"/>
+            <a:ext cx="384048" cy="384048"/>
+          </a:xfrm>
+          <a:prstGeom prst="rect">
+            <a:avLst/>
+          </a:prstGeom>
+          <a:noFill/>
+          <a:ln w="25400">
+            <a:solidFill>
+              <a:srgbClr val="C83C23"/>
+            </a:solidFill>
+          </a:ln>
+        </p:spPr>
+        <p:style>
+          <a:lnRef idx="1">
+            <a:schemeClr val="accent1"/>
+          </a:lnRef>
+          <a:fillRef idx="3">
+            <a:schemeClr val="accent1"/>
+          </a:fillRef>
+          <a:effectRef idx="2">
+            <a:schemeClr val="accent1"/>
+          </a:effectRef>
+          <a:fontRef idx="minor">
+            <a:schemeClr val="lt1"/>
+          </a:fontRef>
+        </p:style>
+        <p:txBody>
+          <a:bodyPr rtlCol="0" anchor="ctr"/>
+          <a:lstStyle/>
+          <a:p>
+            <a:pPr algn="ctr"/>
+          </a:p>
+        </p:txBody>
+      </p:sp>
+      <p:sp>
+        <p:nvSpPr>
+          <p:cNvPr id="17" name="TextBox 16"/>
           <p:cNvSpPr txBox="1"/>
           <p:nvPr/>
         </p:nvSpPr>
         <p:spPr>
           <a:xfrm>
-            <a:off x="8284768" y="1277112"/>
-            <a:ext cx="3225698" cy="4114800"/>
+            <a:off x="11140135" y="768096"/>
+            <a:ext cx="384048" cy="384048"/>
           </a:xfrm>
           <a:prstGeom prst="rect">
             <a:avLst/>
@@ -5182,40 +6118,577 @@
           <a:noFill/>
         </p:spPr>
         <p:txBody>
-          <a:bodyPr wrap="square">
+          <a:bodyPr wrap="square" anchor="ctr">
             <a:spAutoFit/>
           </a:bodyPr>
           <a:lstStyle/>
           <a:p>
-            <a:pPr>
-              <a:spcAft>
-                <a:spcPts val="1000"/>
-              </a:spcAft>
-            </a:pPr>
-            <a:r>
-              <a:rPr sz="2000" b="1">
-                <a:solidFill>
-                  <a:srgbClr val="6B9080"/>
+            <a:pPr algn="ctr">
+              <a:spcAft>
+                <a:spcPts val="300"/>
+              </a:spcAft>
+            </a:pPr>
+            <a:r>
+              <a:rPr sz="1200" b="1">
+                <a:solidFill>
+                  <a:srgbClr val="C83C23"/>
+                </a:solidFill>
+                <a:latin typeface="KaiTi"/>
+              </a:rPr>
+              <a:t>贰</a:t>
+            </a:r>
+          </a:p>
+        </p:txBody>
+      </p:sp>
+      <p:sp>
+        <p:nvSpPr>
+          <p:cNvPr id="18" name="TextBox 17"/>
+          <p:cNvSpPr txBox="1"/>
+          <p:nvPr/>
+        </p:nvSpPr>
+        <p:spPr>
+          <a:xfrm>
+            <a:off x="6310731" y="795528"/>
+            <a:ext cx="5250027" cy="2148840"/>
+          </a:xfrm>
+          <a:prstGeom prst="rect">
+            <a:avLst/>
+          </a:prstGeom>
+          <a:noFill/>
+        </p:spPr>
+        <p:txBody>
+          <a:bodyPr wrap="square" anchor="t">
+            <a:spAutoFit/>
+          </a:bodyPr>
+          <a:lstStyle/>
+          <a:p>
+            <a:pPr algn="l">
+              <a:spcAft>
+                <a:spcPts val="300"/>
+              </a:spcAft>
+            </a:pPr>
+            <a:r>
+              <a:rPr sz="1800" b="1">
+                <a:solidFill>
+                  <a:srgbClr val="4A7C6F"/>
+                </a:solidFill>
+                <a:latin typeface="KaiTi"/>
+              </a:rPr>
+              <a:t>生动</a:t>
+            </a:r>
+          </a:p>
+          <a:p>
+            <a:pPr algn="l">
+              <a:spcAft>
+                <a:spcPts val="300"/>
+              </a:spcAft>
+            </a:pPr>
+            <a:r>
+              <a:rPr sz="400" b="0">
+                <a:solidFill>
+                  <a:srgbClr val="1E1E1E"/>
                 </a:solidFill>
                 <a:latin typeface="Microsoft YaHei"/>
               </a:rPr>
-              <a:t>现象：人类如何繁衍？</a:t>
-            </a:r>
-          </a:p>
-          <a:p>
-            <a:pPr>
-              <a:spcAft>
-                <a:spcPts val="600"/>
-              </a:spcAft>
-            </a:pPr>
-            <a:r>
-              <a:rPr sz="1600" b="0">
-                <a:solidFill>
-                  <a:srgbClr val="2B2D42"/>
+              <a:t/>
+            </a:r>
+          </a:p>
+          <a:p>
+            <a:pPr algn="l">
+              <a:spcAft>
+                <a:spcPts val="300"/>
+              </a:spcAft>
+            </a:pPr>
+            <a:r>
+              <a:rPr sz="1400" b="0">
+                <a:solidFill>
+                  <a:srgbClr val="1E1E1E"/>
                 </a:solidFill>
                 <a:latin typeface="Microsoft YaHei"/>
               </a:rPr>
-              <a:t>现实依托：观察到男女交配与婚姻制度，推演为女娲安排男女婚配。</a:t>
+              <a:t>藤条一挥，满天泥浆洒落，画面感强</a:t>
+            </a:r>
+          </a:p>
+        </p:txBody>
+      </p:sp>
+      <p:sp>
+        <p:nvSpPr>
+          <p:cNvPr id="19" name="Rectangle 18"/>
+          <p:cNvSpPr/>
+          <p:nvPr/>
+        </p:nvSpPr>
+        <p:spPr>
+          <a:xfrm>
+            <a:off x="548640" y="3127248"/>
+            <a:ext cx="5478627" cy="2331720"/>
+          </a:xfrm>
+          <a:prstGeom prst="rect">
+            <a:avLst/>
+          </a:prstGeom>
+          <a:solidFill>
+            <a:srgbClr val="E4EDE8"/>
+          </a:solidFill>
+          <a:ln w="19050">
+            <a:solidFill>
+              <a:srgbClr val="4A7C6F"/>
+            </a:solidFill>
+          </a:ln>
+        </p:spPr>
+        <p:style>
+          <a:lnRef idx="1">
+            <a:schemeClr val="accent1"/>
+          </a:lnRef>
+          <a:fillRef idx="3">
+            <a:schemeClr val="accent1"/>
+          </a:fillRef>
+          <a:effectRef idx="2">
+            <a:schemeClr val="accent1"/>
+          </a:effectRef>
+          <a:fontRef idx="minor">
+            <a:schemeClr val="lt1"/>
+          </a:fontRef>
+        </p:style>
+        <p:txBody>
+          <a:bodyPr rtlCol="0" anchor="ctr"/>
+          <a:lstStyle/>
+          <a:p>
+            <a:pPr algn="ctr"/>
+          </a:p>
+        </p:txBody>
+      </p:sp>
+      <p:sp>
+        <p:nvSpPr>
+          <p:cNvPr id="20" name="Rectangle 19"/>
+          <p:cNvSpPr/>
+          <p:nvPr/>
+        </p:nvSpPr>
+        <p:spPr>
+          <a:xfrm>
+            <a:off x="548640" y="3127248"/>
+            <a:ext cx="45720" cy="2331720"/>
+          </a:xfrm>
+          <a:prstGeom prst="rect">
+            <a:avLst/>
+          </a:prstGeom>
+          <a:solidFill>
+            <a:srgbClr val="4A7C6F"/>
+          </a:solidFill>
+          <a:ln>
+            <a:noFill/>
+          </a:ln>
+        </p:spPr>
+        <p:style>
+          <a:lnRef idx="1">
+            <a:schemeClr val="accent1"/>
+          </a:lnRef>
+          <a:fillRef idx="3">
+            <a:schemeClr val="accent1"/>
+          </a:fillRef>
+          <a:effectRef idx="2">
+            <a:schemeClr val="accent1"/>
+          </a:effectRef>
+          <a:fontRef idx="minor">
+            <a:schemeClr val="lt1"/>
+          </a:fontRef>
+        </p:style>
+        <p:txBody>
+          <a:bodyPr rtlCol="0" anchor="ctr"/>
+          <a:lstStyle/>
+          <a:p>
+            <a:pPr algn="ctr"/>
+          </a:p>
+        </p:txBody>
+      </p:sp>
+      <p:sp>
+        <p:nvSpPr>
+          <p:cNvPr id="21" name="Rectangle 20"/>
+          <p:cNvSpPr/>
+          <p:nvPr/>
+        </p:nvSpPr>
+        <p:spPr>
+          <a:xfrm>
+            <a:off x="5524347" y="3236976"/>
+            <a:ext cx="384048" cy="384048"/>
+          </a:xfrm>
+          <a:prstGeom prst="rect">
+            <a:avLst/>
+          </a:prstGeom>
+          <a:noFill/>
+          <a:ln w="25400">
+            <a:solidFill>
+              <a:srgbClr val="C83C23"/>
+            </a:solidFill>
+          </a:ln>
+        </p:spPr>
+        <p:style>
+          <a:lnRef idx="1">
+            <a:schemeClr val="accent1"/>
+          </a:lnRef>
+          <a:fillRef idx="3">
+            <a:schemeClr val="accent1"/>
+          </a:fillRef>
+          <a:effectRef idx="2">
+            <a:schemeClr val="accent1"/>
+          </a:effectRef>
+          <a:fontRef idx="minor">
+            <a:schemeClr val="lt1"/>
+          </a:fontRef>
+        </p:style>
+        <p:txBody>
+          <a:bodyPr rtlCol="0" anchor="ctr"/>
+          <a:lstStyle/>
+          <a:p>
+            <a:pPr algn="ctr"/>
+          </a:p>
+        </p:txBody>
+      </p:sp>
+      <p:sp>
+        <p:nvSpPr>
+          <p:cNvPr id="22" name="TextBox 21"/>
+          <p:cNvSpPr txBox="1"/>
+          <p:nvPr/>
+        </p:nvSpPr>
+        <p:spPr>
+          <a:xfrm>
+            <a:off x="5524347" y="3236976"/>
+            <a:ext cx="384048" cy="384048"/>
+          </a:xfrm>
+          <a:prstGeom prst="rect">
+            <a:avLst/>
+          </a:prstGeom>
+          <a:noFill/>
+        </p:spPr>
+        <p:txBody>
+          <a:bodyPr wrap="square" anchor="ctr">
+            <a:spAutoFit/>
+          </a:bodyPr>
+          <a:lstStyle/>
+          <a:p>
+            <a:pPr algn="ctr">
+              <a:spcAft>
+                <a:spcPts val="300"/>
+              </a:spcAft>
+            </a:pPr>
+            <a:r>
+              <a:rPr sz="1200" b="1">
+                <a:solidFill>
+                  <a:srgbClr val="C83C23"/>
+                </a:solidFill>
+                <a:latin typeface="KaiTi"/>
+              </a:rPr>
+              <a:t>叁</a:t>
+            </a:r>
+          </a:p>
+        </p:txBody>
+      </p:sp>
+      <p:sp>
+        <p:nvSpPr>
+          <p:cNvPr id="23" name="TextBox 22"/>
+          <p:cNvSpPr txBox="1"/>
+          <p:nvPr/>
+        </p:nvSpPr>
+        <p:spPr>
+          <a:xfrm>
+            <a:off x="694944" y="3264408"/>
+            <a:ext cx="5250027" cy="2148840"/>
+          </a:xfrm>
+          <a:prstGeom prst="rect">
+            <a:avLst/>
+          </a:prstGeom>
+          <a:noFill/>
+        </p:spPr>
+        <p:txBody>
+          <a:bodyPr wrap="square" anchor="t">
+            <a:spAutoFit/>
+          </a:bodyPr>
+          <a:lstStyle/>
+          <a:p>
+            <a:pPr algn="l">
+              <a:spcAft>
+                <a:spcPts val="300"/>
+              </a:spcAft>
+            </a:pPr>
+            <a:r>
+              <a:rPr sz="1800" b="1">
+                <a:solidFill>
+                  <a:srgbClr val="4A7C6F"/>
+                </a:solidFill>
+                <a:latin typeface="KaiTi"/>
+              </a:rPr>
+              <a:t>温暖</a:t>
+            </a:r>
+          </a:p>
+          <a:p>
+            <a:pPr algn="l">
+              <a:spcAft>
+                <a:spcPts val="300"/>
+              </a:spcAft>
+            </a:pPr>
+            <a:r>
+              <a:rPr sz="400" b="0">
+                <a:solidFill>
+                  <a:srgbClr val="1E1E1E"/>
+                </a:solidFill>
+                <a:latin typeface="Microsoft YaHei"/>
+              </a:rPr>
+              <a:t/>
+            </a:r>
+          </a:p>
+          <a:p>
+            <a:pPr algn="l">
+              <a:spcAft>
+                <a:spcPts val="300"/>
+              </a:spcAft>
+            </a:pPr>
+            <a:r>
+              <a:rPr sz="1400" b="0">
+                <a:solidFill>
+                  <a:srgbClr val="1E1E1E"/>
+                </a:solidFill>
+                <a:latin typeface="Microsoft YaHei"/>
+              </a:rPr>
+              <a:t>造人后的疲倦与喜悦，赋予神以人的情感</a:t>
+            </a:r>
+          </a:p>
+        </p:txBody>
+      </p:sp>
+      <p:sp>
+        <p:nvSpPr>
+          <p:cNvPr id="24" name="Rectangle 23"/>
+          <p:cNvSpPr/>
+          <p:nvPr/>
+        </p:nvSpPr>
+        <p:spPr>
+          <a:xfrm>
+            <a:off x="6164427" y="3127248"/>
+            <a:ext cx="5478627" cy="2331720"/>
+          </a:xfrm>
+          <a:prstGeom prst="rect">
+            <a:avLst/>
+          </a:prstGeom>
+          <a:solidFill>
+            <a:srgbClr val="F4F1EA"/>
+          </a:solidFill>
+          <a:ln w="19050">
+            <a:solidFill>
+              <a:srgbClr val="4A7C6F"/>
+            </a:solidFill>
+          </a:ln>
+        </p:spPr>
+        <p:style>
+          <a:lnRef idx="1">
+            <a:schemeClr val="accent1"/>
+          </a:lnRef>
+          <a:fillRef idx="3">
+            <a:schemeClr val="accent1"/>
+          </a:fillRef>
+          <a:effectRef idx="2">
+            <a:schemeClr val="accent1"/>
+          </a:effectRef>
+          <a:fontRef idx="minor">
+            <a:schemeClr val="lt1"/>
+          </a:fontRef>
+        </p:style>
+        <p:txBody>
+          <a:bodyPr rtlCol="0" anchor="ctr"/>
+          <a:lstStyle/>
+          <a:p>
+            <a:pPr algn="ctr"/>
+          </a:p>
+        </p:txBody>
+      </p:sp>
+      <p:sp>
+        <p:nvSpPr>
+          <p:cNvPr id="25" name="Rectangle 24"/>
+          <p:cNvSpPr/>
+          <p:nvPr/>
+        </p:nvSpPr>
+        <p:spPr>
+          <a:xfrm>
+            <a:off x="6164427" y="3127248"/>
+            <a:ext cx="45720" cy="2331720"/>
+          </a:xfrm>
+          <a:prstGeom prst="rect">
+            <a:avLst/>
+          </a:prstGeom>
+          <a:solidFill>
+            <a:srgbClr val="4A7C6F"/>
+          </a:solidFill>
+          <a:ln>
+            <a:noFill/>
+          </a:ln>
+        </p:spPr>
+        <p:style>
+          <a:lnRef idx="1">
+            <a:schemeClr val="accent1"/>
+          </a:lnRef>
+          <a:fillRef idx="3">
+            <a:schemeClr val="accent1"/>
+          </a:fillRef>
+          <a:effectRef idx="2">
+            <a:schemeClr val="accent1"/>
+          </a:effectRef>
+          <a:fontRef idx="minor">
+            <a:schemeClr val="lt1"/>
+          </a:fontRef>
+        </p:style>
+        <p:txBody>
+          <a:bodyPr rtlCol="0" anchor="ctr"/>
+          <a:lstStyle/>
+          <a:p>
+            <a:pPr algn="ctr"/>
+          </a:p>
+        </p:txBody>
+      </p:sp>
+      <p:sp>
+        <p:nvSpPr>
+          <p:cNvPr id="26" name="Rectangle 25"/>
+          <p:cNvSpPr/>
+          <p:nvPr/>
+        </p:nvSpPr>
+        <p:spPr>
+          <a:xfrm>
+            <a:off x="11140135" y="3236976"/>
+            <a:ext cx="384048" cy="384048"/>
+          </a:xfrm>
+          <a:prstGeom prst="rect">
+            <a:avLst/>
+          </a:prstGeom>
+          <a:noFill/>
+          <a:ln w="25400">
+            <a:solidFill>
+              <a:srgbClr val="C83C23"/>
+            </a:solidFill>
+          </a:ln>
+        </p:spPr>
+        <p:style>
+          <a:lnRef idx="1">
+            <a:schemeClr val="accent1"/>
+          </a:lnRef>
+          <a:fillRef idx="3">
+            <a:schemeClr val="accent1"/>
+          </a:fillRef>
+          <a:effectRef idx="2">
+            <a:schemeClr val="accent1"/>
+          </a:effectRef>
+          <a:fontRef idx="minor">
+            <a:schemeClr val="lt1"/>
+          </a:fontRef>
+        </p:style>
+        <p:txBody>
+          <a:bodyPr rtlCol="0" anchor="ctr"/>
+          <a:lstStyle/>
+          <a:p>
+            <a:pPr algn="ctr"/>
+          </a:p>
+        </p:txBody>
+      </p:sp>
+      <p:sp>
+        <p:nvSpPr>
+          <p:cNvPr id="27" name="TextBox 26"/>
+          <p:cNvSpPr txBox="1"/>
+          <p:nvPr/>
+        </p:nvSpPr>
+        <p:spPr>
+          <a:xfrm>
+            <a:off x="11140135" y="3236976"/>
+            <a:ext cx="384048" cy="384048"/>
+          </a:xfrm>
+          <a:prstGeom prst="rect">
+            <a:avLst/>
+          </a:prstGeom>
+          <a:noFill/>
+        </p:spPr>
+        <p:txBody>
+          <a:bodyPr wrap="square" anchor="ctr">
+            <a:spAutoFit/>
+          </a:bodyPr>
+          <a:lstStyle/>
+          <a:p>
+            <a:pPr algn="ctr">
+              <a:spcAft>
+                <a:spcPts val="300"/>
+              </a:spcAft>
+            </a:pPr>
+            <a:r>
+              <a:rPr sz="1200" b="1">
+                <a:solidFill>
+                  <a:srgbClr val="C83C23"/>
+                </a:solidFill>
+                <a:latin typeface="KaiTi"/>
+              </a:rPr>
+              <a:t>肆</a:t>
+            </a:r>
+          </a:p>
+        </p:txBody>
+      </p:sp>
+      <p:sp>
+        <p:nvSpPr>
+          <p:cNvPr id="28" name="TextBox 27"/>
+          <p:cNvSpPr txBox="1"/>
+          <p:nvPr/>
+        </p:nvSpPr>
+        <p:spPr>
+          <a:xfrm>
+            <a:off x="6310731" y="3264408"/>
+            <a:ext cx="5250027" cy="2148840"/>
+          </a:xfrm>
+          <a:prstGeom prst="rect">
+            <a:avLst/>
+          </a:prstGeom>
+          <a:noFill/>
+        </p:spPr>
+        <p:txBody>
+          <a:bodyPr wrap="square" anchor="t">
+            <a:spAutoFit/>
+          </a:bodyPr>
+          <a:lstStyle/>
+          <a:p>
+            <a:pPr algn="l">
+              <a:spcAft>
+                <a:spcPts val="300"/>
+              </a:spcAft>
+            </a:pPr>
+            <a:r>
+              <a:rPr sz="1800" b="1">
+                <a:solidFill>
+                  <a:srgbClr val="4A7C6F"/>
+                </a:solidFill>
+                <a:latin typeface="KaiTi"/>
+              </a:rPr>
+              <a:t>规律</a:t>
+            </a:r>
+          </a:p>
+          <a:p>
+            <a:pPr algn="l">
+              <a:spcAft>
+                <a:spcPts val="300"/>
+              </a:spcAft>
+            </a:pPr>
+            <a:r>
+              <a:rPr sz="400" b="0">
+                <a:solidFill>
+                  <a:srgbClr val="1E1E1E"/>
+                </a:solidFill>
+                <a:latin typeface="Microsoft YaHei"/>
+              </a:rPr>
+              <a:t/>
+            </a:r>
+          </a:p>
+          <a:p>
+            <a:pPr algn="l">
+              <a:spcAft>
+                <a:spcPts val="300"/>
+              </a:spcAft>
+            </a:pPr>
+            <a:r>
+              <a:rPr sz="1400" b="0">
+                <a:solidFill>
+                  <a:srgbClr val="1E1E1E"/>
+                </a:solidFill>
+                <a:latin typeface="Microsoft YaHei"/>
+              </a:rPr>
+              <a:t>想象基于生活经验（和泥、洒水），又超越现实</a:t>
             </a:r>
           </a:p>
         </p:txBody>
@@ -5283,57 +6756,23 @@
       </p:sp>
       <p:sp>
         <p:nvSpPr>
-          <p:cNvPr id="3" name="TextBox 2"/>
-          <p:cNvSpPr txBox="1"/>
-          <p:nvPr/>
-        </p:nvSpPr>
-        <p:spPr>
-          <a:xfrm>
-            <a:off x="571500" y="381000"/>
-            <a:ext cx="8286521" cy="411480"/>
+          <p:cNvPr id="3" name="Rectangle 2"/>
+          <p:cNvSpPr/>
+          <p:nvPr/>
+        </p:nvSpPr>
+        <p:spPr>
+          <a:xfrm>
+            <a:off x="548640" y="347472"/>
+            <a:ext cx="365760" cy="365760"/>
           </a:xfrm>
           <a:prstGeom prst="rect">
             <a:avLst/>
           </a:prstGeom>
           <a:noFill/>
-        </p:spPr>
-        <p:txBody>
-          <a:bodyPr wrap="none">
-            <a:spAutoFit/>
-          </a:bodyPr>
-          <a:lstStyle/>
-          <a:p>
-            <a:r>
-              <a:rPr sz="2800" b="1">
-                <a:solidFill>
-                  <a:srgbClr val="6B9080"/>
-                </a:solidFill>
-                <a:latin typeface="Microsoft YaHei"/>
-              </a:rPr>
-              <a:t>形象剖析：神性与人性的交融</a:t>
-            </a:r>
-          </a:p>
-        </p:txBody>
-      </p:sp>
-      <p:sp>
-        <p:nvSpPr>
-          <p:cNvPr id="4" name="Rectangle 3"/>
-          <p:cNvSpPr/>
-          <p:nvPr/>
-        </p:nvSpPr>
-        <p:spPr>
-          <a:xfrm>
-            <a:off x="571500" y="838200"/>
-            <a:ext cx="11048695" cy="25400"/>
-          </a:xfrm>
-          <a:prstGeom prst="rect">
-            <a:avLst/>
-          </a:prstGeom>
-          <a:solidFill>
-            <a:srgbClr val="E2E2D9"/>
-          </a:solidFill>
-          <a:ln>
-            <a:noFill/>
+          <a:ln w="25400">
+            <a:solidFill>
+              <a:srgbClr val="C83C23"/>
+            </a:solidFill>
           </a:ln>
         </p:spPr>
         <p:style>
@@ -5360,14 +6799,53 @@
       </p:sp>
       <p:sp>
         <p:nvSpPr>
+          <p:cNvPr id="4" name="TextBox 3"/>
+          <p:cNvSpPr txBox="1"/>
+          <p:nvPr/>
+        </p:nvSpPr>
+        <p:spPr>
+          <a:xfrm>
+            <a:off x="548640" y="347472"/>
+            <a:ext cx="365760" cy="365760"/>
+          </a:xfrm>
+          <a:prstGeom prst="rect">
+            <a:avLst/>
+          </a:prstGeom>
+          <a:noFill/>
+        </p:spPr>
+        <p:txBody>
+          <a:bodyPr wrap="square" anchor="ctr">
+            <a:spAutoFit/>
+          </a:bodyPr>
+          <a:lstStyle/>
+          <a:p>
+            <a:pPr algn="ctr">
+              <a:spcAft>
+                <a:spcPts val="300"/>
+              </a:spcAft>
+            </a:pPr>
+            <a:r>
+              <a:rPr sz="1000" b="1">
+                <a:solidFill>
+                  <a:srgbClr val="C83C23"/>
+                </a:solidFill>
+                <a:latin typeface="KaiTi"/>
+              </a:rPr>
+              <a:t>05</a:t>
+            </a:r>
+          </a:p>
+        </p:txBody>
+      </p:sp>
+      <p:sp>
+        <p:nvSpPr>
           <p:cNvPr id="5" name="TextBox 4"/>
           <p:cNvSpPr txBox="1"/>
           <p:nvPr/>
         </p:nvSpPr>
         <p:spPr>
           <a:xfrm>
-            <a:off x="9631429" y="426720"/>
-            <a:ext cx="1097280" cy="365760"/>
+            <a:off x="1024128" y="347472"/>
+            <a:ext cx="7766090" cy="365760"/>
           </a:xfrm>
           <a:prstGeom prst="rect">
             <a:avLst/>
@@ -5375,44 +6853,86 @@
           <a:noFill/>
         </p:spPr>
         <p:txBody>
-          <a:bodyPr wrap="none">
+          <a:bodyPr wrap="square" anchor="t">
             <a:spAutoFit/>
           </a:bodyPr>
           <a:lstStyle/>
           <a:p>
-            <a:r>
-              <a:rPr sz="1600" b="1">
-                <a:solidFill>
-                  <a:srgbClr val="6C757D"/>
+            <a:pPr algn="l">
+              <a:spcAft>
+                <a:spcPts val="300"/>
+              </a:spcAft>
+            </a:pPr>
+            <a:r>
+              <a:rPr sz="2000" b="1">
+                <a:solidFill>
+                  <a:srgbClr val="1E1E1E"/>
+                </a:solidFill>
+                <a:latin typeface="KaiTi"/>
+              </a:rPr>
+              <a:t>比较阅读</a:t>
+            </a:r>
+          </a:p>
+        </p:txBody>
+      </p:sp>
+      <p:sp>
+        <p:nvSpPr>
+          <p:cNvPr id="6" name="TextBox 5"/>
+          <p:cNvSpPr txBox="1"/>
+          <p:nvPr/>
+        </p:nvSpPr>
+        <p:spPr>
+          <a:xfrm>
+            <a:off x="8869451" y="347472"/>
+            <a:ext cx="2773603" cy="320040"/>
+          </a:xfrm>
+          <a:prstGeom prst="rect">
+            <a:avLst/>
+          </a:prstGeom>
+          <a:noFill/>
+        </p:spPr>
+        <p:txBody>
+          <a:bodyPr wrap="square" anchor="t">
+            <a:spAutoFit/>
+          </a:bodyPr>
+          <a:lstStyle/>
+          <a:p>
+            <a:pPr algn="r">
+              <a:spcAft>
+                <a:spcPts val="300"/>
+              </a:spcAft>
+            </a:pPr>
+            <a:r>
+              <a:rPr sz="1100" b="0">
+                <a:solidFill>
+                  <a:srgbClr val="5A6A62"/>
                 </a:solidFill>
                 <a:latin typeface="Microsoft YaHei"/>
               </a:rPr>
-              <a:t>05 / 08</a:t>
-            </a:r>
-          </a:p>
-        </p:txBody>
-      </p:sp>
-      <p:sp>
-        <p:nvSpPr>
-          <p:cNvPr id="6" name="Rounded Rectangle 5"/>
+              <a:t>卷 5/7</a:t>
+            </a:r>
+          </a:p>
+        </p:txBody>
+      </p:sp>
+      <p:sp>
+        <p:nvSpPr>
+          <p:cNvPr id="7" name="Rectangle 6"/>
           <p:cNvSpPr/>
           <p:nvPr/>
         </p:nvSpPr>
         <p:spPr>
           <a:xfrm>
-            <a:off x="571500" y="1066800"/>
-            <a:ext cx="5432907" cy="4389120"/>
-          </a:xfrm>
-          <a:prstGeom prst="roundRect">
+            <a:off x="548640" y="768096"/>
+            <a:ext cx="11094415" cy="9144"/>
+          </a:xfrm>
+          <a:prstGeom prst="rect">
             <a:avLst/>
           </a:prstGeom>
           <a:solidFill>
-            <a:srgbClr val="FFFFFF"/>
+            <a:srgbClr val="5A6A62"/>
           </a:solidFill>
-          <a:ln w="12700">
-            <a:solidFill>
-              <a:srgbClr val="E2E2D9"/>
-            </a:solidFill>
+          <a:ln>
+            <a:noFill/>
           </a:ln>
         </p:spPr>
         <p:style>
@@ -5439,20 +6959,59 @@
       </p:sp>
       <p:sp>
         <p:nvSpPr>
-          <p:cNvPr id="7" name="Rectangle 6"/>
+          <p:cNvPr id="8" name="TextBox 7"/>
+          <p:cNvSpPr txBox="1"/>
+          <p:nvPr/>
+        </p:nvSpPr>
+        <p:spPr>
+          <a:xfrm>
+            <a:off x="548640" y="704088"/>
+            <a:ext cx="11094415" cy="201168"/>
+          </a:xfrm>
+          <a:prstGeom prst="rect">
+            <a:avLst/>
+          </a:prstGeom>
+          <a:noFill/>
+        </p:spPr>
+        <p:txBody>
+          <a:bodyPr wrap="square" anchor="t">
+            <a:spAutoFit/>
+          </a:bodyPr>
+          <a:lstStyle/>
+          <a:p>
+            <a:pPr algn="ctr">
+              <a:spcAft>
+                <a:spcPts val="300"/>
+              </a:spcAft>
+            </a:pPr>
+            <a:r>
+              <a:rPr sz="900" b="0">
+                <a:solidFill>
+                  <a:srgbClr val="5A6A62"/>
+                </a:solidFill>
+                <a:latin typeface="Microsoft YaHei"/>
+              </a:rPr>
+              <a:t>～ ～ ～ ～ ～ ～ ～ ～ ～ ～ ～ ～</a:t>
+            </a:r>
+          </a:p>
+        </p:txBody>
+      </p:sp>
+      <p:sp>
+        <p:nvSpPr>
+          <p:cNvPr id="9" name="Rectangle 8"/>
           <p:cNvSpPr/>
           <p:nvPr/>
         </p:nvSpPr>
         <p:spPr>
           <a:xfrm>
-            <a:off x="708660" y="1322832"/>
-            <a:ext cx="50800" cy="320040"/>
+            <a:off x="548640" y="658368"/>
+            <a:ext cx="5455767" cy="3246120"/>
           </a:xfrm>
           <a:prstGeom prst="rect">
             <a:avLst/>
           </a:prstGeom>
           <a:solidFill>
-            <a:srgbClr val="E09F68"/>
+            <a:srgbClr val="D8E6DF"/>
           </a:solidFill>
           <a:ln>
             <a:noFill/>
@@ -5482,112 +7041,23 @@
       </p:sp>
       <p:sp>
         <p:nvSpPr>
-          <p:cNvPr id="8" name="TextBox 7"/>
-          <p:cNvSpPr txBox="1"/>
-          <p:nvPr/>
-        </p:nvSpPr>
-        <p:spPr>
-          <a:xfrm>
-            <a:off x="827532" y="1231392"/>
-            <a:ext cx="5067147" cy="4114800"/>
-          </a:xfrm>
-          <a:prstGeom prst="rect">
-            <a:avLst/>
-          </a:prstGeom>
-          <a:noFill/>
-        </p:spPr>
-        <p:txBody>
-          <a:bodyPr wrap="square">
-            <a:spAutoFit/>
-          </a:bodyPr>
-          <a:lstStyle/>
-          <a:p>
-            <a:pPr>
-              <a:spcAft>
-                <a:spcPts val="1000"/>
-              </a:spcAft>
-            </a:pPr>
-            <a:r>
-              <a:rPr sz="2000" b="1">
-                <a:solidFill>
-                  <a:srgbClr val="6B9080"/>
-                </a:solidFill>
-                <a:latin typeface="Microsoft YaHei"/>
-              </a:rPr>
-              <a:t>神性维度（造物主）</a:t>
-            </a:r>
-          </a:p>
-          <a:p>
-            <a:pPr>
-              <a:spcAft>
-                <a:spcPts val="600"/>
-              </a:spcAft>
-            </a:pPr>
-            <a:r>
-              <a:rPr sz="1600" b="0">
-                <a:solidFill>
-                  <a:srgbClr val="2B2D42"/>
-                </a:solidFill>
-                <a:latin typeface="Microsoft YaHei"/>
-              </a:rPr>
-              <a:t>• 神通广大、变幻莫测。</a:t>
-            </a:r>
-          </a:p>
-          <a:p>
-            <a:pPr>
-              <a:spcAft>
-                <a:spcPts val="600"/>
-              </a:spcAft>
-            </a:pPr>
-            <a:r>
-              <a:rPr sz="1600" b="0">
-                <a:solidFill>
-                  <a:srgbClr val="2B2D42"/>
-                </a:solidFill>
-                <a:latin typeface="Microsoft YaHei"/>
-              </a:rPr>
-              <a:t>• 具有创造生命的至高权力。</a:t>
-            </a:r>
-          </a:p>
-          <a:p>
-            <a:pPr>
-              <a:spcAft>
-                <a:spcPts val="600"/>
-              </a:spcAft>
-            </a:pPr>
-            <a:r>
-              <a:rPr sz="1600" b="0">
-                <a:solidFill>
-                  <a:srgbClr val="2B2D42"/>
-                </a:solidFill>
-                <a:latin typeface="Microsoft YaHei"/>
-              </a:rPr>
-              <a:t>• 挥绳洒泥即可化为活生生的人。</a:t>
-            </a:r>
-          </a:p>
-        </p:txBody>
-      </p:sp>
-      <p:sp>
-        <p:nvSpPr>
-          <p:cNvPr id="9" name="Rounded Rectangle 8"/>
+          <p:cNvPr id="10" name="Rectangle 9"/>
           <p:cNvSpPr/>
           <p:nvPr/>
         </p:nvSpPr>
         <p:spPr>
           <a:xfrm>
-            <a:off x="6187287" y="1066800"/>
-            <a:ext cx="5432907" cy="4389120"/>
-          </a:xfrm>
-          <a:prstGeom prst="roundRect">
+            <a:off x="548640" y="658368"/>
+            <a:ext cx="45720" cy="3246120"/>
+          </a:xfrm>
+          <a:prstGeom prst="rect">
             <a:avLst/>
           </a:prstGeom>
           <a:solidFill>
-            <a:srgbClr val="FFFFFF"/>
+            <a:srgbClr val="4A7C6F"/>
           </a:solidFill>
-          <a:ln w="12700">
-            <a:solidFill>
-              <a:srgbClr val="E2E2D9"/>
-            </a:solidFill>
+          <a:ln>
+            <a:noFill/>
           </a:ln>
         </p:spPr>
         <p:style>
@@ -5614,20 +7084,139 @@
       </p:sp>
       <p:sp>
         <p:nvSpPr>
-          <p:cNvPr id="10" name="Rectangle 9"/>
+          <p:cNvPr id="11" name="TextBox 10"/>
+          <p:cNvSpPr txBox="1"/>
+          <p:nvPr/>
+        </p:nvSpPr>
+        <p:spPr>
+          <a:xfrm>
+            <a:off x="694944" y="768096"/>
+            <a:ext cx="5254599" cy="3081528"/>
+          </a:xfrm>
+          <a:prstGeom prst="rect">
+            <a:avLst/>
+          </a:prstGeom>
+          <a:noFill/>
+        </p:spPr>
+        <p:txBody>
+          <a:bodyPr wrap="square" anchor="t">
+            <a:spAutoFit/>
+          </a:bodyPr>
+          <a:lstStyle/>
+          <a:p>
+            <a:pPr algn="l">
+              <a:spcAft>
+                <a:spcPts val="300"/>
+              </a:spcAft>
+            </a:pPr>
+            <a:r>
+              <a:rPr sz="1600" b="1">
+                <a:solidFill>
+                  <a:srgbClr val="4A7C6F"/>
+                </a:solidFill>
+                <a:latin typeface="KaiTi"/>
+              </a:rPr>
+              <a:t>《风俗通》古籍原文</a:t>
+            </a:r>
+          </a:p>
+          <a:p>
+            <a:pPr algn="l">
+              <a:spcAft>
+                <a:spcPts val="300"/>
+              </a:spcAft>
+            </a:pPr>
+            <a:r>
+              <a:rPr sz="600" b="0">
+                <a:solidFill>
+                  <a:srgbClr val="1E1E1E"/>
+                </a:solidFill>
+                <a:latin typeface="Microsoft YaHei"/>
+              </a:rPr>
+              <a:t/>
+            </a:r>
+          </a:p>
+          <a:p>
+            <a:pPr algn="l">
+              <a:spcAft>
+                <a:spcPts val="300"/>
+              </a:spcAft>
+            </a:pPr>
+            <a:r>
+              <a:rPr sz="1500" b="0">
+                <a:solidFill>
+                  <a:srgbClr val="1E1E1E"/>
+                </a:solidFill>
+                <a:latin typeface="Microsoft YaHei"/>
+              </a:rPr>
+              <a:t>文字简洁，重在说明造人方法。</a:t>
+            </a:r>
+          </a:p>
+          <a:p>
+            <a:pPr algn="l">
+              <a:spcAft>
+                <a:spcPts val="300"/>
+              </a:spcAft>
+            </a:pPr>
+            <a:r>
+              <a:rPr sz="600" b="0">
+                <a:solidFill>
+                  <a:srgbClr val="1E1E1E"/>
+                </a:solidFill>
+                <a:latin typeface="Microsoft YaHei"/>
+              </a:rPr>
+              <a:t/>
+            </a:r>
+          </a:p>
+          <a:p>
+            <a:pPr algn="l">
+              <a:spcAft>
+                <a:spcPts val="300"/>
+              </a:spcAft>
+            </a:pPr>
+            <a:r>
+              <a:rPr sz="1400" b="0">
+                <a:solidFill>
+                  <a:srgbClr val="5A6A62"/>
+                </a:solidFill>
+                <a:latin typeface="Microsoft YaHei"/>
+              </a:rPr>
+              <a:t>「女娲抟黄土作人……</a:t>
+            </a:r>
+          </a:p>
+          <a:p>
+            <a:pPr algn="l">
+              <a:spcAft>
+                <a:spcPts val="300"/>
+              </a:spcAft>
+            </a:pPr>
+            <a:r>
+              <a:rPr sz="1400" b="0">
+                <a:solidFill>
+                  <a:srgbClr val="5A6A62"/>
+                </a:solidFill>
+                <a:latin typeface="Microsoft YaHei"/>
+              </a:rPr>
+              <a:t>引绳于泥中，举以为人。」</a:t>
+            </a:r>
+          </a:p>
+        </p:txBody>
+      </p:sp>
+      <p:sp>
+        <p:nvSpPr>
+          <p:cNvPr id="12" name="Rectangle 11"/>
           <p:cNvSpPr/>
           <p:nvPr/>
         </p:nvSpPr>
         <p:spPr>
           <a:xfrm>
-            <a:off x="6324447" y="1322832"/>
-            <a:ext cx="50800" cy="320040"/>
+            <a:off x="6187287" y="658368"/>
+            <a:ext cx="5455767" cy="3246120"/>
           </a:xfrm>
           <a:prstGeom prst="rect">
             <a:avLst/>
           </a:prstGeom>
           <a:solidFill>
-            <a:srgbClr val="E09F68"/>
+            <a:srgbClr val="E4EDE8"/>
           </a:solidFill>
           <a:ln>
             <a:noFill/>
@@ -5657,14 +7246,57 @@
       </p:sp>
       <p:sp>
         <p:nvSpPr>
-          <p:cNvPr id="11" name="TextBox 10"/>
+          <p:cNvPr id="13" name="Rectangle 12"/>
+          <p:cNvSpPr/>
+          <p:nvPr/>
+        </p:nvSpPr>
+        <p:spPr>
+          <a:xfrm>
+            <a:off x="6187287" y="658368"/>
+            <a:ext cx="45720" cy="3246120"/>
+          </a:xfrm>
+          <a:prstGeom prst="rect">
+            <a:avLst/>
+          </a:prstGeom>
+          <a:solidFill>
+            <a:srgbClr val="4A7C6F"/>
+          </a:solidFill>
+          <a:ln>
+            <a:noFill/>
+          </a:ln>
+        </p:spPr>
+        <p:style>
+          <a:lnRef idx="1">
+            <a:schemeClr val="accent1"/>
+          </a:lnRef>
+          <a:fillRef idx="3">
+            <a:schemeClr val="accent1"/>
+          </a:fillRef>
+          <a:effectRef idx="2">
+            <a:schemeClr val="accent1"/>
+          </a:effectRef>
+          <a:fontRef idx="minor">
+            <a:schemeClr val="lt1"/>
+          </a:fontRef>
+        </p:style>
+        <p:txBody>
+          <a:bodyPr rtlCol="0" anchor="ctr"/>
+          <a:lstStyle/>
+          <a:p>
+            <a:pPr algn="ctr"/>
+          </a:p>
+        </p:txBody>
+      </p:sp>
+      <p:sp>
+        <p:nvSpPr>
+          <p:cNvPr id="14" name="TextBox 13"/>
           <p:cNvSpPr txBox="1"/>
           <p:nvPr/>
         </p:nvSpPr>
         <p:spPr>
           <a:xfrm>
-            <a:off x="6443319" y="1231392"/>
-            <a:ext cx="5067147" cy="4114800"/>
+            <a:off x="6333591" y="768096"/>
+            <a:ext cx="5254599" cy="3081528"/>
           </a:xfrm>
           <a:prstGeom prst="rect">
             <a:avLst/>
@@ -5672,88 +7304,231 @@
           <a:noFill/>
         </p:spPr>
         <p:txBody>
-          <a:bodyPr wrap="square">
+          <a:bodyPr wrap="square" anchor="t">
             <a:spAutoFit/>
           </a:bodyPr>
           <a:lstStyle/>
           <a:p>
-            <a:pPr>
-              <a:spcAft>
-                <a:spcPts val="1000"/>
-              </a:spcAft>
-            </a:pPr>
-            <a:r>
-              <a:rPr sz="2000" b="1">
-                <a:solidFill>
-                  <a:srgbClr val="6B9080"/>
+            <a:pPr algn="l">
+              <a:spcAft>
+                <a:spcPts val="300"/>
+              </a:spcAft>
+            </a:pPr>
+            <a:r>
+              <a:rPr sz="1600" b="1">
+                <a:solidFill>
+                  <a:srgbClr val="4A7C6F"/>
+                </a:solidFill>
+                <a:latin typeface="KaiTi"/>
+              </a:rPr>
+              <a:t>课文改写</a:t>
+            </a:r>
+          </a:p>
+          <a:p>
+            <a:pPr algn="l">
+              <a:spcAft>
+                <a:spcPts val="300"/>
+              </a:spcAft>
+            </a:pPr>
+            <a:r>
+              <a:rPr sz="600" b="0">
+                <a:solidFill>
+                  <a:srgbClr val="1E1E1E"/>
                 </a:solidFill>
                 <a:latin typeface="Microsoft YaHei"/>
               </a:rPr>
-              <a:t>人性维度（伟大的母亲）</a:t>
-            </a:r>
-          </a:p>
-          <a:p>
-            <a:pPr>
-              <a:spcAft>
-                <a:spcPts val="600"/>
-              </a:spcAft>
-            </a:pPr>
-            <a:r>
-              <a:rPr sz="1600" b="0">
-                <a:solidFill>
-                  <a:srgbClr val="2B2D42"/>
+              <a:t/>
+            </a:r>
+          </a:p>
+          <a:p>
+            <a:pPr algn="l">
+              <a:spcAft>
+                <a:spcPts val="300"/>
+              </a:spcAft>
+            </a:pPr>
+            <a:r>
+              <a:rPr sz="1500" b="0">
+                <a:solidFill>
+                  <a:srgbClr val="1E1E1E"/>
                 </a:solidFill>
                 <a:latin typeface="Microsoft YaHei"/>
               </a:rPr>
-              <a:t>• 会感到寂寞与孤独。</a:t>
-            </a:r>
-          </a:p>
-          <a:p>
-            <a:pPr>
-              <a:spcAft>
-                <a:spcPts val="600"/>
-              </a:spcAft>
-            </a:pPr>
-            <a:r>
-              <a:rPr sz="1600" b="0">
-                <a:solidFill>
-                  <a:srgbClr val="2B2D42"/>
+              <a:t>增加孤独心理、造人细节</a:t>
+            </a:r>
+          </a:p>
+          <a:p>
+            <a:pPr algn="l">
+              <a:spcAft>
+                <a:spcPts val="300"/>
+              </a:spcAft>
+            </a:pPr>
+            <a:r>
+              <a:rPr sz="1500" b="0">
+                <a:solidFill>
+                  <a:srgbClr val="1E1E1E"/>
                 </a:solidFill>
                 <a:latin typeface="Microsoft YaHei"/>
               </a:rPr>
-              <a:t>• 看到作品时充满成功与满足感。</a:t>
-            </a:r>
-          </a:p>
-          <a:p>
-            <a:pPr>
-              <a:spcAft>
-                <a:spcPts val="600"/>
-              </a:spcAft>
-            </a:pPr>
-            <a:r>
-              <a:rPr sz="1600" b="0">
-                <a:solidFill>
-                  <a:srgbClr val="2B2D42"/>
+              <a:t>与情感描写，更具温度。</a:t>
+            </a:r>
+          </a:p>
+        </p:txBody>
+      </p:sp>
+      <p:sp>
+        <p:nvSpPr>
+          <p:cNvPr id="15" name="Rectangle 14"/>
+          <p:cNvSpPr/>
+          <p:nvPr/>
+        </p:nvSpPr>
+        <p:spPr>
+          <a:xfrm>
+            <a:off x="548640" y="4114800"/>
+            <a:ext cx="11094415" cy="1874519"/>
+          </a:xfrm>
+          <a:prstGeom prst="rect">
+            <a:avLst/>
+          </a:prstGeom>
+          <a:solidFill>
+            <a:srgbClr val="F4F1EA"/>
+          </a:solidFill>
+          <a:ln w="25400">
+            <a:solidFill>
+              <a:srgbClr val="C83C23"/>
+            </a:solidFill>
+          </a:ln>
+        </p:spPr>
+        <p:style>
+          <a:lnRef idx="1">
+            <a:schemeClr val="accent1"/>
+          </a:lnRef>
+          <a:fillRef idx="3">
+            <a:schemeClr val="accent1"/>
+          </a:fillRef>
+          <a:effectRef idx="2">
+            <a:schemeClr val="accent1"/>
+          </a:effectRef>
+          <a:fontRef idx="minor">
+            <a:schemeClr val="lt1"/>
+          </a:fontRef>
+        </p:style>
+        <p:txBody>
+          <a:bodyPr rtlCol="0" anchor="ctr"/>
+          <a:lstStyle/>
+          <a:p>
+            <a:pPr algn="ctr"/>
+          </a:p>
+        </p:txBody>
+      </p:sp>
+      <p:sp>
+        <p:nvSpPr>
+          <p:cNvPr id="16" name="Rectangle 15"/>
+          <p:cNvSpPr/>
+          <p:nvPr/>
+        </p:nvSpPr>
+        <p:spPr>
+          <a:xfrm>
+            <a:off x="548640" y="4114800"/>
+            <a:ext cx="54864" cy="1874519"/>
+          </a:xfrm>
+          <a:prstGeom prst="rect">
+            <a:avLst/>
+          </a:prstGeom>
+          <a:solidFill>
+            <a:srgbClr val="4A7C6F"/>
+          </a:solidFill>
+          <a:ln>
+            <a:noFill/>
+          </a:ln>
+        </p:spPr>
+        <p:style>
+          <a:lnRef idx="1">
+            <a:schemeClr val="accent1"/>
+          </a:lnRef>
+          <a:fillRef idx="3">
+            <a:schemeClr val="accent1"/>
+          </a:fillRef>
+          <a:effectRef idx="2">
+            <a:schemeClr val="accent1"/>
+          </a:effectRef>
+          <a:fontRef idx="minor">
+            <a:schemeClr val="lt1"/>
+          </a:fontRef>
+        </p:style>
+        <p:txBody>
+          <a:bodyPr rtlCol="0" anchor="ctr"/>
+          <a:lstStyle/>
+          <a:p>
+            <a:pPr algn="ctr"/>
+          </a:p>
+        </p:txBody>
+      </p:sp>
+      <p:sp>
+        <p:nvSpPr>
+          <p:cNvPr id="17" name="TextBox 16"/>
+          <p:cNvSpPr txBox="1"/>
+          <p:nvPr/>
+        </p:nvSpPr>
+        <p:spPr>
+          <a:xfrm>
+            <a:off x="731520" y="4251960"/>
+            <a:ext cx="10774375" cy="1600200"/>
+          </a:xfrm>
+          <a:prstGeom prst="rect">
+            <a:avLst/>
+          </a:prstGeom>
+          <a:noFill/>
+        </p:spPr>
+        <p:txBody>
+          <a:bodyPr wrap="square" anchor="t">
+            <a:spAutoFit/>
+          </a:bodyPr>
+          <a:lstStyle/>
+          <a:p>
+            <a:pPr algn="l">
+              <a:spcAft>
+                <a:spcPts val="300"/>
+              </a:spcAft>
+            </a:pPr>
+            <a:r>
+              <a:rPr sz="1400" b="1">
+                <a:solidFill>
+                  <a:srgbClr val="C83C23"/>
+                </a:solidFill>
+                <a:latin typeface="KaiTi"/>
+              </a:rPr>
+              <a:t>改写意图与主题</a:t>
+            </a:r>
+          </a:p>
+          <a:p>
+            <a:pPr algn="l">
+              <a:spcAft>
+                <a:spcPts val="300"/>
+              </a:spcAft>
+            </a:pPr>
+            <a:r>
+              <a:rPr sz="1600" b="1">
+                <a:solidFill>
+                  <a:srgbClr val="1E1E1E"/>
                 </a:solidFill>
                 <a:latin typeface="Microsoft YaHei"/>
               </a:rPr>
-              <a:t>• 工作累了会疲倦。</a:t>
-            </a:r>
-          </a:p>
-          <a:p>
-            <a:pPr>
-              <a:spcAft>
-                <a:spcPts val="600"/>
-              </a:spcAft>
-            </a:pPr>
-            <a:r>
-              <a:rPr sz="1600" b="0">
-                <a:solidFill>
-                  <a:srgbClr val="2B2D42"/>
+              <a:t>让神话更生动，表达对生命与创造的礼赞</a:t>
+            </a:r>
+          </a:p>
+          <a:p>
+            <a:pPr algn="l">
+              <a:spcAft>
+                <a:spcPts val="300"/>
+              </a:spcAft>
+            </a:pPr>
+            <a:r>
+              <a:rPr sz="1400" b="0">
+                <a:solidFill>
+                  <a:srgbClr val="4A7C6F"/>
                 </a:solidFill>
                 <a:latin typeface="Microsoft YaHei"/>
               </a:rPr>
-              <a:t>• 神性为骨，人性为血肉。</a:t>
+              <a:t>策展主题：生命来之不易，创造值得珍视（创造与生命）</a:t>
             </a:r>
           </a:p>
         </p:txBody>
@@ -5821,57 +7596,23 @@
       </p:sp>
       <p:sp>
         <p:nvSpPr>
-          <p:cNvPr id="3" name="TextBox 2"/>
-          <p:cNvSpPr txBox="1"/>
-          <p:nvPr/>
-        </p:nvSpPr>
-        <p:spPr>
-          <a:xfrm>
-            <a:off x="571500" y="381000"/>
-            <a:ext cx="8286521" cy="411480"/>
+          <p:cNvPr id="3" name="Rectangle 2"/>
+          <p:cNvSpPr/>
+          <p:nvPr/>
+        </p:nvSpPr>
+        <p:spPr>
+          <a:xfrm>
+            <a:off x="548640" y="347472"/>
+            <a:ext cx="365760" cy="365760"/>
           </a:xfrm>
           <a:prstGeom prst="rect">
             <a:avLst/>
           </a:prstGeom>
           <a:noFill/>
-        </p:spPr>
-        <p:txBody>
-          <a:bodyPr wrap="none">
-            <a:spAutoFit/>
-          </a:bodyPr>
-          <a:lstStyle/>
-          <a:p>
-            <a:r>
-              <a:rPr sz="2800" b="1">
-                <a:solidFill>
-                  <a:srgbClr val="6B9080"/>
-                </a:solidFill>
-                <a:latin typeface="Microsoft YaHei"/>
-              </a:rPr>
-              <a:t>神话思维的本质</a:t>
-            </a:r>
-          </a:p>
-        </p:txBody>
-      </p:sp>
-      <p:sp>
-        <p:nvSpPr>
-          <p:cNvPr id="4" name="Rectangle 3"/>
-          <p:cNvSpPr/>
-          <p:nvPr/>
-        </p:nvSpPr>
-        <p:spPr>
-          <a:xfrm>
-            <a:off x="571500" y="838200"/>
-            <a:ext cx="11048695" cy="25400"/>
-          </a:xfrm>
-          <a:prstGeom prst="rect">
-            <a:avLst/>
-          </a:prstGeom>
-          <a:solidFill>
-            <a:srgbClr val="E2E2D9"/>
-          </a:solidFill>
-          <a:ln>
-            <a:noFill/>
+          <a:ln w="25400">
+            <a:solidFill>
+              <a:srgbClr val="C83C23"/>
+            </a:solidFill>
           </a:ln>
         </p:spPr>
         <p:style>
@@ -5898,14 +7639,53 @@
       </p:sp>
       <p:sp>
         <p:nvSpPr>
+          <p:cNvPr id="4" name="TextBox 3"/>
+          <p:cNvSpPr txBox="1"/>
+          <p:nvPr/>
+        </p:nvSpPr>
+        <p:spPr>
+          <a:xfrm>
+            <a:off x="548640" y="347472"/>
+            <a:ext cx="365760" cy="365760"/>
+          </a:xfrm>
+          <a:prstGeom prst="rect">
+            <a:avLst/>
+          </a:prstGeom>
+          <a:noFill/>
+        </p:spPr>
+        <p:txBody>
+          <a:bodyPr wrap="square" anchor="ctr">
+            <a:spAutoFit/>
+          </a:bodyPr>
+          <a:lstStyle/>
+          <a:p>
+            <a:pPr algn="ctr">
+              <a:spcAft>
+                <a:spcPts val="300"/>
+              </a:spcAft>
+            </a:pPr>
+            <a:r>
+              <a:rPr sz="1000" b="1">
+                <a:solidFill>
+                  <a:srgbClr val="C83C23"/>
+                </a:solidFill>
+                <a:latin typeface="KaiTi"/>
+              </a:rPr>
+              <a:t>06</a:t>
+            </a:r>
+          </a:p>
+        </p:txBody>
+      </p:sp>
+      <p:sp>
+        <p:nvSpPr>
           <p:cNvPr id="5" name="TextBox 4"/>
           <p:cNvSpPr txBox="1"/>
           <p:nvPr/>
         </p:nvSpPr>
         <p:spPr>
           <a:xfrm>
-            <a:off x="9631429" y="426720"/>
-            <a:ext cx="1097280" cy="365760"/>
+            <a:off x="1024128" y="347472"/>
+            <a:ext cx="7766090" cy="365760"/>
           </a:xfrm>
           <a:prstGeom prst="rect">
             <a:avLst/>
@@ -5913,44 +7693,86 @@
           <a:noFill/>
         </p:spPr>
         <p:txBody>
-          <a:bodyPr wrap="none">
+          <a:bodyPr wrap="square" anchor="t">
             <a:spAutoFit/>
           </a:bodyPr>
           <a:lstStyle/>
           <a:p>
-            <a:r>
-              <a:rPr sz="1600" b="1">
-                <a:solidFill>
-                  <a:srgbClr val="6C757D"/>
+            <a:pPr algn="l">
+              <a:spcAft>
+                <a:spcPts val="300"/>
+              </a:spcAft>
+            </a:pPr>
+            <a:r>
+              <a:rPr sz="2000" b="1">
+                <a:solidFill>
+                  <a:srgbClr val="1E1E1E"/>
+                </a:solidFill>
+                <a:latin typeface="KaiTi"/>
+              </a:rPr>
+              <a:t>课堂小结</a:t>
+            </a:r>
+          </a:p>
+        </p:txBody>
+      </p:sp>
+      <p:sp>
+        <p:nvSpPr>
+          <p:cNvPr id="6" name="TextBox 5"/>
+          <p:cNvSpPr txBox="1"/>
+          <p:nvPr/>
+        </p:nvSpPr>
+        <p:spPr>
+          <a:xfrm>
+            <a:off x="8869451" y="347472"/>
+            <a:ext cx="2773603" cy="320040"/>
+          </a:xfrm>
+          <a:prstGeom prst="rect">
+            <a:avLst/>
+          </a:prstGeom>
+          <a:noFill/>
+        </p:spPr>
+        <p:txBody>
+          <a:bodyPr wrap="square" anchor="t">
+            <a:spAutoFit/>
+          </a:bodyPr>
+          <a:lstStyle/>
+          <a:p>
+            <a:pPr algn="r">
+              <a:spcAft>
+                <a:spcPts val="300"/>
+              </a:spcAft>
+            </a:pPr>
+            <a:r>
+              <a:rPr sz="1100" b="0">
+                <a:solidFill>
+                  <a:srgbClr val="5A6A62"/>
                 </a:solidFill>
                 <a:latin typeface="Microsoft YaHei"/>
               </a:rPr>
-              <a:t>06 / 08</a:t>
-            </a:r>
-          </a:p>
-        </p:txBody>
-      </p:sp>
-      <p:sp>
-        <p:nvSpPr>
-          <p:cNvPr id="6" name="Rounded Rectangle 5"/>
+              <a:t>卷 6/7</a:t>
+            </a:r>
+          </a:p>
+        </p:txBody>
+      </p:sp>
+      <p:sp>
+        <p:nvSpPr>
+          <p:cNvPr id="7" name="Rectangle 6"/>
           <p:cNvSpPr/>
           <p:nvPr/>
         </p:nvSpPr>
         <p:spPr>
           <a:xfrm>
-            <a:off x="571500" y="1158240"/>
-            <a:ext cx="11048695" cy="4206240"/>
-          </a:xfrm>
-          <a:prstGeom prst="roundRect">
+            <a:off x="548640" y="768096"/>
+            <a:ext cx="11094415" cy="9144"/>
+          </a:xfrm>
+          <a:prstGeom prst="rect">
             <a:avLst/>
           </a:prstGeom>
           <a:solidFill>
-            <a:srgbClr val="FFFFFF"/>
+            <a:srgbClr val="5A6A62"/>
           </a:solidFill>
           <a:ln>
-            <a:solidFill>
-              <a:srgbClr val="E2E2D9"/>
-            </a:solidFill>
+            <a:noFill/>
           </a:ln>
         </p:spPr>
         <p:style>
@@ -5977,14 +7799,14 @@
       </p:sp>
       <p:sp>
         <p:nvSpPr>
-          <p:cNvPr id="7" name="TextBox 6"/>
+          <p:cNvPr id="8" name="TextBox 7"/>
           <p:cNvSpPr txBox="1"/>
           <p:nvPr/>
         </p:nvSpPr>
         <p:spPr>
           <a:xfrm>
-            <a:off x="1028700" y="1752600"/>
-            <a:ext cx="10134295" cy="731520"/>
+            <a:off x="548640" y="704088"/>
+            <a:ext cx="11094415" cy="201168"/>
           </a:xfrm>
           <a:prstGeom prst="rect">
             <a:avLst/>
@@ -5992,34 +7814,124 @@
           <a:noFill/>
         </p:spPr>
         <p:txBody>
-          <a:bodyPr wrap="none">
+          <a:bodyPr wrap="square" anchor="t">
             <a:spAutoFit/>
           </a:bodyPr>
           <a:lstStyle/>
           <a:p>
-            <a:pPr algn="l"/>
-            <a:r>
-              <a:rPr sz="2400" b="1">
-                <a:solidFill>
-                  <a:srgbClr val="6B9080"/>
+            <a:pPr algn="ctr">
+              <a:spcAft>
+                <a:spcPts val="300"/>
+              </a:spcAft>
+            </a:pPr>
+            <a:r>
+              <a:rPr sz="900" b="0">
+                <a:solidFill>
+                  <a:srgbClr val="5A6A62"/>
                 </a:solidFill>
                 <a:latin typeface="Microsoft YaHei"/>
               </a:rPr>
-              <a:t>神话 = 现实困惑 + 现实对应物 + 浪漫推演</a:t>
-            </a:r>
-          </a:p>
-        </p:txBody>
-      </p:sp>
-      <p:sp>
-        <p:nvSpPr>
-          <p:cNvPr id="8" name="TextBox 7"/>
+              <a:t>～ ～ ～ ～ ～ ～ ～ ～ ～ ～ ～ ～</a:t>
+            </a:r>
+          </a:p>
+        </p:txBody>
+      </p:sp>
+      <p:sp>
+        <p:nvSpPr>
+          <p:cNvPr id="9" name="Rectangle 8"/>
+          <p:cNvSpPr/>
+          <p:nvPr/>
+        </p:nvSpPr>
+        <p:spPr>
+          <a:xfrm>
+            <a:off x="548640" y="777240"/>
+            <a:ext cx="5455767" cy="5029200"/>
+          </a:xfrm>
+          <a:prstGeom prst="rect">
+            <a:avLst/>
+          </a:prstGeom>
+          <a:solidFill>
+            <a:srgbClr val="E4EDE8"/>
+          </a:solidFill>
+          <a:ln>
+            <a:noFill/>
+          </a:ln>
+        </p:spPr>
+        <p:style>
+          <a:lnRef idx="1">
+            <a:schemeClr val="accent1"/>
+          </a:lnRef>
+          <a:fillRef idx="3">
+            <a:schemeClr val="accent1"/>
+          </a:fillRef>
+          <a:effectRef idx="2">
+            <a:schemeClr val="accent1"/>
+          </a:effectRef>
+          <a:fontRef idx="minor">
+            <a:schemeClr val="lt1"/>
+          </a:fontRef>
+        </p:style>
+        <p:txBody>
+          <a:bodyPr rtlCol="0" anchor="ctr"/>
+          <a:lstStyle/>
+          <a:p>
+            <a:pPr algn="ctr"/>
+          </a:p>
+        </p:txBody>
+      </p:sp>
+      <p:sp>
+        <p:nvSpPr>
+          <p:cNvPr id="10" name="Rectangle 9"/>
+          <p:cNvSpPr/>
+          <p:nvPr/>
+        </p:nvSpPr>
+        <p:spPr>
+          <a:xfrm>
+            <a:off x="548640" y="777240"/>
+            <a:ext cx="45720" cy="5029200"/>
+          </a:xfrm>
+          <a:prstGeom prst="rect">
+            <a:avLst/>
+          </a:prstGeom>
+          <a:solidFill>
+            <a:srgbClr val="4A7C6F"/>
+          </a:solidFill>
+          <a:ln>
+            <a:noFill/>
+          </a:ln>
+        </p:spPr>
+        <p:style>
+          <a:lnRef idx="1">
+            <a:schemeClr val="accent1"/>
+          </a:lnRef>
+          <a:fillRef idx="3">
+            <a:schemeClr val="accent1"/>
+          </a:fillRef>
+          <a:effectRef idx="2">
+            <a:schemeClr val="accent1"/>
+          </a:effectRef>
+          <a:fontRef idx="minor">
+            <a:schemeClr val="lt1"/>
+          </a:fontRef>
+        </p:style>
+        <p:txBody>
+          <a:bodyPr rtlCol="0" anchor="ctr"/>
+          <a:lstStyle/>
+          <a:p>
+            <a:pPr algn="ctr"/>
+          </a:p>
+        </p:txBody>
+      </p:sp>
+      <p:sp>
+        <p:nvSpPr>
+          <p:cNvPr id="11" name="TextBox 10"/>
           <p:cNvSpPr txBox="1"/>
           <p:nvPr/>
         </p:nvSpPr>
         <p:spPr>
           <a:xfrm>
-            <a:off x="1303020" y="2667000"/>
-            <a:ext cx="9585655" cy="2286000"/>
+            <a:off x="694944" y="886968"/>
+            <a:ext cx="5254599" cy="4864608"/>
           </a:xfrm>
           <a:prstGeom prst="rect">
             <a:avLst/>
@@ -6027,19 +7939,311 @@
           <a:noFill/>
         </p:spPr>
         <p:txBody>
-          <a:bodyPr wrap="square">
+          <a:bodyPr wrap="square" anchor="t">
             <a:spAutoFit/>
           </a:bodyPr>
           <a:lstStyle/>
           <a:p>
-            <a:r>
-              <a:rPr sz="1800" b="0">
-                <a:solidFill>
-                  <a:srgbClr val="2B2D42"/>
+            <a:pPr algn="l">
+              <a:spcAft>
+                <a:spcPts val="300"/>
+              </a:spcAft>
+            </a:pPr>
+            <a:r>
+              <a:rPr sz="1800" b="1">
+                <a:solidFill>
+                  <a:srgbClr val="4A7C6F"/>
+                </a:solidFill>
+                <a:latin typeface="KaiTi"/>
+              </a:rPr>
+              <a:t>核心一 · 神话想象</a:t>
+            </a:r>
+          </a:p>
+          <a:p>
+            <a:pPr algn="l">
+              <a:spcAft>
+                <a:spcPts val="300"/>
+              </a:spcAft>
+            </a:pPr>
+            <a:r>
+              <a:rPr sz="800" b="0">
+                <a:solidFill>
+                  <a:srgbClr val="1E1E1E"/>
                 </a:solidFill>
                 <a:latin typeface="Microsoft YaHei"/>
               </a:rPr>
-              <a:t>神话绝非胡言乱语，而是远古先民在科技极度不发达的时代，基于对自然与社会的客观观察，运用强大想象力对世界做出的浪漫解释。</a:t>
+              <a:t/>
+            </a:r>
+          </a:p>
+          <a:p>
+            <a:pPr algn="l">
+              <a:spcAft>
+                <a:spcPts val="300"/>
+              </a:spcAft>
+            </a:pPr>
+            <a:r>
+              <a:rPr sz="2000" b="1">
+                <a:solidFill>
+                  <a:srgbClr val="1E1E1E"/>
+                </a:solidFill>
+                <a:latin typeface="Microsoft YaHei"/>
+              </a:rPr>
+              <a:t>基于古籍</a:t>
+            </a:r>
+          </a:p>
+          <a:p>
+            <a:pPr algn="l">
+              <a:spcAft>
+                <a:spcPts val="300"/>
+              </a:spcAft>
+            </a:pPr>
+            <a:r>
+              <a:rPr sz="2000" b="1">
+                <a:solidFill>
+                  <a:srgbClr val="1E1E1E"/>
+                </a:solidFill>
+                <a:latin typeface="Microsoft YaHei"/>
+              </a:rPr>
+              <a:t>超越古籍</a:t>
+            </a:r>
+          </a:p>
+          <a:p>
+            <a:pPr algn="l">
+              <a:spcAft>
+                <a:spcPts val="300"/>
+              </a:spcAft>
+            </a:pPr>
+            <a:r>
+              <a:rPr sz="2000" b="1">
+                <a:solidFill>
+                  <a:srgbClr val="C83C23"/>
+                </a:solidFill>
+                <a:latin typeface="Microsoft YaHei"/>
+              </a:rPr>
+              <a:t>富有温度</a:t>
+            </a:r>
+          </a:p>
+        </p:txBody>
+      </p:sp>
+      <p:sp>
+        <p:nvSpPr>
+          <p:cNvPr id="12" name="Rectangle 11"/>
+          <p:cNvSpPr/>
+          <p:nvPr/>
+        </p:nvSpPr>
+        <p:spPr>
+          <a:xfrm>
+            <a:off x="6187287" y="777240"/>
+            <a:ext cx="5455767" cy="5029200"/>
+          </a:xfrm>
+          <a:prstGeom prst="rect">
+            <a:avLst/>
+          </a:prstGeom>
+          <a:solidFill>
+            <a:srgbClr val="F4F1EA"/>
+          </a:solidFill>
+          <a:ln w="19050">
+            <a:solidFill>
+              <a:srgbClr val="4A7C6F"/>
+            </a:solidFill>
+          </a:ln>
+        </p:spPr>
+        <p:style>
+          <a:lnRef idx="1">
+            <a:schemeClr val="accent1"/>
+          </a:lnRef>
+          <a:fillRef idx="3">
+            <a:schemeClr val="accent1"/>
+          </a:fillRef>
+          <a:effectRef idx="2">
+            <a:schemeClr val="accent1"/>
+          </a:effectRef>
+          <a:fontRef idx="minor">
+            <a:schemeClr val="lt1"/>
+          </a:fontRef>
+        </p:style>
+        <p:txBody>
+          <a:bodyPr rtlCol="0" anchor="ctr"/>
+          <a:lstStyle/>
+          <a:p>
+            <a:pPr algn="ctr"/>
+          </a:p>
+        </p:txBody>
+      </p:sp>
+      <p:sp>
+        <p:nvSpPr>
+          <p:cNvPr id="13" name="Rectangle 12"/>
+          <p:cNvSpPr/>
+          <p:nvPr/>
+        </p:nvSpPr>
+        <p:spPr>
+          <a:xfrm>
+            <a:off x="6187287" y="777240"/>
+            <a:ext cx="45720" cy="5029200"/>
+          </a:xfrm>
+          <a:prstGeom prst="rect">
+            <a:avLst/>
+          </a:prstGeom>
+          <a:solidFill>
+            <a:srgbClr val="4A7C6F"/>
+          </a:solidFill>
+          <a:ln>
+            <a:noFill/>
+          </a:ln>
+        </p:spPr>
+        <p:style>
+          <a:lnRef idx="1">
+            <a:schemeClr val="accent1"/>
+          </a:lnRef>
+          <a:fillRef idx="3">
+            <a:schemeClr val="accent1"/>
+          </a:fillRef>
+          <a:effectRef idx="2">
+            <a:schemeClr val="accent1"/>
+          </a:effectRef>
+          <a:fontRef idx="minor">
+            <a:schemeClr val="lt1"/>
+          </a:fontRef>
+        </p:style>
+        <p:txBody>
+          <a:bodyPr rtlCol="0" anchor="ctr"/>
+          <a:lstStyle/>
+          <a:p>
+            <a:pPr algn="ctr"/>
+          </a:p>
+        </p:txBody>
+      </p:sp>
+      <p:sp>
+        <p:nvSpPr>
+          <p:cNvPr id="14" name="TextBox 13"/>
+          <p:cNvSpPr txBox="1"/>
+          <p:nvPr/>
+        </p:nvSpPr>
+        <p:spPr>
+          <a:xfrm>
+            <a:off x="6333591" y="886968"/>
+            <a:ext cx="5254599" cy="4864608"/>
+          </a:xfrm>
+          <a:prstGeom prst="rect">
+            <a:avLst/>
+          </a:prstGeom>
+          <a:noFill/>
+        </p:spPr>
+        <p:txBody>
+          <a:bodyPr wrap="square" anchor="t">
+            <a:spAutoFit/>
+          </a:bodyPr>
+          <a:lstStyle/>
+          <a:p>
+            <a:pPr algn="l">
+              <a:spcAft>
+                <a:spcPts val="300"/>
+              </a:spcAft>
+            </a:pPr>
+            <a:r>
+              <a:rPr sz="1800" b="1">
+                <a:solidFill>
+                  <a:srgbClr val="4A7C6F"/>
+                </a:solidFill>
+                <a:latin typeface="KaiTi"/>
+              </a:rPr>
+              <a:t>核心二 · 女娲形象</a:t>
+            </a:r>
+          </a:p>
+          <a:p>
+            <a:pPr algn="l">
+              <a:spcAft>
+                <a:spcPts val="300"/>
+              </a:spcAft>
+            </a:pPr>
+            <a:r>
+              <a:rPr sz="800" b="0">
+                <a:solidFill>
+                  <a:srgbClr val="1E1E1E"/>
+                </a:solidFill>
+                <a:latin typeface="Microsoft YaHei"/>
+              </a:rPr>
+              <a:t/>
+            </a:r>
+          </a:p>
+          <a:p>
+            <a:pPr algn="l">
+              <a:spcAft>
+                <a:spcPts val="300"/>
+              </a:spcAft>
+            </a:pPr>
+            <a:r>
+              <a:rPr sz="1600" b="1">
+                <a:solidFill>
+                  <a:srgbClr val="1E1E1E"/>
+                </a:solidFill>
+                <a:latin typeface="Microsoft YaHei"/>
+              </a:rPr>
+              <a:t>神性与人性并存</a:t>
+            </a:r>
+          </a:p>
+          <a:p>
+            <a:pPr algn="l">
+              <a:spcAft>
+                <a:spcPts val="300"/>
+              </a:spcAft>
+            </a:pPr>
+            <a:r>
+              <a:rPr sz="600" b="0">
+                <a:solidFill>
+                  <a:srgbClr val="1E1E1E"/>
+                </a:solidFill>
+                <a:latin typeface="Microsoft YaHei"/>
+              </a:rPr>
+              <a:t/>
+            </a:r>
+          </a:p>
+          <a:p>
+            <a:pPr algn="l">
+              <a:spcAft>
+                <a:spcPts val="300"/>
+              </a:spcAft>
+            </a:pPr>
+            <a:r>
+              <a:rPr sz="2200" b="1">
+                <a:solidFill>
+                  <a:srgbClr val="C83C23"/>
+                </a:solidFill>
+                <a:latin typeface="Microsoft YaHei"/>
+              </a:rPr>
+              <a:t>孤独 · 疲倦 · 喜悦</a:t>
+            </a:r>
+          </a:p>
+          <a:p>
+            <a:pPr algn="l">
+              <a:spcAft>
+                <a:spcPts val="300"/>
+              </a:spcAft>
+            </a:pPr>
+            <a:r>
+              <a:rPr sz="600" b="0">
+                <a:solidFill>
+                  <a:srgbClr val="1E1E1E"/>
+                </a:solidFill>
+                <a:latin typeface="Microsoft YaHei"/>
+              </a:rPr>
+              <a:t/>
+            </a:r>
+          </a:p>
+          <a:p>
+            <a:pPr algn="l">
+              <a:spcAft>
+                <a:spcPts val="300"/>
+              </a:spcAft>
+            </a:pPr>
+            <a:r>
+              <a:rPr sz="1400" b="0">
+                <a:solidFill>
+                  <a:srgbClr val="5A6A62"/>
+                </a:solidFill>
+                <a:latin typeface="Microsoft YaHei"/>
+              </a:rPr>
+              <a:t>涵盖情感变化的完整母亲形象</a:t>
             </a:r>
           </a:p>
         </p:txBody>
@@ -6107,57 +8311,23 @@
       </p:sp>
       <p:sp>
         <p:nvSpPr>
-          <p:cNvPr id="3" name="TextBox 2"/>
-          <p:cNvSpPr txBox="1"/>
-          <p:nvPr/>
-        </p:nvSpPr>
-        <p:spPr>
-          <a:xfrm>
-            <a:off x="571500" y="381000"/>
-            <a:ext cx="8286521" cy="411480"/>
+          <p:cNvPr id="3" name="Rectangle 2"/>
+          <p:cNvSpPr/>
+          <p:nvPr/>
+        </p:nvSpPr>
+        <p:spPr>
+          <a:xfrm>
+            <a:off x="548640" y="347472"/>
+            <a:ext cx="365760" cy="365760"/>
           </a:xfrm>
           <a:prstGeom prst="rect">
             <a:avLst/>
           </a:prstGeom>
           <a:noFill/>
-        </p:spPr>
-        <p:txBody>
-          <a:bodyPr wrap="none">
-            <a:spAutoFit/>
-          </a:bodyPr>
-          <a:lstStyle/>
-          <a:p>
-            <a:r>
-              <a:rPr sz="2800" b="1">
-                <a:solidFill>
-                  <a:srgbClr val="6B9080"/>
-                </a:solidFill>
-                <a:latin typeface="Microsoft YaHei"/>
-              </a:rPr>
-              <a:t>“好想象”的评分三要素</a:t>
-            </a:r>
-          </a:p>
-        </p:txBody>
-      </p:sp>
-      <p:sp>
-        <p:nvSpPr>
-          <p:cNvPr id="4" name="Rectangle 3"/>
-          <p:cNvSpPr/>
-          <p:nvPr/>
-        </p:nvSpPr>
-        <p:spPr>
-          <a:xfrm>
-            <a:off x="571500" y="838200"/>
-            <a:ext cx="11048695" cy="25400"/>
-          </a:xfrm>
-          <a:prstGeom prst="rect">
-            <a:avLst/>
-          </a:prstGeom>
-          <a:solidFill>
-            <a:srgbClr val="E2E2D9"/>
-          </a:solidFill>
-          <a:ln>
-            <a:noFill/>
+          <a:ln w="25400">
+            <a:solidFill>
+              <a:srgbClr val="C83C23"/>
+            </a:solidFill>
           </a:ln>
         </p:spPr>
         <p:style>
@@ -6184,14 +8354,53 @@
       </p:sp>
       <p:sp>
         <p:nvSpPr>
+          <p:cNvPr id="4" name="TextBox 3"/>
+          <p:cNvSpPr txBox="1"/>
+          <p:nvPr/>
+        </p:nvSpPr>
+        <p:spPr>
+          <a:xfrm>
+            <a:off x="548640" y="347472"/>
+            <a:ext cx="365760" cy="365760"/>
+          </a:xfrm>
+          <a:prstGeom prst="rect">
+            <a:avLst/>
+          </a:prstGeom>
+          <a:noFill/>
+        </p:spPr>
+        <p:txBody>
+          <a:bodyPr wrap="square" anchor="ctr">
+            <a:spAutoFit/>
+          </a:bodyPr>
+          <a:lstStyle/>
+          <a:p>
+            <a:pPr algn="ctr">
+              <a:spcAft>
+                <a:spcPts val="300"/>
+              </a:spcAft>
+            </a:pPr>
+            <a:r>
+              <a:rPr sz="1000" b="1">
+                <a:solidFill>
+                  <a:srgbClr val="C83C23"/>
+                </a:solidFill>
+                <a:latin typeface="KaiTi"/>
+              </a:rPr>
+              <a:t>07</a:t>
+            </a:r>
+          </a:p>
+        </p:txBody>
+      </p:sp>
+      <p:sp>
+        <p:nvSpPr>
           <p:cNvPr id="5" name="TextBox 4"/>
           <p:cNvSpPr txBox="1"/>
           <p:nvPr/>
         </p:nvSpPr>
         <p:spPr>
           <a:xfrm>
-            <a:off x="9631429" y="426720"/>
-            <a:ext cx="1097280" cy="365760"/>
+            <a:off x="1024128" y="347472"/>
+            <a:ext cx="7766090" cy="365760"/>
           </a:xfrm>
           <a:prstGeom prst="rect">
             <a:avLst/>
@@ -6199,44 +8408,86 @@
           <a:noFill/>
         </p:spPr>
         <p:txBody>
-          <a:bodyPr wrap="none">
+          <a:bodyPr wrap="square" anchor="t">
             <a:spAutoFit/>
           </a:bodyPr>
           <a:lstStyle/>
           <a:p>
-            <a:r>
-              <a:rPr sz="1600" b="1">
-                <a:solidFill>
-                  <a:srgbClr val="6C757D"/>
+            <a:pPr algn="l">
+              <a:spcAft>
+                <a:spcPts val="300"/>
+              </a:spcAft>
+            </a:pPr>
+            <a:r>
+              <a:rPr sz="2000" b="1">
+                <a:solidFill>
+                  <a:srgbClr val="1E1E1E"/>
+                </a:solidFill>
+                <a:latin typeface="KaiTi"/>
+              </a:rPr>
+              <a:t>课后延伸</a:t>
+            </a:r>
+          </a:p>
+        </p:txBody>
+      </p:sp>
+      <p:sp>
+        <p:nvSpPr>
+          <p:cNvPr id="6" name="TextBox 5"/>
+          <p:cNvSpPr txBox="1"/>
+          <p:nvPr/>
+        </p:nvSpPr>
+        <p:spPr>
+          <a:xfrm>
+            <a:off x="8869451" y="347472"/>
+            <a:ext cx="2773603" cy="320040"/>
+          </a:xfrm>
+          <a:prstGeom prst="rect">
+            <a:avLst/>
+          </a:prstGeom>
+          <a:noFill/>
+        </p:spPr>
+        <p:txBody>
+          <a:bodyPr wrap="square" anchor="t">
+            <a:spAutoFit/>
+          </a:bodyPr>
+          <a:lstStyle/>
+          <a:p>
+            <a:pPr algn="r">
+              <a:spcAft>
+                <a:spcPts val="300"/>
+              </a:spcAft>
+            </a:pPr>
+            <a:r>
+              <a:rPr sz="1100" b="0">
+                <a:solidFill>
+                  <a:srgbClr val="5A6A62"/>
                 </a:solidFill>
                 <a:latin typeface="Microsoft YaHei"/>
               </a:rPr>
-              <a:t>07 / 08</a:t>
-            </a:r>
-          </a:p>
-        </p:txBody>
-      </p:sp>
-      <p:sp>
-        <p:nvSpPr>
-          <p:cNvPr id="6" name="Rounded Rectangle 5"/>
+              <a:t>卷 7/7</a:t>
+            </a:r>
+          </a:p>
+        </p:txBody>
+      </p:sp>
+      <p:sp>
+        <p:nvSpPr>
+          <p:cNvPr id="7" name="Rectangle 6"/>
           <p:cNvSpPr/>
           <p:nvPr/>
         </p:nvSpPr>
         <p:spPr>
           <a:xfrm>
-            <a:off x="571500" y="1112520"/>
-            <a:ext cx="3591458" cy="4389120"/>
-          </a:xfrm>
-          <a:prstGeom prst="roundRect">
+            <a:off x="548640" y="768096"/>
+            <a:ext cx="11094415" cy="9144"/>
+          </a:xfrm>
+          <a:prstGeom prst="rect">
             <a:avLst/>
           </a:prstGeom>
           <a:solidFill>
-            <a:srgbClr val="FFFFFF"/>
+            <a:srgbClr val="5A6A62"/>
           </a:solidFill>
-          <a:ln w="12700">
-            <a:solidFill>
-              <a:srgbClr val="E2E2D9"/>
-            </a:solidFill>
+          <a:ln>
+            <a:noFill/>
           </a:ln>
         </p:spPr>
         <p:style>
@@ -6263,23 +8514,64 @@
       </p:sp>
       <p:sp>
         <p:nvSpPr>
-          <p:cNvPr id="7" name="Rectangle 6"/>
+          <p:cNvPr id="8" name="TextBox 7"/>
+          <p:cNvSpPr txBox="1"/>
+          <p:nvPr/>
+        </p:nvSpPr>
+        <p:spPr>
+          <a:xfrm>
+            <a:off x="548640" y="704088"/>
+            <a:ext cx="11094415" cy="201168"/>
+          </a:xfrm>
+          <a:prstGeom prst="rect">
+            <a:avLst/>
+          </a:prstGeom>
+          <a:noFill/>
+        </p:spPr>
+        <p:txBody>
+          <a:bodyPr wrap="square" anchor="t">
+            <a:spAutoFit/>
+          </a:bodyPr>
+          <a:lstStyle/>
+          <a:p>
+            <a:pPr algn="ctr">
+              <a:spcAft>
+                <a:spcPts val="300"/>
+              </a:spcAft>
+            </a:pPr>
+            <a:r>
+              <a:rPr sz="900" b="0">
+                <a:solidFill>
+                  <a:srgbClr val="5A6A62"/>
+                </a:solidFill>
+                <a:latin typeface="Microsoft YaHei"/>
+              </a:rPr>
+              <a:t>～ ～ ～ ～ ～ ～ ～ ～ ～ ～ ～ ～</a:t>
+            </a:r>
+          </a:p>
+        </p:txBody>
+      </p:sp>
+      <p:sp>
+        <p:nvSpPr>
+          <p:cNvPr id="9" name="Rectangle 8"/>
           <p:cNvSpPr/>
           <p:nvPr/>
         </p:nvSpPr>
         <p:spPr>
           <a:xfrm>
-            <a:off x="708660" y="1368552"/>
-            <a:ext cx="50800" cy="320040"/>
+            <a:off x="548640" y="777240"/>
+            <a:ext cx="11094415" cy="2240280"/>
           </a:xfrm>
           <a:prstGeom prst="rect">
             <a:avLst/>
           </a:prstGeom>
           <a:solidFill>
-            <a:srgbClr val="E09F68"/>
+            <a:srgbClr val="E4EDE8"/>
           </a:solidFill>
-          <a:ln>
-            <a:noFill/>
+          <a:ln w="25400">
+            <a:solidFill>
+              <a:srgbClr val="4A7C6F"/>
+            </a:solidFill>
           </a:ln>
         </p:spPr>
         <p:style>
@@ -6306,79 +8598,22 @@
       </p:sp>
       <p:sp>
         <p:nvSpPr>
-          <p:cNvPr id="8" name="TextBox 7"/>
-          <p:cNvSpPr txBox="1"/>
-          <p:nvPr/>
-        </p:nvSpPr>
-        <p:spPr>
-          <a:xfrm>
-            <a:off x="827532" y="1277112"/>
-            <a:ext cx="3225698" cy="4114800"/>
+          <p:cNvPr id="10" name="Rectangle 9"/>
+          <p:cNvSpPr/>
+          <p:nvPr/>
+        </p:nvSpPr>
+        <p:spPr>
+          <a:xfrm>
+            <a:off x="685800" y="960120"/>
+            <a:ext cx="438912" cy="438912"/>
           </a:xfrm>
           <a:prstGeom prst="rect">
             <a:avLst/>
           </a:prstGeom>
           <a:noFill/>
-        </p:spPr>
-        <p:txBody>
-          <a:bodyPr wrap="square">
-            <a:spAutoFit/>
-          </a:bodyPr>
-          <a:lstStyle/>
-          <a:p>
-            <a:pPr>
-              <a:spcAft>
-                <a:spcPts val="1000"/>
-              </a:spcAft>
-            </a:pPr>
-            <a:r>
-              <a:rPr sz="2000" b="1">
-                <a:solidFill>
-                  <a:srgbClr val="6B9080"/>
-                </a:solidFill>
-                <a:latin typeface="Microsoft YaHei"/>
-              </a:rPr>
-              <a:t>1. 有依托（40%）</a:t>
-            </a:r>
-          </a:p>
-          <a:p>
-            <a:pPr>
-              <a:spcAft>
-                <a:spcPts val="600"/>
-              </a:spcAft>
-            </a:pPr>
-            <a:r>
-              <a:rPr sz="1600" b="0">
-                <a:solidFill>
-                  <a:srgbClr val="2B2D42"/>
-                </a:solidFill>
-                <a:latin typeface="Microsoft YaHei"/>
-              </a:rPr>
-              <a:t>必须能在生活中找到影子，不能凭空捏造。例如：泥土的可塑性。</a:t>
-            </a:r>
-          </a:p>
-        </p:txBody>
-      </p:sp>
-      <p:sp>
-        <p:nvSpPr>
-          <p:cNvPr id="9" name="Rounded Rectangle 8"/>
-          <p:cNvSpPr/>
-          <p:nvPr/>
-        </p:nvSpPr>
-        <p:spPr>
-          <a:xfrm>
-            <a:off x="4300118" y="1112520"/>
-            <a:ext cx="3591458" cy="4389120"/>
-          </a:xfrm>
-          <a:prstGeom prst="roundRect">
-            <a:avLst/>
-          </a:prstGeom>
-          <a:solidFill>
-            <a:srgbClr val="FFFFFF"/>
-          </a:solidFill>
-          <a:ln w="12700">
+          <a:ln w="25400">
             <a:solidFill>
-              <a:srgbClr val="E2E2D9"/>
+              <a:srgbClr val="C83C23"/>
             </a:solidFill>
           </a:ln>
         </p:spPr>
@@ -6406,23 +8641,135 @@
       </p:sp>
       <p:sp>
         <p:nvSpPr>
-          <p:cNvPr id="10" name="Rectangle 9"/>
+          <p:cNvPr id="11" name="TextBox 10"/>
+          <p:cNvSpPr txBox="1"/>
+          <p:nvPr/>
+        </p:nvSpPr>
+        <p:spPr>
+          <a:xfrm>
+            <a:off x="685800" y="960120"/>
+            <a:ext cx="438912" cy="438912"/>
+          </a:xfrm>
+          <a:prstGeom prst="rect">
+            <a:avLst/>
+          </a:prstGeom>
+          <a:noFill/>
+        </p:spPr>
+        <p:txBody>
+          <a:bodyPr wrap="square" anchor="ctr">
+            <a:spAutoFit/>
+          </a:bodyPr>
+          <a:lstStyle/>
+          <a:p>
+            <a:pPr algn="ctr">
+              <a:spcAft>
+                <a:spcPts val="300"/>
+              </a:spcAft>
+            </a:pPr>
+            <a:r>
+              <a:rPr sz="1300" b="1">
+                <a:solidFill>
+                  <a:srgbClr val="C83C23"/>
+                </a:solidFill>
+                <a:latin typeface="KaiTi"/>
+              </a:rPr>
+              <a:t>必</a:t>
+            </a:r>
+          </a:p>
+        </p:txBody>
+      </p:sp>
+      <p:sp>
+        <p:nvSpPr>
+          <p:cNvPr id="12" name="TextBox 11"/>
+          <p:cNvSpPr txBox="1"/>
+          <p:nvPr/>
+        </p:nvSpPr>
+        <p:spPr>
+          <a:xfrm>
+            <a:off x="1234440" y="914400"/>
+            <a:ext cx="10271455" cy="1920240"/>
+          </a:xfrm>
+          <a:prstGeom prst="rect">
+            <a:avLst/>
+          </a:prstGeom>
+          <a:noFill/>
+        </p:spPr>
+        <p:txBody>
+          <a:bodyPr wrap="square" anchor="t">
+            <a:spAutoFit/>
+          </a:bodyPr>
+          <a:lstStyle/>
+          <a:p>
+            <a:pPr algn="l">
+              <a:spcAft>
+                <a:spcPts val="300"/>
+              </a:spcAft>
+            </a:pPr>
+            <a:r>
+              <a:rPr sz="1600" b="1">
+                <a:solidFill>
+                  <a:srgbClr val="4A7C6F"/>
+                </a:solidFill>
+                <a:latin typeface="KaiTi"/>
+              </a:rPr>
+              <a:t>任务一 · 必做</a:t>
+            </a:r>
+          </a:p>
+          <a:p>
+            <a:pPr algn="l">
+              <a:spcAft>
+                <a:spcPts val="300"/>
+              </a:spcAft>
+            </a:pPr>
+            <a:r>
+              <a:rPr sz="1600" b="0">
+                <a:solidFill>
+                  <a:srgbClr val="1E1E1E"/>
+                </a:solidFill>
+                <a:latin typeface="Microsoft YaHei"/>
+              </a:rPr>
+              <a:t>以「我看见女娲……」为题，描写100字画面。</a:t>
+            </a:r>
+          </a:p>
+          <a:p>
+            <a:pPr algn="l">
+              <a:spcAft>
+                <a:spcPts val="300"/>
+              </a:spcAft>
+            </a:pPr>
+            <a:r>
+              <a:rPr sz="1300" b="0">
+                <a:solidFill>
+                  <a:srgbClr val="5A6A62"/>
+                </a:solidFill>
+                <a:latin typeface="Microsoft YaHei"/>
+              </a:rPr>
+              <a:t>要求：有具体动作或细节，体现造人的神奇与温情。</a:t>
+            </a:r>
+          </a:p>
+        </p:txBody>
+      </p:sp>
+      <p:sp>
+        <p:nvSpPr>
+          <p:cNvPr id="13" name="Rectangle 12"/>
           <p:cNvSpPr/>
           <p:nvPr/>
         </p:nvSpPr>
         <p:spPr>
           <a:xfrm>
-            <a:off x="4437278" y="1368552"/>
-            <a:ext cx="50800" cy="320040"/>
+            <a:off x="548640" y="3246120"/>
+            <a:ext cx="11094415" cy="2240280"/>
           </a:xfrm>
           <a:prstGeom prst="rect">
             <a:avLst/>
           </a:prstGeom>
           <a:solidFill>
-            <a:srgbClr val="E09F68"/>
+            <a:srgbClr val="F4F1EA"/>
           </a:solidFill>
-          <a:ln>
-            <a:noFill/>
+          <a:ln w="25400">
+            <a:solidFill>
+              <a:srgbClr val="C83C23"/>
+            </a:solidFill>
           </a:ln>
         </p:spPr>
         <p:style>
@@ -6449,79 +8796,22 @@
       </p:sp>
       <p:sp>
         <p:nvSpPr>
-          <p:cNvPr id="11" name="TextBox 10"/>
-          <p:cNvSpPr txBox="1"/>
-          <p:nvPr/>
-        </p:nvSpPr>
-        <p:spPr>
-          <a:xfrm>
-            <a:off x="4556150" y="1277112"/>
-            <a:ext cx="3225698" cy="4114800"/>
+          <p:cNvPr id="14" name="Rectangle 13"/>
+          <p:cNvSpPr/>
+          <p:nvPr/>
+        </p:nvSpPr>
+        <p:spPr>
+          <a:xfrm>
+            <a:off x="685800" y="3429000"/>
+            <a:ext cx="438912" cy="438912"/>
           </a:xfrm>
           <a:prstGeom prst="rect">
             <a:avLst/>
           </a:prstGeom>
           <a:noFill/>
-        </p:spPr>
-        <p:txBody>
-          <a:bodyPr wrap="square">
-            <a:spAutoFit/>
-          </a:bodyPr>
-          <a:lstStyle/>
-          <a:p>
-            <a:pPr>
-              <a:spcAft>
-                <a:spcPts val="1000"/>
-              </a:spcAft>
-            </a:pPr>
-            <a:r>
-              <a:rPr sz="2000" b="1">
-                <a:solidFill>
-                  <a:srgbClr val="6B9080"/>
-                </a:solidFill>
-                <a:latin typeface="Microsoft YaHei"/>
-              </a:rPr>
-              <a:t>2. 有逻辑（30%）</a:t>
-            </a:r>
-          </a:p>
-          <a:p>
-            <a:pPr>
-              <a:spcAft>
-                <a:spcPts val="600"/>
-              </a:spcAft>
-            </a:pPr>
-            <a:r>
-              <a:rPr sz="1600" b="0">
-                <a:solidFill>
-                  <a:srgbClr val="2B2D42"/>
-                </a:solidFill>
-                <a:latin typeface="Microsoft YaHei"/>
-              </a:rPr>
-              <a:t>因果链条严密。例如：因为孤独所以造人，因为太累所以改用藤条。</a:t>
-            </a:r>
-          </a:p>
-        </p:txBody>
-      </p:sp>
-      <p:sp>
-        <p:nvSpPr>
-          <p:cNvPr id="12" name="Rounded Rectangle 11"/>
-          <p:cNvSpPr/>
-          <p:nvPr/>
-        </p:nvSpPr>
-        <p:spPr>
-          <a:xfrm>
-            <a:off x="8028736" y="1112520"/>
-            <a:ext cx="3591458" cy="4389120"/>
-          </a:xfrm>
-          <a:prstGeom prst="roundRect">
-            <a:avLst/>
-          </a:prstGeom>
-          <a:solidFill>
-            <a:srgbClr val="FFFFFF"/>
-          </a:solidFill>
-          <a:ln w="12700">
+          <a:ln w="25400">
             <a:solidFill>
-              <a:srgbClr val="E2E2D9"/>
+              <a:srgbClr val="C83C23"/>
             </a:solidFill>
           </a:ln>
         </p:spPr>
@@ -6549,20 +8839,130 @@
       </p:sp>
       <p:sp>
         <p:nvSpPr>
-          <p:cNvPr id="13" name="Rectangle 12"/>
+          <p:cNvPr id="15" name="TextBox 14"/>
+          <p:cNvSpPr txBox="1"/>
+          <p:nvPr/>
+        </p:nvSpPr>
+        <p:spPr>
+          <a:xfrm>
+            <a:off x="685800" y="3429000"/>
+            <a:ext cx="438912" cy="438912"/>
+          </a:xfrm>
+          <a:prstGeom prst="rect">
+            <a:avLst/>
+          </a:prstGeom>
+          <a:noFill/>
+        </p:spPr>
+        <p:txBody>
+          <a:bodyPr wrap="square" anchor="ctr">
+            <a:spAutoFit/>
+          </a:bodyPr>
+          <a:lstStyle/>
+          <a:p>
+            <a:pPr algn="ctr">
+              <a:spcAft>
+                <a:spcPts val="300"/>
+              </a:spcAft>
+            </a:pPr>
+            <a:r>
+              <a:rPr sz="1300" b="1">
+                <a:solidFill>
+                  <a:srgbClr val="C83C23"/>
+                </a:solidFill>
+                <a:latin typeface="KaiTi"/>
+              </a:rPr>
+              <a:t>选</a:t>
+            </a:r>
+          </a:p>
+        </p:txBody>
+      </p:sp>
+      <p:sp>
+        <p:nvSpPr>
+          <p:cNvPr id="16" name="TextBox 15"/>
+          <p:cNvSpPr txBox="1"/>
+          <p:nvPr/>
+        </p:nvSpPr>
+        <p:spPr>
+          <a:xfrm>
+            <a:off x="1234440" y="3383280"/>
+            <a:ext cx="10271455" cy="1920240"/>
+          </a:xfrm>
+          <a:prstGeom prst="rect">
+            <a:avLst/>
+          </a:prstGeom>
+          <a:noFill/>
+        </p:spPr>
+        <p:txBody>
+          <a:bodyPr wrap="square" anchor="t">
+            <a:spAutoFit/>
+          </a:bodyPr>
+          <a:lstStyle/>
+          <a:p>
+            <a:pPr algn="l">
+              <a:spcAft>
+                <a:spcPts val="300"/>
+              </a:spcAft>
+            </a:pPr>
+            <a:r>
+              <a:rPr sz="1600" b="1">
+                <a:solidFill>
+                  <a:srgbClr val="C83C23"/>
+                </a:solidFill>
+                <a:latin typeface="KaiTi"/>
+              </a:rPr>
+              <a:t>任务二 · 选做</a:t>
+            </a:r>
+          </a:p>
+          <a:p>
+            <a:pPr algn="l">
+              <a:spcAft>
+                <a:spcPts val="300"/>
+              </a:spcAft>
+            </a:pPr>
+            <a:r>
+              <a:rPr sz="1600" b="0">
+                <a:solidFill>
+                  <a:srgbClr val="1E1E1E"/>
+                </a:solidFill>
+                <a:latin typeface="Microsoft YaHei"/>
+              </a:rPr>
+              <a:t>查找一个中国创世神话，与本文进行比较阅读。</a:t>
+            </a:r>
+          </a:p>
+          <a:p>
+            <a:pPr algn="l">
+              <a:spcAft>
+                <a:spcPts val="300"/>
+              </a:spcAft>
+            </a:pPr>
+            <a:r>
+              <a:rPr sz="1300" b="0">
+                <a:solidFill>
+                  <a:srgbClr val="5A6A62"/>
+                </a:solidFill>
+                <a:latin typeface="Microsoft YaHei"/>
+              </a:rPr>
+              <a:t>思考：想象依据、表现方式、现实意味有何异同。</a:t>
+            </a:r>
+          </a:p>
+        </p:txBody>
+      </p:sp>
+      <p:sp>
+        <p:nvSpPr>
+          <p:cNvPr id="17" name="Rectangle 16"/>
           <p:cNvSpPr/>
           <p:nvPr/>
         </p:nvSpPr>
         <p:spPr>
           <a:xfrm>
-            <a:off x="8165896" y="1368552"/>
-            <a:ext cx="50800" cy="320040"/>
+            <a:off x="548640" y="5806440"/>
+            <a:ext cx="11094415" cy="9144"/>
           </a:xfrm>
           <a:prstGeom prst="rect">
             <a:avLst/>
           </a:prstGeom>
           <a:solidFill>
-            <a:srgbClr val="E09F68"/>
+            <a:srgbClr val="5A6A62"/>
           </a:solidFill>
           <a:ln>
             <a:noFill/>
@@ -6592,14 +8992,14 @@
       </p:sp>
       <p:sp>
         <p:nvSpPr>
-          <p:cNvPr id="14" name="TextBox 13"/>
+          <p:cNvPr id="18" name="TextBox 17"/>
           <p:cNvSpPr txBox="1"/>
           <p:nvPr/>
         </p:nvSpPr>
         <p:spPr>
           <a:xfrm>
-            <a:off x="8284768" y="1277112"/>
-            <a:ext cx="3225698" cy="4114800"/>
+            <a:off x="548640" y="5742432"/>
+            <a:ext cx="11094415" cy="201168"/>
           </a:xfrm>
           <a:prstGeom prst="rect">
             <a:avLst/>
@@ -6607,115 +9007,38 @@
           <a:noFill/>
         </p:spPr>
         <p:txBody>
-          <a:bodyPr wrap="square">
+          <a:bodyPr wrap="square" anchor="t">
             <a:spAutoFit/>
           </a:bodyPr>
           <a:lstStyle/>
           <a:p>
-            <a:pPr>
-              <a:spcAft>
-                <a:spcPts val="1000"/>
-              </a:spcAft>
-            </a:pPr>
-            <a:r>
-              <a:rPr sz="2000" b="1">
-                <a:solidFill>
-                  <a:srgbClr val="6B9080"/>
+            <a:pPr algn="ctr">
+              <a:spcAft>
+                <a:spcPts val="300"/>
+              </a:spcAft>
+            </a:pPr>
+            <a:r>
+              <a:rPr sz="900" b="0">
+                <a:solidFill>
+                  <a:srgbClr val="5A6A62"/>
                 </a:solidFill>
                 <a:latin typeface="Microsoft YaHei"/>
               </a:rPr>
-              <a:t>3. 有新奇（30%）</a:t>
-            </a:r>
-          </a:p>
-          <a:p>
-            <a:pPr>
-              <a:spcAft>
-                <a:spcPts val="600"/>
-              </a:spcAft>
-            </a:pPr>
-            <a:r>
-              <a:rPr sz="1600" b="0">
-                <a:solidFill>
-                  <a:srgbClr val="2B2D42"/>
-                </a:solidFill>
-                <a:latin typeface="Microsoft YaHei"/>
-              </a:rPr>
-              <a:t>提供意料之外却情理之中的视角。例如：泥人落地即能喊“妈妈”。</a:t>
-            </a:r>
-          </a:p>
-        </p:txBody>
-      </p:sp>
-    </p:spTree>
-  </p:cSld>
-  <p:clrMapOvr>
-    <a:masterClrMapping/>
-  </p:clrMapOvr>
-</p:sld>
-</file>
-
-<file path=ppt/slides/slide8.xml><?xml version="1.0" encoding="utf-8"?>
-<p:sld xmlns:a="http://schemas.openxmlformats.org/drawingml/2006/main" xmlns:p="http://schemas.openxmlformats.org/presentationml/2006/main" xmlns:r="http://schemas.openxmlformats.org/officeDocument/2006/relationships">
-  <p:cSld>
-    <p:spTree>
-      <p:nvGrpSpPr>
-        <p:cNvPr id="1" name=""/>
-        <p:cNvGrpSpPr/>
-        <p:nvPr/>
-      </p:nvGrpSpPr>
-      <p:grpSpPr/>
-      <p:sp>
-        <p:nvSpPr>
-          <p:cNvPr id="2" name="Rectangle 1"/>
-          <p:cNvSpPr/>
-          <p:nvPr/>
-        </p:nvSpPr>
-        <p:spPr>
-          <a:xfrm>
-            <a:off x="0" y="0"/>
-            <a:ext cx="12191695" cy="6858000"/>
-          </a:xfrm>
-          <a:prstGeom prst="rect">
-            <a:avLst/>
-          </a:prstGeom>
-          <a:solidFill>
-            <a:srgbClr val="F4F1EA"/>
-          </a:solidFill>
-          <a:ln>
-            <a:noFill/>
-          </a:ln>
-        </p:spPr>
-        <p:style>
-          <a:lnRef idx="1">
-            <a:schemeClr val="accent1"/>
-          </a:lnRef>
-          <a:fillRef idx="3">
-            <a:schemeClr val="accent1"/>
-          </a:fillRef>
-          <a:effectRef idx="2">
-            <a:schemeClr val="accent1"/>
-          </a:effectRef>
-          <a:fontRef idx="minor">
-            <a:schemeClr val="lt1"/>
-          </a:fontRef>
-        </p:style>
-        <p:txBody>
-          <a:bodyPr rtlCol="0" anchor="ctr"/>
-          <a:lstStyle/>
-          <a:p>
-            <a:pPr algn="ctr"/>
-          </a:p>
-        </p:txBody>
-      </p:sp>
-      <p:sp>
-        <p:nvSpPr>
-          <p:cNvPr id="3" name="TextBox 2"/>
+              <a:t>～ ～ ～ ～ ～ ～ ～ ～ ～ ～ ～ ～</a:t>
+            </a:r>
+          </a:p>
+        </p:txBody>
+      </p:sp>
+      <p:sp>
+        <p:nvSpPr>
+          <p:cNvPr id="19" name="TextBox 18"/>
           <p:cNvSpPr txBox="1"/>
           <p:nvPr/>
         </p:nvSpPr>
         <p:spPr>
           <a:xfrm>
-            <a:off x="571500" y="381000"/>
-            <a:ext cx="8286521" cy="411480"/>
+            <a:off x="548640" y="5943600"/>
+            <a:ext cx="11094415" cy="365760"/>
           </a:xfrm>
           <a:prstGeom prst="rect">
             <a:avLst/>
@@ -6723,335 +9046,24 @@
           <a:noFill/>
         </p:spPr>
         <p:txBody>
-          <a:bodyPr wrap="none">
+          <a:bodyPr wrap="square" anchor="t">
             <a:spAutoFit/>
           </a:bodyPr>
           <a:lstStyle/>
           <a:p>
-            <a:r>
-              <a:rPr sz="2800" b="1">
-                <a:solidFill>
-                  <a:srgbClr val="6B9080"/>
+            <a:pPr algn="ctr">
+              <a:spcAft>
+                <a:spcPts val="300"/>
+              </a:spcAft>
+            </a:pPr>
+            <a:r>
+              <a:rPr sz="1300" b="0">
+                <a:solidFill>
+                  <a:srgbClr val="4A7C6F"/>
                 </a:solidFill>
                 <a:latin typeface="Microsoft YaHei"/>
               </a:rPr>
-              <a:t>拓展与创意表达</a:t>
-            </a:r>
-          </a:p>
-        </p:txBody>
-      </p:sp>
-      <p:sp>
-        <p:nvSpPr>
-          <p:cNvPr id="4" name="Rectangle 3"/>
-          <p:cNvSpPr/>
-          <p:nvPr/>
-        </p:nvSpPr>
-        <p:spPr>
-          <a:xfrm>
-            <a:off x="571500" y="838200"/>
-            <a:ext cx="11048695" cy="25400"/>
-          </a:xfrm>
-          <a:prstGeom prst="rect">
-            <a:avLst/>
-          </a:prstGeom>
-          <a:solidFill>
-            <a:srgbClr val="E2E2D9"/>
-          </a:solidFill>
-          <a:ln>
-            <a:noFill/>
-          </a:ln>
-        </p:spPr>
-        <p:style>
-          <a:lnRef idx="1">
-            <a:schemeClr val="accent1"/>
-          </a:lnRef>
-          <a:fillRef idx="3">
-            <a:schemeClr val="accent1"/>
-          </a:fillRef>
-          <a:effectRef idx="2">
-            <a:schemeClr val="accent1"/>
-          </a:effectRef>
-          <a:fontRef idx="minor">
-            <a:schemeClr val="lt1"/>
-          </a:fontRef>
-        </p:style>
-        <p:txBody>
-          <a:bodyPr rtlCol="0" anchor="ctr"/>
-          <a:lstStyle/>
-          <a:p>
-            <a:pPr algn="ctr"/>
-          </a:p>
-        </p:txBody>
-      </p:sp>
-      <p:sp>
-        <p:nvSpPr>
-          <p:cNvPr id="5" name="TextBox 4"/>
-          <p:cNvSpPr txBox="1"/>
-          <p:nvPr/>
-        </p:nvSpPr>
-        <p:spPr>
-          <a:xfrm>
-            <a:off x="9631429" y="426720"/>
-            <a:ext cx="1097280" cy="365760"/>
-          </a:xfrm>
-          <a:prstGeom prst="rect">
-            <a:avLst/>
-          </a:prstGeom>
-          <a:noFill/>
-        </p:spPr>
-        <p:txBody>
-          <a:bodyPr wrap="none">
-            <a:spAutoFit/>
-          </a:bodyPr>
-          <a:lstStyle/>
-          <a:p>
-            <a:r>
-              <a:rPr sz="1600" b="1">
-                <a:solidFill>
-                  <a:srgbClr val="6C757D"/>
-                </a:solidFill>
-                <a:latin typeface="Microsoft YaHei"/>
-              </a:rPr>
-              <a:t>08 / 08</a:t>
-            </a:r>
-          </a:p>
-        </p:txBody>
-      </p:sp>
-      <p:sp>
-        <p:nvSpPr>
-          <p:cNvPr id="6" name="Rounded Rectangle 5"/>
-          <p:cNvSpPr/>
-          <p:nvPr/>
-        </p:nvSpPr>
-        <p:spPr>
-          <a:xfrm>
-            <a:off x="571500" y="1066800"/>
-            <a:ext cx="11048695" cy="4389120"/>
-          </a:xfrm>
-          <a:prstGeom prst="roundRect">
-            <a:avLst/>
-          </a:prstGeom>
-          <a:solidFill>
-            <a:srgbClr val="FFFFFF"/>
-          </a:solidFill>
-          <a:ln w="12700">
-            <a:solidFill>
-              <a:srgbClr val="E2E2D9"/>
-            </a:solidFill>
-          </a:ln>
-        </p:spPr>
-        <p:style>
-          <a:lnRef idx="1">
-            <a:schemeClr val="accent1"/>
-          </a:lnRef>
-          <a:fillRef idx="3">
-            <a:schemeClr val="accent1"/>
-          </a:fillRef>
-          <a:effectRef idx="2">
-            <a:schemeClr val="accent1"/>
-          </a:effectRef>
-          <a:fontRef idx="minor">
-            <a:schemeClr val="lt1"/>
-          </a:fontRef>
-        </p:style>
-        <p:txBody>
-          <a:bodyPr rtlCol="0" anchor="ctr"/>
-          <a:lstStyle/>
-          <a:p>
-            <a:pPr algn="ctr"/>
-          </a:p>
-        </p:txBody>
-      </p:sp>
-      <p:sp>
-        <p:nvSpPr>
-          <p:cNvPr id="7" name="Rectangle 6"/>
-          <p:cNvSpPr/>
-          <p:nvPr/>
-        </p:nvSpPr>
-        <p:spPr>
-          <a:xfrm>
-            <a:off x="708660" y="1322832"/>
-            <a:ext cx="50800" cy="320040"/>
-          </a:xfrm>
-          <a:prstGeom prst="rect">
-            <a:avLst/>
-          </a:prstGeom>
-          <a:solidFill>
-            <a:srgbClr val="E09F68"/>
-          </a:solidFill>
-          <a:ln>
-            <a:noFill/>
-          </a:ln>
-        </p:spPr>
-        <p:style>
-          <a:lnRef idx="1">
-            <a:schemeClr val="accent1"/>
-          </a:lnRef>
-          <a:fillRef idx="3">
-            <a:schemeClr val="accent1"/>
-          </a:fillRef>
-          <a:effectRef idx="2">
-            <a:schemeClr val="accent1"/>
-          </a:effectRef>
-          <a:fontRef idx="minor">
-            <a:schemeClr val="lt1"/>
-          </a:fontRef>
-        </p:style>
-        <p:txBody>
-          <a:bodyPr rtlCol="0" anchor="ctr"/>
-          <a:lstStyle/>
-          <a:p>
-            <a:pPr algn="ctr"/>
-          </a:p>
-        </p:txBody>
-      </p:sp>
-      <p:sp>
-        <p:nvSpPr>
-          <p:cNvPr id="8" name="TextBox 7"/>
-          <p:cNvSpPr txBox="1"/>
-          <p:nvPr/>
-        </p:nvSpPr>
-        <p:spPr>
-          <a:xfrm>
-            <a:off x="827532" y="1231392"/>
-            <a:ext cx="10682935" cy="4114800"/>
-          </a:xfrm>
-          <a:prstGeom prst="rect">
-            <a:avLst/>
-          </a:prstGeom>
-          <a:noFill/>
-        </p:spPr>
-        <p:txBody>
-          <a:bodyPr wrap="square">
-            <a:spAutoFit/>
-          </a:bodyPr>
-          <a:lstStyle/>
-          <a:p>
-            <a:pPr>
-              <a:spcAft>
-                <a:spcPts val="1000"/>
-              </a:spcAft>
-            </a:pPr>
-            <a:r>
-              <a:rPr sz="2000" b="1">
-                <a:solidFill>
-                  <a:srgbClr val="6B9080"/>
-                </a:solidFill>
-                <a:latin typeface="Microsoft YaHei"/>
-              </a:rPr>
-              <a:t>微型神话创作</a:t>
-            </a:r>
-          </a:p>
-          <a:p>
-            <a:pPr>
-              <a:spcAft>
-                <a:spcPts val="600"/>
-              </a:spcAft>
-            </a:pPr>
-            <a:r>
-              <a:rPr sz="1600" b="0">
-                <a:solidFill>
-                  <a:srgbClr val="2B2D42"/>
-                </a:solidFill>
-                <a:latin typeface="Microsoft YaHei"/>
-              </a:rPr>
-              <a:t>选答题目：</a:t>
-            </a:r>
-          </a:p>
-          <a:p>
-            <a:pPr>
-              <a:spcAft>
-                <a:spcPts val="600"/>
-              </a:spcAft>
-            </a:pPr>
-            <a:r>
-              <a:rPr sz="1600" b="0">
-                <a:solidFill>
-                  <a:srgbClr val="2B2D42"/>
-                </a:solidFill>
-                <a:latin typeface="Microsoft YaHei"/>
-              </a:rPr>
-              <a:t>• 请选择一个自然现象（例如：为什么会有四季、太阳为什么东升西落、雷电是如何产生的）。</a:t>
-            </a:r>
-          </a:p>
-          <a:p>
-            <a:pPr>
-              <a:spcAft>
-                <a:spcPts val="600"/>
-              </a:spcAft>
-            </a:pPr>
-            <a:r>
-              <a:rPr sz="1600" b="0">
-                <a:solidFill>
-                  <a:srgbClr val="2B2D42"/>
-                </a:solidFill>
-                <a:latin typeface="Microsoft YaHei"/>
-              </a:rPr>
-              <a:t/>
-            </a:r>
-          </a:p>
-          <a:p>
-            <a:pPr>
-              <a:spcAft>
-                <a:spcPts val="600"/>
-              </a:spcAft>
-            </a:pPr>
-            <a:r>
-              <a:rPr sz="1600" b="0">
-                <a:solidFill>
-                  <a:srgbClr val="2B2D42"/>
-                </a:solidFill>
-                <a:latin typeface="Microsoft YaHei"/>
-              </a:rPr>
-              <a:t>任务要求：</a:t>
-            </a:r>
-          </a:p>
-          <a:p>
-            <a:pPr>
-              <a:spcAft>
-                <a:spcPts val="600"/>
-              </a:spcAft>
-            </a:pPr>
-            <a:r>
-              <a:rPr sz="1600" b="0">
-                <a:solidFill>
-                  <a:srgbClr val="2B2D42"/>
-                </a:solidFill>
-                <a:latin typeface="Microsoft YaHei"/>
-              </a:rPr>
-              <a:t>1. 假想你自己是一名远古先民。</a:t>
-            </a:r>
-          </a:p>
-          <a:p>
-            <a:pPr>
-              <a:spcAft>
-                <a:spcPts val="600"/>
-              </a:spcAft>
-            </a:pPr>
-            <a:r>
-              <a:rPr sz="1600" b="0">
-                <a:solidFill>
-                  <a:srgbClr val="2B2D42"/>
-                </a:solidFill>
-                <a:latin typeface="Microsoft YaHei"/>
-              </a:rPr>
-              <a:t>2. 找到一个现实依托，展开合理想象。</a:t>
-            </a:r>
-          </a:p>
-          <a:p>
-            <a:pPr>
-              <a:spcAft>
-                <a:spcPts val="600"/>
-              </a:spcAft>
-            </a:pPr>
-            <a:r>
-              <a:rPr sz="1600" b="0">
-                <a:solidFill>
-                  <a:srgbClr val="2B2D42"/>
-                </a:solidFill>
-                <a:latin typeface="Microsoft YaHei"/>
-              </a:rPr>
-              <a:t>3. 写一段 150 字左右的远古神话片段。</a:t>
+              <a:t>创造与生命 · 在神话中照见人类对存在的追问</a:t>
             </a:r>
           </a:p>
         </p:txBody>
